--- a/poster/recourse_audit_poster.pptx
+++ b/poster/recourse_audit_poster.pptx
@@ -4,12 +4,12 @@
   <p:sldMasterIdLst>
     <p:sldMasterId id="2147483648" r:id="rId1"/>
   </p:sldMasterIdLst>
+  <p:notesMasterIdLst>
+    <p:notesMasterId r:id="rId3"/>
+  </p:notesMasterIdLst>
   <p:sldIdLst>
     <p:sldId id="256" r:id="rId2"/>
   </p:sldIdLst>
-  <p:notesMasterIdLst>
-    <p:notesMasterId r:id="rId3"/>
-  </p:notesMasterIdLst>
   <p:sldSz cx="32918400" cy="21945600"/>
   <p:notesSz cx="21945600" cy="32918400"/>
   <p:defaultTextStyle>
@@ -107,7 +107,7 @@
   <p:extLst>
     <p:ext uri="{521415D9-36F7-43E2-AB2F-B90AF26B5E84}">
       <p14:sectionLst xmlns:p14="http://schemas.microsoft.com/office/powerpoint/2010/main">
-        <p14:section name="Poster" id="{b996ecc2-9f13-649d-e3b9-5e9fb458c8ca}">
+        <p14:section name="Poster" id="{08520BAA-C8E6-E6EE-7C9A-63D54934CFC0}">
           <p14:sldIdLst>
             <p14:sldId id="256"/>
           </p14:sldIdLst>
@@ -122,14 +122,17 @@
 </file>
 
 <file path=ppt/charts/chart1.xml><?xml version="1.0" encoding="utf-8"?>
-<c:chartSpace xmlns:c="http://schemas.openxmlformats.org/drawingml/2006/chart" xmlns:a="http://schemas.openxmlformats.org/drawingml/2006/main" xmlns:r="http://schemas.openxmlformats.org/officeDocument/2006/relationships">
+<c:chartSpace xmlns:c="http://schemas.openxmlformats.org/drawingml/2006/chart" xmlns:a="http://schemas.openxmlformats.org/drawingml/2006/main" xmlns:r="http://schemas.openxmlformats.org/officeDocument/2006/relationships" xmlns:c16r2="http://schemas.microsoft.com/office/drawing/2015/06/chart">
   <c:date1904 val="0"/>
+  <c:lang val="en-US"/>
   <c:roundedCorners val="1"/>
+  <c:style val="2"/>
   <c:chart>
     <c:autoTitleDeleted val="1"/>
     <c:plotArea>
       <c:layout/>
       <c:lineChart>
+        <c:grouping val="standard"/>
         <c:varyColors val="0"/>
         <c:ser>
           <c:idx val="0"/>
@@ -146,144 +149,100 @@
             </c:strRef>
           </c:tx>
           <c:spPr>
-            <a:solidFill>
-              <a:srgbClr val="D1495B"/>
-            </a:solidFill>
-            <a:ln w="50800" cap="flat">
+            <a:ln w="63500" cap="flat">
               <a:solidFill>
-                <a:srgbClr val="D1495B"/>
+                <a:srgbClr val="C84E00"/>
               </a:solidFill>
               <a:prstDash val="solid"/>
               <a:round/>
             </a:ln>
             <a:effectLst/>
           </c:spPr>
-          <c:invertIfNegative val="0"/>
-          <c:dLbls>
-            <c:numFmt formatCode="#,##0" sourceLinked="0"/>
-            <c:txPr>
-              <a:bodyPr/>
-              <a:lstStyle/>
-              <a:p>
-                <a:pPr>
-                  <a:defRPr b="0" i="0" strike="noStrike" sz="1200" u="none">
-                    <a:solidFill>
-                      <a:srgbClr val="000000"/>
-                    </a:solidFill>
-                    <a:latin typeface="Arial"/>
-                  </a:defRPr>
-                </a:pPr>
-              </a:p>
-            </c:txPr>
-            <c:showLegendKey val="0"/>
-            <c:showVal val="0"/>
-            <c:showCatName val="0"/>
-            <c:showSerName val="0"/>
-            <c:showPercent val="0"/>
-            <c:showBubbleSize val="0"/>
-            <c:showLeaderLines val="0"/>
-          </c:dLbls>
           <c:marker>
             <c:symbol val="none"/>
-            <c:size val="6"/>
-            <c:spPr>
-              <a:solidFill>
-                <a:srgbClr val="D1495B"/>
-              </a:solidFill>
-              <a:ln w="9525" cap="flat">
-                <a:solidFill>
-                  <a:srgbClr val="D1495B"/>
-                </a:solidFill>
-                <a:prstDash val="solid"/>
-                <a:round/>
-              </a:ln>
-              <a:effectLst/>
-            </c:spPr>
           </c:marker>
           <c:cat>
-            <c:multiLvlStrRef>
+            <c:strRef>
               <c:f>Sheet1!$A$2:$A$26</c:f>
-              <c:multiLvlStrCache>
+              <c:strCache>
                 <c:ptCount val="25"/>
-                <c:lvl>
-                  <c:pt idx="0">
-                    <c:v>0</c:v>
-                  </c:pt>
-                  <c:pt idx="1">
-                    <c:v>0.5</c:v>
-                  </c:pt>
-                  <c:pt idx="2">
-                    <c:v>1</c:v>
-                  </c:pt>
-                  <c:pt idx="3">
-                    <c:v>1.5</c:v>
-                  </c:pt>
-                  <c:pt idx="4">
-                    <c:v>2</c:v>
-                  </c:pt>
-                  <c:pt idx="5">
-                    <c:v>2.5</c:v>
-                  </c:pt>
-                  <c:pt idx="6">
-                    <c:v>3</c:v>
-                  </c:pt>
-                  <c:pt idx="7">
-                    <c:v>3.5</c:v>
-                  </c:pt>
-                  <c:pt idx="8">
-                    <c:v>4</c:v>
-                  </c:pt>
-                  <c:pt idx="9">
-                    <c:v>4.5</c:v>
-                  </c:pt>
-                  <c:pt idx="10">
-                    <c:v>5</c:v>
-                  </c:pt>
-                  <c:pt idx="11">
-                    <c:v>5.5</c:v>
-                  </c:pt>
-                  <c:pt idx="12">
-                    <c:v>6</c:v>
-                  </c:pt>
-                  <c:pt idx="13">
-                    <c:v>6.5</c:v>
-                  </c:pt>
-                  <c:pt idx="14">
-                    <c:v>7</c:v>
-                  </c:pt>
-                  <c:pt idx="15">
-                    <c:v>7.5</c:v>
-                  </c:pt>
-                  <c:pt idx="16">
-                    <c:v>8</c:v>
-                  </c:pt>
-                  <c:pt idx="17">
-                    <c:v>8.5</c:v>
-                  </c:pt>
-                  <c:pt idx="18">
-                    <c:v>9</c:v>
-                  </c:pt>
-                  <c:pt idx="19">
-                    <c:v>9.5</c:v>
-                  </c:pt>
-                  <c:pt idx="20">
-                    <c:v>10</c:v>
-                  </c:pt>
-                  <c:pt idx="21">
-                    <c:v>10.5</c:v>
-                  </c:pt>
-                  <c:pt idx="22">
-                    <c:v>11</c:v>
-                  </c:pt>
-                  <c:pt idx="23">
-                    <c:v>11.5</c:v>
-                  </c:pt>
-                  <c:pt idx="24">
-                    <c:v>12</c:v>
-                  </c:pt>
-                </c:lvl>
-              </c:multiLvlStrCache>
-            </c:multiLvlStrRef>
+                <c:pt idx="0">
+                  <c:v>0</c:v>
+                </c:pt>
+                <c:pt idx="1">
+                  <c:v>0.5</c:v>
+                </c:pt>
+                <c:pt idx="2">
+                  <c:v>1</c:v>
+                </c:pt>
+                <c:pt idx="3">
+                  <c:v>1.5</c:v>
+                </c:pt>
+                <c:pt idx="4">
+                  <c:v>2</c:v>
+                </c:pt>
+                <c:pt idx="5">
+                  <c:v>2.5</c:v>
+                </c:pt>
+                <c:pt idx="6">
+                  <c:v>3</c:v>
+                </c:pt>
+                <c:pt idx="7">
+                  <c:v>3.5</c:v>
+                </c:pt>
+                <c:pt idx="8">
+                  <c:v>4</c:v>
+                </c:pt>
+                <c:pt idx="9">
+                  <c:v>4.5</c:v>
+                </c:pt>
+                <c:pt idx="10">
+                  <c:v>5</c:v>
+                </c:pt>
+                <c:pt idx="11">
+                  <c:v>5.5</c:v>
+                </c:pt>
+                <c:pt idx="12">
+                  <c:v>6</c:v>
+                </c:pt>
+                <c:pt idx="13">
+                  <c:v>6.5</c:v>
+                </c:pt>
+                <c:pt idx="14">
+                  <c:v>7</c:v>
+                </c:pt>
+                <c:pt idx="15">
+                  <c:v>7.5</c:v>
+                </c:pt>
+                <c:pt idx="16">
+                  <c:v>8</c:v>
+                </c:pt>
+                <c:pt idx="17">
+                  <c:v>8.5</c:v>
+                </c:pt>
+                <c:pt idx="18">
+                  <c:v>9</c:v>
+                </c:pt>
+                <c:pt idx="19">
+                  <c:v>9.5</c:v>
+                </c:pt>
+                <c:pt idx="20">
+                  <c:v>10</c:v>
+                </c:pt>
+                <c:pt idx="21">
+                  <c:v>10.5</c:v>
+                </c:pt>
+                <c:pt idx="22">
+                  <c:v>11</c:v>
+                </c:pt>
+                <c:pt idx="23">
+                  <c:v>11.5</c:v>
+                </c:pt>
+                <c:pt idx="24">
+                  <c:v>12</c:v>
+                </c:pt>
+              </c:strCache>
+            </c:strRef>
           </c:cat>
           <c:val>
             <c:numRef>
@@ -304,37 +263,37 @@
                   <c:v>0</c:v>
                 </c:pt>
                 <c:pt idx="4">
-                  <c:v>0.0094</c:v>
+                  <c:v>9.4000000000000004E-3</c:v>
                 </c:pt>
                 <c:pt idx="5">
-                  <c:v>0.0142</c:v>
+                  <c:v>1.4200000000000001E-2</c:v>
                 </c:pt>
                 <c:pt idx="6">
-                  <c:v>0.0189</c:v>
+                  <c:v>1.89E-2</c:v>
                 </c:pt>
                 <c:pt idx="7">
-                  <c:v>0.0425</c:v>
+                  <c:v>4.2500000000000003E-2</c:v>
                 </c:pt>
                 <c:pt idx="8">
-                  <c:v>0.0519</c:v>
+                  <c:v>5.1900000000000002E-2</c:v>
                 </c:pt>
                 <c:pt idx="9">
-                  <c:v>0.0755</c:v>
+                  <c:v>7.5499999999999998E-2</c:v>
                 </c:pt>
                 <c:pt idx="10">
-                  <c:v>0.0755</c:v>
+                  <c:v>7.5499999999999998E-2</c:v>
                 </c:pt>
                 <c:pt idx="11">
-                  <c:v>0.0802</c:v>
+                  <c:v>8.0199999999999994E-2</c:v>
                 </c:pt>
                 <c:pt idx="12">
-                  <c:v>0.0802</c:v>
+                  <c:v>8.0199999999999994E-2</c:v>
                 </c:pt>
                 <c:pt idx="13">
-                  <c:v>0.0802</c:v>
+                  <c:v>8.0199999999999994E-2</c:v>
                 </c:pt>
                 <c:pt idx="14">
-                  <c:v>0.0802</c:v>
+                  <c:v>8.0199999999999994E-2</c:v>
                 </c:pt>
                 <c:pt idx="15">
                   <c:v>0.1038</c:v>
@@ -370,6 +329,11 @@
             </c:numRef>
           </c:val>
           <c:smooth val="0"/>
+          <c:extLst>
+            <c:ext xmlns:c16="http://schemas.microsoft.com/office/drawing/2014/chart" uri="{C3380CC4-5D6E-409C-BE32-E72D297353CC}">
+              <c16:uniqueId val="{00000000-1436-0A4E-B0D6-23A6575F7EDB}"/>
+            </c:ext>
+          </c:extLst>
         </c:ser>
         <c:ser>
           <c:idx val="1"/>
@@ -386,144 +350,100 @@
             </c:strRef>
           </c:tx>
           <c:spPr>
-            <a:solidFill>
-              <a:srgbClr val="5A6472"/>
-            </a:solidFill>
-            <a:ln w="50800" cap="flat">
+            <a:ln w="63500" cap="flat">
               <a:solidFill>
-                <a:srgbClr val="5A6472"/>
+                <a:srgbClr val="012169"/>
               </a:solidFill>
               <a:prstDash val="solid"/>
               <a:round/>
             </a:ln>
             <a:effectLst/>
           </c:spPr>
-          <c:invertIfNegative val="0"/>
-          <c:dLbls>
-            <c:numFmt formatCode="#,##0" sourceLinked="0"/>
-            <c:txPr>
-              <a:bodyPr/>
-              <a:lstStyle/>
-              <a:p>
-                <a:pPr>
-                  <a:defRPr b="0" i="0" strike="noStrike" sz="1200" u="none">
-                    <a:solidFill>
-                      <a:srgbClr val="000000"/>
-                    </a:solidFill>
-                    <a:latin typeface="Arial"/>
-                  </a:defRPr>
-                </a:pPr>
-              </a:p>
-            </c:txPr>
-            <c:showLegendKey val="0"/>
-            <c:showVal val="0"/>
-            <c:showCatName val="0"/>
-            <c:showSerName val="0"/>
-            <c:showPercent val="0"/>
-            <c:showBubbleSize val="0"/>
-            <c:showLeaderLines val="0"/>
-          </c:dLbls>
           <c:marker>
             <c:symbol val="none"/>
-            <c:size val="6"/>
-            <c:spPr>
-              <a:solidFill>
-                <a:srgbClr val="5A6472"/>
-              </a:solidFill>
-              <a:ln w="9525" cap="flat">
-                <a:solidFill>
-                  <a:srgbClr val="5A6472"/>
-                </a:solidFill>
-                <a:prstDash val="solid"/>
-                <a:round/>
-              </a:ln>
-              <a:effectLst/>
-            </c:spPr>
           </c:marker>
           <c:cat>
-            <c:multiLvlStrRef>
+            <c:strRef>
               <c:f>Sheet1!$A$2:$A$26</c:f>
-              <c:multiLvlStrCache>
+              <c:strCache>
                 <c:ptCount val="25"/>
-                <c:lvl>
-                  <c:pt idx="0">
-                    <c:v>0</c:v>
-                  </c:pt>
-                  <c:pt idx="1">
-                    <c:v>0.5</c:v>
-                  </c:pt>
-                  <c:pt idx="2">
-                    <c:v>1</c:v>
-                  </c:pt>
-                  <c:pt idx="3">
-                    <c:v>1.5</c:v>
-                  </c:pt>
-                  <c:pt idx="4">
-                    <c:v>2</c:v>
-                  </c:pt>
-                  <c:pt idx="5">
-                    <c:v>2.5</c:v>
-                  </c:pt>
-                  <c:pt idx="6">
-                    <c:v>3</c:v>
-                  </c:pt>
-                  <c:pt idx="7">
-                    <c:v>3.5</c:v>
-                  </c:pt>
-                  <c:pt idx="8">
-                    <c:v>4</c:v>
-                  </c:pt>
-                  <c:pt idx="9">
-                    <c:v>4.5</c:v>
-                  </c:pt>
-                  <c:pt idx="10">
-                    <c:v>5</c:v>
-                  </c:pt>
-                  <c:pt idx="11">
-                    <c:v>5.5</c:v>
-                  </c:pt>
-                  <c:pt idx="12">
-                    <c:v>6</c:v>
-                  </c:pt>
-                  <c:pt idx="13">
-                    <c:v>6.5</c:v>
-                  </c:pt>
-                  <c:pt idx="14">
-                    <c:v>7</c:v>
-                  </c:pt>
-                  <c:pt idx="15">
-                    <c:v>7.5</c:v>
-                  </c:pt>
-                  <c:pt idx="16">
-                    <c:v>8</c:v>
-                  </c:pt>
-                  <c:pt idx="17">
-                    <c:v>8.5</c:v>
-                  </c:pt>
-                  <c:pt idx="18">
-                    <c:v>9</c:v>
-                  </c:pt>
-                  <c:pt idx="19">
-                    <c:v>9.5</c:v>
-                  </c:pt>
-                  <c:pt idx="20">
-                    <c:v>10</c:v>
-                  </c:pt>
-                  <c:pt idx="21">
-                    <c:v>10.5</c:v>
-                  </c:pt>
-                  <c:pt idx="22">
-                    <c:v>11</c:v>
-                  </c:pt>
-                  <c:pt idx="23">
-                    <c:v>11.5</c:v>
-                  </c:pt>
-                  <c:pt idx="24">
-                    <c:v>12</c:v>
-                  </c:pt>
-                </c:lvl>
-              </c:multiLvlStrCache>
-            </c:multiLvlStrRef>
+                <c:pt idx="0">
+                  <c:v>0</c:v>
+                </c:pt>
+                <c:pt idx="1">
+                  <c:v>0.5</c:v>
+                </c:pt>
+                <c:pt idx="2">
+                  <c:v>1</c:v>
+                </c:pt>
+                <c:pt idx="3">
+                  <c:v>1.5</c:v>
+                </c:pt>
+                <c:pt idx="4">
+                  <c:v>2</c:v>
+                </c:pt>
+                <c:pt idx="5">
+                  <c:v>2.5</c:v>
+                </c:pt>
+                <c:pt idx="6">
+                  <c:v>3</c:v>
+                </c:pt>
+                <c:pt idx="7">
+                  <c:v>3.5</c:v>
+                </c:pt>
+                <c:pt idx="8">
+                  <c:v>4</c:v>
+                </c:pt>
+                <c:pt idx="9">
+                  <c:v>4.5</c:v>
+                </c:pt>
+                <c:pt idx="10">
+                  <c:v>5</c:v>
+                </c:pt>
+                <c:pt idx="11">
+                  <c:v>5.5</c:v>
+                </c:pt>
+                <c:pt idx="12">
+                  <c:v>6</c:v>
+                </c:pt>
+                <c:pt idx="13">
+                  <c:v>6.5</c:v>
+                </c:pt>
+                <c:pt idx="14">
+                  <c:v>7</c:v>
+                </c:pt>
+                <c:pt idx="15">
+                  <c:v>7.5</c:v>
+                </c:pt>
+                <c:pt idx="16">
+                  <c:v>8</c:v>
+                </c:pt>
+                <c:pt idx="17">
+                  <c:v>8.5</c:v>
+                </c:pt>
+                <c:pt idx="18">
+                  <c:v>9</c:v>
+                </c:pt>
+                <c:pt idx="19">
+                  <c:v>9.5</c:v>
+                </c:pt>
+                <c:pt idx="20">
+                  <c:v>10</c:v>
+                </c:pt>
+                <c:pt idx="21">
+                  <c:v>10.5</c:v>
+                </c:pt>
+                <c:pt idx="22">
+                  <c:v>11</c:v>
+                </c:pt>
+                <c:pt idx="23">
+                  <c:v>11.5</c:v>
+                </c:pt>
+                <c:pt idx="24">
+                  <c:v>12</c:v>
+                </c:pt>
+              </c:strCache>
+            </c:strRef>
           </c:cat>
           <c:val>
             <c:numRef>
@@ -535,81 +455,86 @@
                   <c:v>0</c:v>
                 </c:pt>
                 <c:pt idx="1">
-                  <c:v>0.068</c:v>
+                  <c:v>6.8000000000000005E-2</c:v>
                 </c:pt>
                 <c:pt idx="2">
-                  <c:v>0.1395</c:v>
+                  <c:v>0.13950000000000001</c:v>
                 </c:pt>
                 <c:pt idx="3">
-                  <c:v>0.2483</c:v>
+                  <c:v>0.24829999999999999</c:v>
                 </c:pt>
                 <c:pt idx="4">
-                  <c:v>0.3537</c:v>
+                  <c:v>0.35370000000000001</c:v>
                 </c:pt>
                 <c:pt idx="5">
-                  <c:v>0.5238</c:v>
+                  <c:v>0.52380000000000004</c:v>
                 </c:pt>
                 <c:pt idx="6">
-                  <c:v>0.5952</c:v>
+                  <c:v>0.59519999999999995</c:v>
                 </c:pt>
                 <c:pt idx="7">
-                  <c:v>0.6667</c:v>
+                  <c:v>0.66669999999999996</c:v>
                 </c:pt>
                 <c:pt idx="8">
-                  <c:v>0.7007</c:v>
+                  <c:v>0.70069999999999999</c:v>
                 </c:pt>
                 <c:pt idx="9">
-                  <c:v>0.7517</c:v>
+                  <c:v>0.75170000000000003</c:v>
                 </c:pt>
                 <c:pt idx="10">
-                  <c:v>0.7755</c:v>
+                  <c:v>0.77549999999999997</c:v>
                 </c:pt>
                 <c:pt idx="11">
-                  <c:v>0.8163</c:v>
+                  <c:v>0.81630000000000003</c:v>
                 </c:pt>
                 <c:pt idx="12">
-                  <c:v>0.8435</c:v>
+                  <c:v>0.84350000000000003</c:v>
                 </c:pt>
                 <c:pt idx="13">
-                  <c:v>0.8571</c:v>
+                  <c:v>0.85709999999999997</c:v>
                 </c:pt>
                 <c:pt idx="14">
-                  <c:v>0.8741</c:v>
+                  <c:v>0.87409999999999999</c:v>
                 </c:pt>
                 <c:pt idx="15">
-                  <c:v>0.8776</c:v>
+                  <c:v>0.87760000000000005</c:v>
                 </c:pt>
                 <c:pt idx="16">
-                  <c:v>0.8946</c:v>
+                  <c:v>0.89459999999999995</c:v>
                 </c:pt>
                 <c:pt idx="17">
-                  <c:v>0.9218</c:v>
+                  <c:v>0.92179999999999995</c:v>
                 </c:pt>
                 <c:pt idx="18">
-                  <c:v>0.9252</c:v>
+                  <c:v>0.92520000000000002</c:v>
                 </c:pt>
                 <c:pt idx="19">
-                  <c:v>0.9252</c:v>
+                  <c:v>0.92520000000000002</c:v>
                 </c:pt>
                 <c:pt idx="20">
-                  <c:v>0.932</c:v>
+                  <c:v>0.93200000000000005</c:v>
                 </c:pt>
                 <c:pt idx="21">
-                  <c:v>0.9388</c:v>
+                  <c:v>0.93879999999999997</c:v>
                 </c:pt>
                 <c:pt idx="22">
-                  <c:v>0.9388</c:v>
+                  <c:v>0.93879999999999997</c:v>
                 </c:pt>
                 <c:pt idx="23">
-                  <c:v>0.9388</c:v>
+                  <c:v>0.93879999999999997</c:v>
                 </c:pt>
                 <c:pt idx="24">
-                  <c:v>0.9388</c:v>
+                  <c:v>0.93879999999999997</c:v>
                 </c:pt>
               </c:numCache>
             </c:numRef>
           </c:val>
           <c:smooth val="0"/>
+          <c:extLst>
+            <c:ext xmlns:c16="http://schemas.microsoft.com/office/drawing/2014/chart" uri="{C3380CC4-5D6E-409C-BE32-E72D297353CC}">
+              <c16:uniqueId val="{00000001-1436-0A4E-B0D6-23A6575F7EDB}"/>
+            </c:ext>
+          </c:extLst>
         </c:ser>
         <c:ser>
           <c:idx val="2"/>
@@ -626,144 +551,100 @@
             </c:strRef>
           </c:tx>
           <c:spPr>
-            <a:solidFill>
-              <a:srgbClr val="B3BCC8"/>
-            </a:solidFill>
-            <a:ln w="50800" cap="flat">
+            <a:ln w="63500" cap="flat">
               <a:solidFill>
-                <a:srgbClr val="B3BCC8"/>
+                <a:srgbClr val="B5B5B5"/>
               </a:solidFill>
               <a:prstDash val="solid"/>
               <a:round/>
             </a:ln>
             <a:effectLst/>
           </c:spPr>
-          <c:invertIfNegative val="0"/>
-          <c:dLbls>
-            <c:numFmt formatCode="#,##0" sourceLinked="0"/>
-            <c:txPr>
-              <a:bodyPr/>
-              <a:lstStyle/>
-              <a:p>
-                <a:pPr>
-                  <a:defRPr b="0" i="0" strike="noStrike" sz="1200" u="none">
-                    <a:solidFill>
-                      <a:srgbClr val="000000"/>
-                    </a:solidFill>
-                    <a:latin typeface="Arial"/>
-                  </a:defRPr>
-                </a:pPr>
-              </a:p>
-            </c:txPr>
-            <c:showLegendKey val="0"/>
-            <c:showVal val="0"/>
-            <c:showCatName val="0"/>
-            <c:showSerName val="0"/>
-            <c:showPercent val="0"/>
-            <c:showBubbleSize val="0"/>
-            <c:showLeaderLines val="0"/>
-          </c:dLbls>
           <c:marker>
             <c:symbol val="none"/>
-            <c:size val="6"/>
-            <c:spPr>
-              <a:solidFill>
-                <a:srgbClr val="B3BCC8"/>
-              </a:solidFill>
-              <a:ln w="9525" cap="flat">
-                <a:solidFill>
-                  <a:srgbClr val="B3BCC8"/>
-                </a:solidFill>
-                <a:prstDash val="solid"/>
-                <a:round/>
-              </a:ln>
-              <a:effectLst/>
-            </c:spPr>
           </c:marker>
           <c:cat>
-            <c:multiLvlStrRef>
+            <c:strRef>
               <c:f>Sheet1!$A$2:$A$26</c:f>
-              <c:multiLvlStrCache>
+              <c:strCache>
                 <c:ptCount val="25"/>
-                <c:lvl>
-                  <c:pt idx="0">
-                    <c:v>0</c:v>
-                  </c:pt>
-                  <c:pt idx="1">
-                    <c:v>0.5</c:v>
-                  </c:pt>
-                  <c:pt idx="2">
-                    <c:v>1</c:v>
-                  </c:pt>
-                  <c:pt idx="3">
-                    <c:v>1.5</c:v>
-                  </c:pt>
-                  <c:pt idx="4">
-                    <c:v>2</c:v>
-                  </c:pt>
-                  <c:pt idx="5">
-                    <c:v>2.5</c:v>
-                  </c:pt>
-                  <c:pt idx="6">
-                    <c:v>3</c:v>
-                  </c:pt>
-                  <c:pt idx="7">
-                    <c:v>3.5</c:v>
-                  </c:pt>
-                  <c:pt idx="8">
-                    <c:v>4</c:v>
-                  </c:pt>
-                  <c:pt idx="9">
-                    <c:v>4.5</c:v>
-                  </c:pt>
-                  <c:pt idx="10">
-                    <c:v>5</c:v>
-                  </c:pt>
-                  <c:pt idx="11">
-                    <c:v>5.5</c:v>
-                  </c:pt>
-                  <c:pt idx="12">
-                    <c:v>6</c:v>
-                  </c:pt>
-                  <c:pt idx="13">
-                    <c:v>6.5</c:v>
-                  </c:pt>
-                  <c:pt idx="14">
-                    <c:v>7</c:v>
-                  </c:pt>
-                  <c:pt idx="15">
-                    <c:v>7.5</c:v>
-                  </c:pt>
-                  <c:pt idx="16">
-                    <c:v>8</c:v>
-                  </c:pt>
-                  <c:pt idx="17">
-                    <c:v>8.5</c:v>
-                  </c:pt>
-                  <c:pt idx="18">
-                    <c:v>9</c:v>
-                  </c:pt>
-                  <c:pt idx="19">
-                    <c:v>9.5</c:v>
-                  </c:pt>
-                  <c:pt idx="20">
-                    <c:v>10</c:v>
-                  </c:pt>
-                  <c:pt idx="21">
-                    <c:v>10.5</c:v>
-                  </c:pt>
-                  <c:pt idx="22">
-                    <c:v>11</c:v>
-                  </c:pt>
-                  <c:pt idx="23">
-                    <c:v>11.5</c:v>
-                  </c:pt>
-                  <c:pt idx="24">
-                    <c:v>12</c:v>
-                  </c:pt>
-                </c:lvl>
-              </c:multiLvlStrCache>
-            </c:multiLvlStrRef>
+                <c:pt idx="0">
+                  <c:v>0</c:v>
+                </c:pt>
+                <c:pt idx="1">
+                  <c:v>0.5</c:v>
+                </c:pt>
+                <c:pt idx="2">
+                  <c:v>1</c:v>
+                </c:pt>
+                <c:pt idx="3">
+                  <c:v>1.5</c:v>
+                </c:pt>
+                <c:pt idx="4">
+                  <c:v>2</c:v>
+                </c:pt>
+                <c:pt idx="5">
+                  <c:v>2.5</c:v>
+                </c:pt>
+                <c:pt idx="6">
+                  <c:v>3</c:v>
+                </c:pt>
+                <c:pt idx="7">
+                  <c:v>3.5</c:v>
+                </c:pt>
+                <c:pt idx="8">
+                  <c:v>4</c:v>
+                </c:pt>
+                <c:pt idx="9">
+                  <c:v>4.5</c:v>
+                </c:pt>
+                <c:pt idx="10">
+                  <c:v>5</c:v>
+                </c:pt>
+                <c:pt idx="11">
+                  <c:v>5.5</c:v>
+                </c:pt>
+                <c:pt idx="12">
+                  <c:v>6</c:v>
+                </c:pt>
+                <c:pt idx="13">
+                  <c:v>6.5</c:v>
+                </c:pt>
+                <c:pt idx="14">
+                  <c:v>7</c:v>
+                </c:pt>
+                <c:pt idx="15">
+                  <c:v>7.5</c:v>
+                </c:pt>
+                <c:pt idx="16">
+                  <c:v>8</c:v>
+                </c:pt>
+                <c:pt idx="17">
+                  <c:v>8.5</c:v>
+                </c:pt>
+                <c:pt idx="18">
+                  <c:v>9</c:v>
+                </c:pt>
+                <c:pt idx="19">
+                  <c:v>9.5</c:v>
+                </c:pt>
+                <c:pt idx="20">
+                  <c:v>10</c:v>
+                </c:pt>
+                <c:pt idx="21">
+                  <c:v>10.5</c:v>
+                </c:pt>
+                <c:pt idx="22">
+                  <c:v>11</c:v>
+                </c:pt>
+                <c:pt idx="23">
+                  <c:v>11.5</c:v>
+                </c:pt>
+                <c:pt idx="24">
+                  <c:v>12</c:v>
+                </c:pt>
+              </c:strCache>
+            </c:strRef>
           </c:cat>
           <c:val>
             <c:numRef>
@@ -775,110 +656,98 @@
                   <c:v>0</c:v>
                 </c:pt>
                 <c:pt idx="1">
-                  <c:v>0.085</c:v>
+                  <c:v>8.5000000000000006E-2</c:v>
                 </c:pt>
                 <c:pt idx="2">
-                  <c:v>0.1599</c:v>
+                  <c:v>0.15989999999999999</c:v>
                 </c:pt>
                 <c:pt idx="3">
-                  <c:v>0.2891</c:v>
+                  <c:v>0.28910000000000002</c:v>
                 </c:pt>
                 <c:pt idx="4">
-                  <c:v>0.4762</c:v>
+                  <c:v>0.47620000000000001</c:v>
                 </c:pt>
                 <c:pt idx="5">
-                  <c:v>0.6327</c:v>
+                  <c:v>0.63270000000000004</c:v>
                 </c:pt>
                 <c:pt idx="6">
-                  <c:v>0.7517</c:v>
+                  <c:v>0.75170000000000003</c:v>
                 </c:pt>
                 <c:pt idx="7">
-                  <c:v>0.8299</c:v>
+                  <c:v>0.82989999999999997</c:v>
                 </c:pt>
                 <c:pt idx="8">
-                  <c:v>0.8707</c:v>
+                  <c:v>0.87070000000000003</c:v>
                 </c:pt>
                 <c:pt idx="9">
-                  <c:v>0.8946</c:v>
+                  <c:v>0.89459999999999995</c:v>
                 </c:pt>
                 <c:pt idx="10">
-                  <c:v>0.9082</c:v>
+                  <c:v>0.90820000000000001</c:v>
                 </c:pt>
                 <c:pt idx="11">
-                  <c:v>0.9354</c:v>
+                  <c:v>0.93540000000000001</c:v>
                 </c:pt>
                 <c:pt idx="12">
-                  <c:v>0.9592</c:v>
+                  <c:v>0.95920000000000005</c:v>
                 </c:pt>
                 <c:pt idx="13">
-                  <c:v>0.9762</c:v>
+                  <c:v>0.97619999999999996</c:v>
                 </c:pt>
                 <c:pt idx="14">
-                  <c:v>0.9762</c:v>
+                  <c:v>0.97619999999999996</c:v>
                 </c:pt>
                 <c:pt idx="15">
-                  <c:v>0.9796</c:v>
+                  <c:v>0.97960000000000003</c:v>
                 </c:pt>
                 <c:pt idx="16">
-                  <c:v>0.9796</c:v>
+                  <c:v>0.97960000000000003</c:v>
                 </c:pt>
                 <c:pt idx="17">
-                  <c:v>0.983</c:v>
+                  <c:v>0.98299999999999998</c:v>
                 </c:pt>
                 <c:pt idx="18">
-                  <c:v>0.983</c:v>
+                  <c:v>0.98299999999999998</c:v>
                 </c:pt>
                 <c:pt idx="19">
-                  <c:v>0.983</c:v>
+                  <c:v>0.98299999999999998</c:v>
                 </c:pt>
                 <c:pt idx="20">
-                  <c:v>0.9864</c:v>
+                  <c:v>0.98640000000000005</c:v>
                 </c:pt>
                 <c:pt idx="21">
-                  <c:v>0.9864</c:v>
+                  <c:v>0.98640000000000005</c:v>
                 </c:pt>
                 <c:pt idx="22">
-                  <c:v>0.9864</c:v>
+                  <c:v>0.98640000000000005</c:v>
                 </c:pt>
                 <c:pt idx="23">
-                  <c:v>0.9864</c:v>
+                  <c:v>0.98640000000000005</c:v>
                 </c:pt>
                 <c:pt idx="24">
-                  <c:v>0.9864</c:v>
+                  <c:v>0.98640000000000005</c:v>
                 </c:pt>
               </c:numCache>
             </c:numRef>
           </c:val>
           <c:smooth val="0"/>
+          <c:extLst>
+            <c:ext xmlns:c16="http://schemas.microsoft.com/office/drawing/2014/chart" uri="{C3380CC4-5D6E-409C-BE32-E72D297353CC}">
+              <c16:uniqueId val="{00000002-1436-0A4E-B0D6-23A6575F7EDB}"/>
+            </c:ext>
+          </c:extLst>
         </c:ser>
         <c:dLbls>
-          <c:numFmt formatCode="#,##0" sourceLinked="0"/>
-          <c:txPr>
-            <a:bodyPr/>
-            <a:lstStyle/>
-            <a:p>
-              <a:pPr>
-                <a:defRPr b="0" i="0" strike="noStrike" sz="1200" u="none">
-                  <a:solidFill>
-                    <a:srgbClr val="000000"/>
-                  </a:solidFill>
-                  <a:latin typeface="Arial"/>
-                </a:defRPr>
-              </a:pPr>
-            </a:p>
-          </c:txPr>
           <c:showLegendKey val="0"/>
           <c:showVal val="0"/>
           <c:showCatName val="0"/>
           <c:showSerName val="0"/>
           <c:showPercent val="0"/>
           <c:showBubbleSize val="0"/>
-          <c:showLeaderLines val="0"/>
         </c:dLbls>
-        <c:marker val="1"/>
+        <c:smooth val="0"/>
         <c:axId val="2094734554"/>
         <c:axId val="2094734552"/>
-        <c:axId val="2094734556"/>
       </c:lineChart>
       <c:catAx>
         <c:axId val="2094734554"/>
@@ -894,26 +763,25 @@
               <a:lstStyle/>
               <a:p>
                 <a:pPr>
-                  <a:defRPr sz="1800" b="0" i="0" u="none" strike="noStrike">
+                  <a:defRPr sz="2000" b="0" i="0" u="none" strike="noStrike">
                     <a:solidFill>
-                      <a:srgbClr val="5A6472"/>
+                      <a:srgbClr val="666666"/>
                     </a:solidFill>
                     <a:latin typeface="+mn-lt"/>
                   </a:defRPr>
                 </a:pPr>
                 <a:r>
-                  <a:rPr sz="1800" b="0" i="0" u="none" strike="noStrike">
+                  <a:rPr lang="en-US" sz="2000" b="0" i="0" u="none" strike="noStrike">
                     <a:solidFill>
-                      <a:srgbClr val="5A6472"/>
+                      <a:srgbClr val="666666"/>
                     </a:solidFill>
                     <a:latin typeface="+mn-lt"/>
                   </a:rPr>
-                  <a:t>allowed effort (1 = one year of school; audit budget = 6)</a:t>
+                  <a:t>allowed effort (1 = a year of school)</a:t>
                 </a:r>
               </a:p>
             </c:rich>
           </c:tx>
-          <c:layout/>
           <c:overlay val="0"/>
         </c:title>
         <c:numFmt formatCode="General" sourceLinked="1"/>
@@ -934,9 +802,9 @@
           <a:lstStyle/>
           <a:p>
             <a:pPr>
-              <a:defRPr sz="1800" b="0" i="0" u="none" strike="noStrike">
-                <a:solidFill>
-                  <a:srgbClr val="5A6472"/>
+              <a:defRPr sz="2000" b="0" i="0" u="none" strike="noStrike">
+                <a:solidFill>
+                  <a:srgbClr val="666666"/>
                 </a:solidFill>
                 <a:latin typeface="+mn-lt"/>
               </a:defRPr>
@@ -948,8 +816,9 @@
         <c:crosses val="autoZero"/>
         <c:auto val="1"/>
         <c:lblAlgn val="ctr"/>
+        <c:lblOffset val="100"/>
+        <c:tickLblSkip val="4"/>
         <c:noMultiLvlLbl val="1"/>
-        <c:tickLblSkip val="4"/>
       </c:catAx>
       <c:valAx>
         <c:axId val="2094734552"/>
@@ -964,42 +833,13 @@
           <c:spPr>
             <a:ln w="12700" cap="flat">
               <a:solidFill>
-                <a:srgbClr val="D5DAE1"/>
+                <a:srgbClr val="D3D7DE"/>
               </a:solidFill>
               <a:prstDash val="solid"/>
               <a:round/>
             </a:ln>
           </c:spPr>
         </c:majorGridlines>
-        <c:title>
-          <c:tx>
-            <c:rich>
-              <a:bodyPr/>
-              <a:lstStyle/>
-              <a:p>
-                <a:pPr>
-                  <a:defRPr sz="1800" b="0" i="0" u="none" strike="noStrike">
-                    <a:solidFill>
-                      <a:srgbClr val="5A6472"/>
-                    </a:solidFill>
-                    <a:latin typeface="+mn-lt"/>
-                  </a:defRPr>
-                </a:pPr>
-                <a:r>
-                  <a:rPr sz="1800" b="0" i="0" u="none" strike="noStrike">
-                    <a:solidFill>
-                      <a:srgbClr val="5A6472"/>
-                    </a:solidFill>
-                    <a:latin typeface="+mn-lt"/>
-                  </a:rPr>
-                  <a:t>denied with recourse</a:t>
-                </a:r>
-              </a:p>
-            </c:rich>
-          </c:tx>
-          <c:layout/>
-          <c:overlay val="0"/>
-        </c:title>
         <c:numFmt formatCode="0%" sourceLinked="0"/>
         <c:majorTickMark val="out"/>
         <c:minorTickMark val="none"/>
@@ -1018,9 +858,9 @@
           <a:lstStyle/>
           <a:p>
             <a:pPr>
-              <a:defRPr sz="1800" b="0" i="0" u="none" strike="noStrike">
-                <a:solidFill>
-                  <a:srgbClr val="5A6472"/>
+              <a:defRPr sz="2000" b="0" i="0" u="none" strike="noStrike">
+                <a:solidFill>
+                  <a:srgbClr val="666666"/>
                 </a:solidFill>
                 <a:latin typeface="+mn-lt"/>
               </a:defRPr>
@@ -1031,7 +871,7 @@
         <c:crossAx val="2094734554"/>
         <c:crosses val="autoZero"/>
         <c:crossBetween val="between"/>
-        <c:majorUnit val="0.25"/>
+        <c:majorUnit val="0.5"/>
       </c:valAx>
       <c:spPr>
         <a:noFill/>
@@ -1049,9 +889,9 @@
         <a:lstStyle/>
         <a:p>
           <a:pPr>
-            <a:defRPr sz="2000">
+            <a:defRPr sz="2200">
               <a:solidFill>
-                <a:srgbClr val="1B2430"/>
+                <a:srgbClr val="262626"/>
               </a:solidFill>
               <a:latin typeface="+mn-lt"/>
               <a:cs typeface="+mn-lt"/>
@@ -1063,6 +903,7 @@
     </c:legend>
     <c:plotVisOnly val="1"/>
     <c:dispBlanksAs val="span"/>
+    <c:showDLblsOverMax val="1"/>
   </c:chart>
   <c:spPr>
     <a:noFill/>
@@ -1078,13 +919,25 @@
 </file>
 
 <file path=ppt/charts/chart2.xml><?xml version="1.0" encoding="utf-8"?>
-<c:chartSpace xmlns:c="http://schemas.openxmlformats.org/drawingml/2006/chart" xmlns:a="http://schemas.openxmlformats.org/drawingml/2006/main" xmlns:r="http://schemas.openxmlformats.org/officeDocument/2006/relationships">
+<c:chartSpace xmlns:c="http://schemas.openxmlformats.org/drawingml/2006/chart" xmlns:a="http://schemas.openxmlformats.org/drawingml/2006/main" xmlns:r="http://schemas.openxmlformats.org/officeDocument/2006/relationships" xmlns:c16r2="http://schemas.microsoft.com/office/drawing/2015/06/chart">
   <c:date1904 val="0"/>
+  <c:lang val="en-US"/>
   <c:roundedCorners val="1"/>
+  <c:style val="2"/>
   <c:chart>
     <c:autoTitleDeleted val="1"/>
     <c:plotArea>
-      <c:layout/>
+      <c:layout>
+        <c:manualLayout>
+          <c:layoutTarget val="inner"/>
+          <c:xMode val="edge"/>
+          <c:yMode val="edge"/>
+          <c:x val="0.21891951006124236"/>
+          <c:y val="6.3657407407407413E-2"/>
+          <c:w val="0.77059830964525655"/>
+          <c:h val="0.87268518518518523"/>
+        </c:manualLayout>
+      </c:layout>
       <c:barChart>
         <c:barDir val="bar"/>
         <c:grouping val="clustered"/>
@@ -1105,25 +958,33 @@
           </c:tx>
           <c:spPr>
             <a:solidFill>
-              <a:srgbClr val="EB6834"/>
+              <a:srgbClr val="C84E00"/>
             </a:solidFill>
             <a:effectLst/>
           </c:spPr>
           <c:invertIfNegative val="0"/>
           <c:dLbls>
             <c:numFmt formatCode="0%" sourceLinked="0"/>
+            <c:spPr>
+              <a:noFill/>
+              <a:ln>
+                <a:noFill/>
+              </a:ln>
+              <a:effectLst/>
+            </c:spPr>
             <c:txPr>
               <a:bodyPr/>
               <a:lstStyle/>
               <a:p>
                 <a:pPr>
-                  <a:defRPr b="0" i="0" strike="noStrike" sz="2000" u="none">
+                  <a:defRPr sz="2400" b="0" i="0" u="none" strike="noStrike">
                     <a:solidFill>
-                      <a:srgbClr val="1B2430"/>
+                      <a:srgbClr val="262626"/>
                     </a:solidFill>
                     <a:latin typeface="+mn-lt"/>
                   </a:defRPr>
                 </a:pPr>
+                <a:endParaRPr lang="en-US"/>
               </a:p>
             </c:txPr>
             <c:showLegendKey val="0"/>
@@ -1133,80 +994,64 @@
             <c:showPercent val="0"/>
             <c:showBubbleSize val="0"/>
             <c:showLeaderLines val="0"/>
+            <c:extLst>
+              <c:ext xmlns:c15="http://schemas.microsoft.com/office/drawing/2012/chart" uri="{CE6537A1-D6FC-4f65-9D91-7224C49458BB}">
+                <c15:showLeaderLines val="0"/>
+              </c:ext>
+            </c:extLst>
           </c:dLbls>
           <c:cat>
-            <c:multiLvlStrRef>
-              <c:f>Sheet1!$A$2:$A$5</c:f>
-              <c:multiLvlStrCache>
-                <c:ptCount val="4"/>
-                <c:lvl>
-                  <c:pt idx="0">
-                    <c:v>Marital status</c:v>
-                  </c:pt>
-                  <c:pt idx="1">
-                    <c:v>Age</c:v>
-                  </c:pt>
-                  <c:pt idx="2">
-                    <c:v>Birthplace</c:v>
-                  </c:pt>
-                  <c:pt idx="3">
-                    <c:v>Household role</c:v>
-                  </c:pt>
-                </c:lvl>
-              </c:multiLvlStrCache>
-            </c:multiLvlStrRef>
+            <c:strRef>
+              <c:f>Sheet1!$A$2:$A$4</c:f>
+              <c:strCache>
+                <c:ptCount val="3"/>
+                <c:pt idx="0">
+                  <c:v>Marital status</c:v>
+                </c:pt>
+                <c:pt idx="1">
+                  <c:v>Age</c:v>
+                </c:pt>
+                <c:pt idx="2">
+                  <c:v>Birthplace</c:v>
+                </c:pt>
+              </c:strCache>
+            </c:strRef>
           </c:cat>
           <c:val>
             <c:numRef>
-              <c:f>Sheet1!$B$2:$B$5</c:f>
+              <c:f>Sheet1!$B$2:$B$4</c:f>
               <c:numCache>
                 <c:formatCode>General</c:formatCode>
-                <c:ptCount val="4"/>
+                <c:ptCount val="3"/>
                 <c:pt idx="0">
-                  <c:v>0.5925</c:v>
+                  <c:v>0.59250000000000003</c:v>
                 </c:pt>
                 <c:pt idx="1">
-                  <c:v>0.2976</c:v>
+                  <c:v>0.29759999999999998</c:v>
                 </c:pt>
                 <c:pt idx="2">
-                  <c:v>0.0992</c:v>
-                </c:pt>
-                <c:pt idx="3">
-                  <c:v>0.0697</c:v>
+                  <c:v>9.9199999999999997E-2</c:v>
                 </c:pt>
               </c:numCache>
             </c:numRef>
           </c:val>
+          <c:extLst>
+            <c:ext xmlns:c16="http://schemas.microsoft.com/office/drawing/2014/chart" uri="{C3380CC4-5D6E-409C-BE32-E72D297353CC}">
+              <c16:uniqueId val="{00000000-518D-5A4B-9D92-205D14E2F504}"/>
+            </c:ext>
+          </c:extLst>
         </c:ser>
         <c:dLbls>
-          <c:numFmt formatCode="0%" sourceLinked="0"/>
-          <c:txPr>
-            <a:bodyPr/>
-            <a:lstStyle/>
-            <a:p>
-              <a:pPr>
-                <a:defRPr b="0" i="0" strike="noStrike" sz="2000" u="none">
-                  <a:solidFill>
-                    <a:srgbClr val="1B2430"/>
-                  </a:solidFill>
-                  <a:latin typeface="+mn-lt"/>
-                </a:defRPr>
-              </a:pPr>
-            </a:p>
-          </c:txPr>
           <c:showLegendKey val="0"/>
           <c:showVal val="1"/>
           <c:showCatName val="0"/>
           <c:showSerName val="0"/>
           <c:showPercent val="0"/>
           <c:showBubbleSize val="0"/>
-          <c:showLeaderLines val="0"/>
         </c:dLbls>
-        <c:gapWidth val="45"/>
-        <c:overlap val="0"/>
+        <c:gapWidth val="40"/>
         <c:axId val="2094734554"/>
         <c:axId val="2094734552"/>
-        <c:axId val="2094734556"/>
       </c:barChart>
       <c:catAx>
         <c:axId val="2094734554"/>
@@ -1233,9 +1078,9 @@
           <a:lstStyle/>
           <a:p>
             <a:pPr>
-              <a:defRPr sz="2000" b="0" i="0" u="none" strike="noStrike">
-                <a:solidFill>
-                  <a:srgbClr val="1B2430"/>
+              <a:defRPr sz="2400" b="0" i="0" u="none" strike="noStrike">
+                <a:solidFill>
+                  <a:srgbClr val="262626"/>
                 </a:solidFill>
                 <a:latin typeface="+mn-lt"/>
               </a:defRPr>
@@ -1247,6 +1092,7 @@
         <c:crosses val="autoZero"/>
         <c:auto val="1"/>
         <c:lblAlgn val="ctr"/>
+        <c:lblOffset val="100"/>
         <c:noMultiLvlLbl val="1"/>
       </c:catAx>
       <c:valAx>
@@ -1257,35 +1103,11 @@
           <c:min val="0"/>
         </c:scaling>
         <c:delete val="1"/>
-        <c:axPos val="b"/>
+        <c:axPos val="t"/>
         <c:numFmt formatCode="General" sourceLinked="0"/>
         <c:majorTickMark val="out"/>
         <c:minorTickMark val="none"/>
         <c:tickLblPos val="low"/>
-        <c:spPr>
-          <a:ln w="12700" cap="flat">
-            <a:solidFill>
-              <a:srgbClr val="888888"/>
-            </a:solidFill>
-            <a:prstDash val="solid"/>
-            <a:round/>
-          </a:ln>
-        </c:spPr>
-        <c:txPr>
-          <a:bodyPr/>
-          <a:lstStyle/>
-          <a:p>
-            <a:pPr>
-              <a:defRPr sz="1200" b="0" i="0" u="none" strike="noStrike">
-                <a:solidFill>
-                  <a:srgbClr val="000000"/>
-                </a:solidFill>
-                <a:latin typeface="Arial"/>
-              </a:defRPr>
-            </a:pPr>
-            <a:endParaRPr lang="en-US"/>
-          </a:p>
-        </c:txPr>
         <c:crossAx val="2094734554"/>
         <c:crosses val="autoZero"/>
         <c:crossBetween val="between"/>
@@ -1300,6 +1122,7 @@
     </c:plotArea>
     <c:plotVisOnly val="1"/>
     <c:dispBlanksAs val="span"/>
+    <c:showDLblsOverMax val="1"/>
   </c:chart>
   <c:spPr>
     <a:noFill/>
@@ -1336,234 +1159,10 @@
           <a:chExt cx="0" cy="0"/>
         </a:xfrm>
       </p:grpSpPr>
-      <p:sp>
-        <p:nvSpPr>
-          <p:cNvPr id="2" name="Header Placeholder 1"/>
-          <p:cNvSpPr>
-            <a:spLocks noGrp="1"/>
-          </p:cNvSpPr>
-          <p:nvPr>
-            <p:ph type="hdr" sz="quarter"/>
-          </p:nvPr>
-        </p:nvSpPr>
-        <p:spPr>
-          <a:xfrm>
-            <a:off x="0" y="0"/>
-            <a:ext cx="2971800" cy="458788"/>
-          </a:xfrm>
-          <a:prstGeom prst="rect">
-            <a:avLst/>
-          </a:prstGeom>
-        </p:spPr>
-        <p:txBody>
-          <a:bodyPr vert="horz" lIns="91440" tIns="45720" rIns="91440" bIns="45720" rtlCol="0"/>
-          <a:lstStyle>
-            <a:lvl1pPr algn="l">
-              <a:defRPr sz="1200"/>
-            </a:lvl1pPr>
-          </a:lstStyle>
-          <a:p>
-            <a:endParaRPr lang="en-US"/>
-          </a:p>
-        </p:txBody>
-      </p:sp>
-      <p:sp>
-        <p:nvSpPr>
-          <p:cNvPr id="3" name="Date Placeholder 2"/>
-          <p:cNvSpPr>
-            <a:spLocks noGrp="1"/>
-          </p:cNvSpPr>
-          <p:nvPr>
-            <p:ph type="dt" idx="1"/>
-          </p:nvPr>
-        </p:nvSpPr>
-        <p:spPr>
-          <a:xfrm>
-            <a:off x="3884613" y="0"/>
-            <a:ext cx="2971800" cy="458788"/>
-          </a:xfrm>
-          <a:prstGeom prst="rect">
-            <a:avLst/>
-          </a:prstGeom>
-        </p:spPr>
-        <p:txBody>
-          <a:bodyPr vert="horz" lIns="91440" tIns="45720" rIns="91440" bIns="45720" rtlCol="0"/>
-          <a:lstStyle>
-            <a:lvl1pPr algn="r">
-              <a:defRPr sz="1200"/>
-            </a:lvl1pPr>
-          </a:lstStyle>
-          <a:p>
-            <a:fld id="{5282F153-3F37-0F45-9E97-73ACFA13230C}" type="datetimeFigureOut">
-              <a:rPr lang="en-US"/>
-              <a:t>7/23/19</a:t>
-            </a:fld>
-            <a:endParaRPr lang="en-US"/>
-          </a:p>
-        </p:txBody>
-      </p:sp>
-      <p:sp>
-        <p:nvSpPr>
-          <p:cNvPr id="4" name="Slide Image Placeholder 3"/>
-          <p:cNvSpPr>
-            <a:spLocks noGrp="1" noRot="1" noChangeAspect="1"/>
-          </p:cNvSpPr>
-          <p:nvPr>
-            <p:ph type="sldImg" idx="2"/>
-          </p:nvPr>
-        </p:nvSpPr>
-        <p:spPr>
-          <a:xfrm>
-            <a:off x="685800" y="1143000"/>
-            <a:ext cx="5486400" cy="3086100"/>
-          </a:xfrm>
-          <a:prstGeom prst="rect">
-            <a:avLst/>
-          </a:prstGeom>
-          <a:noFill/>
-          <a:ln w="12700">
-            <a:solidFill>
-              <a:prstClr val="black"/>
-            </a:solidFill>
-          </a:ln>
-        </p:spPr>
-        <p:txBody>
-          <a:bodyPr vert="horz" lIns="91440" tIns="45720" rIns="91440" bIns="45720" rtlCol="0" anchor="ctr"/>
-          <a:lstStyle/>
-          <a:p>
-            <a:endParaRPr lang="en-US"/>
-          </a:p>
-        </p:txBody>
-      </p:sp>
-      <p:sp>
-        <p:nvSpPr>
-          <p:cNvPr id="5" name="Notes Placeholder 4"/>
-          <p:cNvSpPr>
-            <a:spLocks noGrp="1"/>
-          </p:cNvSpPr>
-          <p:nvPr>
-            <p:ph type="body" sz="quarter" idx="3"/>
-          </p:nvPr>
-        </p:nvSpPr>
-        <p:spPr>
-          <a:xfrm>
-            <a:off x="685800" y="4400550"/>
-            <a:ext cx="5486400" cy="3600450"/>
-          </a:xfrm>
-          <a:prstGeom prst="rect">
-            <a:avLst/>
-          </a:prstGeom>
-        </p:spPr>
-        <p:txBody>
-          <a:bodyPr vert="horz" lIns="91440" tIns="45720" rIns="91440" bIns="45720" rtlCol="0"/>
-          <a:lstStyle/>
-          <a:p>
-            <a:pPr lvl="0"/>
-            <a:r>
-              <a:rPr lang="en-US"/>
-              <a:t>Click to edit Master text styles</a:t>
-            </a:r>
-          </a:p>
-          <a:p>
-            <a:pPr lvl="1"/>
-            <a:r>
-              <a:rPr lang="en-US"/>
-              <a:t>Second level</a:t>
-            </a:r>
-          </a:p>
-          <a:p>
-            <a:pPr lvl="2"/>
-            <a:r>
-              <a:rPr lang="en-US"/>
-              <a:t>Third level</a:t>
-            </a:r>
-          </a:p>
-          <a:p>
-            <a:pPr lvl="3"/>
-            <a:r>
-              <a:rPr lang="en-US"/>
-              <a:t>Fourth level</a:t>
-            </a:r>
-          </a:p>
-          <a:p>
-            <a:pPr lvl="4"/>
-            <a:r>
-              <a:rPr lang="en-US"/>
-              <a:t>Fifth level</a:t>
-            </a:r>
-          </a:p>
-        </p:txBody>
-      </p:sp>
-      <p:sp>
-        <p:nvSpPr>
-          <p:cNvPr id="6" name="Footer Placeholder 5"/>
-          <p:cNvSpPr>
-            <a:spLocks noGrp="1"/>
-          </p:cNvSpPr>
-          <p:nvPr>
-            <p:ph type="ftr" sz="quarter" idx="4"/>
-          </p:nvPr>
-        </p:nvSpPr>
-        <p:spPr>
-          <a:xfrm>
-            <a:off x="0" y="8685213"/>
-            <a:ext cx="2971800" cy="458787"/>
-          </a:xfrm>
-          <a:prstGeom prst="rect">
-            <a:avLst/>
-          </a:prstGeom>
-        </p:spPr>
-        <p:txBody>
-          <a:bodyPr vert="horz" lIns="91440" tIns="45720" rIns="91440" bIns="45720" rtlCol="0" anchor="b"/>
-          <a:lstStyle>
-            <a:lvl1pPr algn="l">
-              <a:defRPr sz="1200"/>
-            </a:lvl1pPr>
-          </a:lstStyle>
-          <a:p>
-            <a:endParaRPr lang="en-US"/>
-          </a:p>
-        </p:txBody>
-      </p:sp>
-      <p:sp>
-        <p:nvSpPr>
-          <p:cNvPr id="7" name="Slide Number Placeholder 6"/>
-          <p:cNvSpPr>
-            <a:spLocks noGrp="1"/>
-          </p:cNvSpPr>
-          <p:nvPr>
-            <p:ph type="sldNum" sz="quarter" idx="5"/>
-          </p:nvPr>
-        </p:nvSpPr>
-        <p:spPr>
-          <a:xfrm>
-            <a:off x="3884613" y="8685213"/>
-            <a:ext cx="2971800" cy="458787"/>
-          </a:xfrm>
-          <a:prstGeom prst="rect">
-            <a:avLst/>
-          </a:prstGeom>
-        </p:spPr>
-        <p:txBody>
-          <a:bodyPr vert="horz" lIns="91440" tIns="45720" rIns="91440" bIns="45720" rtlCol="0" anchor="b"/>
-          <a:lstStyle>
-            <a:lvl1pPr algn="r">
-              <a:defRPr sz="1200"/>
-            </a:lvl1pPr>
-          </a:lstStyle>
-          <a:p>
-            <a:fld id="{CE5E9CC1-C706-0F49-92D6-E571CC5EEA8F}" type="slidenum">
-              <a:rPr lang="en-US"/>
-              <a:t>‹#›</a:t>
-            </a:fld>
-            <a:endParaRPr lang="en-US"/>
-          </a:p>
-        </p:txBody>
-      </p:sp>
     </p:spTree>
     <p:extLst>
       <p:ext uri="{BB962C8B-B14F-4D97-AF65-F5344CB8AC3E}">
-        <p14:creationId xmlns:p14="http://schemas.microsoft.com/office/powerpoint/2010/main" val="1024086991"/>
+        <p14:creationId xmlns:p14="http://schemas.microsoft.com/office/powerpoint/2010/main" val="966715998"/>
       </p:ext>
     </p:extLst>
   </p:cSld>
@@ -1707,10 +1306,6 @@
           <a:bodyPr/>
           <a:lstStyle/>
           <a:p>
-            <a:r>
-              <a:rPr lang="en-US" dirty="0"/>
-              <a:t/>
-            </a:r>
             <a:endParaRPr lang="en-US" dirty="0"/>
           </a:p>
         </p:txBody>
@@ -1789,6 +1384,7 @@
         <a:solidFill>
           <a:srgbClr val="FFFFFF"/>
         </a:solidFill>
+        <a:effectLst/>
       </p:bgPr>
     </p:bg>
     <p:spTree>
@@ -1816,6 +1412,11 @@
 <file path=ppt/slideMasters/slideMaster1.xml><?xml version="1.0" encoding="utf-8"?>
 <p:sldMaster xmlns:a="http://schemas.openxmlformats.org/drawingml/2006/main" xmlns:r="http://schemas.openxmlformats.org/officeDocument/2006/relationships" xmlns:p="http://schemas.openxmlformats.org/presentationml/2006/main">
   <p:cSld>
+    <p:bg>
+      <p:bgRef idx="1001">
+        <a:schemeClr val="bg1"/>
+      </p:bgRef>
+    </p:bg>
     <p:spTree>
       <p:nvGrpSpPr>
         <p:cNvPr id="1" name=""/>
@@ -2110,417 +1711,16 @@
       </p:grpSpPr>
       <p:sp>
         <p:nvSpPr>
-          <p:cNvPr id="2" name="Text 0"/>
-          <p:cNvSpPr txBox="1"/>
-          <p:nvPr/>
-        </p:nvSpPr>
-        <p:spPr>
-          <a:xfrm>
-            <a:off x="731520" y="594360"/>
-            <a:ext cx="27432000" cy="1325880"/>
+          <p:cNvPr id="2" name="title band"/>
+          <p:cNvSpPr/>
+          <p:nvPr/>
+        </p:nvSpPr>
+        <p:spPr>
+          <a:xfrm>
+            <a:off x="0" y="0"/>
+            <a:ext cx="32918400" cy="3794760"/>
           </a:xfrm>
           <a:prstGeom prst="rect">
-            <a:avLst/>
-          </a:prstGeom>
-          <a:noFill/>
-          <a:ln/>
-        </p:spPr>
-        <p:txBody>
-          <a:bodyPr wrap="square" lIns="0" tIns="0" rIns="0" bIns="0" rtlCol="0" anchor="t"/>
-          <a:lstStyle/>
-          <a:p>
-            <a:pPr indent="0" marL="0">
-              <a:buNone/>
-            </a:pPr>
-            <a:r>
-              <a:rPr lang="en-US" sz="10000" b="1" dirty="0">
-                <a:solidFill>
-                  <a:schemeClr val="tx1"/>
-                </a:solidFill>
-                <a:latin typeface="+mj-lt" pitchFamily="34" charset="0"/>
-                <a:ea typeface="+mj-lt" pitchFamily="34" charset="-122"/>
-                <a:cs typeface="+mj-lt" pitchFamily="34" charset="-120"/>
-              </a:rPr>
-              <a:t>Is Recourse Equally Open to Everyone?</a:t>
-            </a:r>
-            <a:endParaRPr lang="en-US" sz="10000" dirty="0"/>
-          </a:p>
-        </p:txBody>
-      </p:sp>
-      <p:sp>
-        <p:nvSpPr>
-          <p:cNvPr id="3" name="Text 1"/>
-          <p:cNvSpPr txBox="1"/>
-          <p:nvPr/>
-        </p:nvSpPr>
-        <p:spPr>
-          <a:xfrm>
-            <a:off x="731520" y="1965960"/>
-            <a:ext cx="26974800" cy="594360"/>
-          </a:xfrm>
-          <a:prstGeom prst="rect">
-            <a:avLst/>
-          </a:prstGeom>
-          <a:noFill/>
-          <a:ln/>
-        </p:spPr>
-        <p:txBody>
-          <a:bodyPr wrap="square" lIns="0" tIns="0" rIns="0" bIns="0" rtlCol="0" anchor="t"/>
-          <a:lstStyle/>
-          <a:p>
-            <a:pPr indent="0" marL="0">
-              <a:buNone/>
-            </a:pPr>
-            <a:r>
-              <a:rPr lang="en-US" sz="3200" dirty="0">
-                <a:solidFill>
-                  <a:schemeClr val="tx2"/>
-                </a:solidFill>
-              </a:rPr>
-              <a:t>Auditing algorithmic recourse in public-sector-style eligibility decisions: the 1994 benchmark vs 2023 North Carolina census data</a:t>
-            </a:r>
-            <a:endParaRPr lang="en-US" sz="3200" dirty="0"/>
-          </a:p>
-        </p:txBody>
-      </p:sp>
-      <p:sp>
-        <p:nvSpPr>
-          <p:cNvPr id="4" name="Text 2"/>
-          <p:cNvSpPr txBox="1"/>
-          <p:nvPr/>
-        </p:nvSpPr>
-        <p:spPr>
-          <a:xfrm>
-            <a:off x="731520" y="2606040"/>
-            <a:ext cx="26974800" cy="548640"/>
-          </a:xfrm>
-          <a:prstGeom prst="rect">
-            <a:avLst/>
-          </a:prstGeom>
-          <a:noFill/>
-          <a:ln/>
-        </p:spPr>
-        <p:txBody>
-          <a:bodyPr wrap="square" lIns="0" tIns="0" rIns="0" bIns="0" rtlCol="0" anchor="t"/>
-          <a:lstStyle/>
-          <a:p>
-            <a:pPr indent="0" marL="0">
-              <a:buNone/>
-            </a:pPr>
-            <a:r>
-              <a:rPr lang="en-US" sz="2800" b="1" dirty="0">
-                <a:solidFill>
-                  <a:schemeClr val="tx1"/>
-                </a:solidFill>
-              </a:rPr>
-              <a:t>Ogechukwu Ezenwa</a:t>
-            </a:r>
-            <a:pPr indent="0" marL="0">
-              <a:buNone/>
-            </a:pPr>
-            <a:r>
-              <a:rPr lang="en-US" sz="2800" dirty="0">
-                <a:solidFill>
-                  <a:schemeClr val="tx2"/>
-                </a:solidFill>
-              </a:rPr>
-              <a:t>   ·   AIPI 590: Advanced Topics in AIPI   ·   Duke University   ·   Fall 2026</a:t>
-            </a:r>
-            <a:endParaRPr lang="en-US" sz="2800" dirty="0"/>
-          </a:p>
-        </p:txBody>
-      </p:sp>
-      <p:pic>
-        <p:nvPicPr>
-          <p:cNvPr id="5" name="QR code" descr="QR code linking to the GitHub repository">    </p:cNvPr>
-          <p:cNvPicPr>
-            <a:picLocks noChangeAspect="1"/>
-          </p:cNvPicPr>
-          <p:nvPr/>
-        </p:nvPicPr>
-        <p:blipFill>
-          <a:blip r:embed="rId1"/>
-          <a:stretch>
-            <a:fillRect/>
-          </a:stretch>
-        </p:blipFill>
-        <p:spPr>
-          <a:xfrm>
-            <a:off x="29672280" y="548640"/>
-            <a:ext cx="2514600" cy="2514600"/>
-          </a:xfrm>
-          <a:prstGeom prst="rect">
-            <a:avLst/>
-          </a:prstGeom>
-        </p:spPr>
-      </p:pic>
-      <p:sp>
-        <p:nvSpPr>
-          <p:cNvPr id="6" name="Text 3"/>
-          <p:cNvSpPr txBox="1"/>
-          <p:nvPr/>
-        </p:nvSpPr>
-        <p:spPr>
-          <a:xfrm>
-            <a:off x="27066240" y="3127248"/>
-            <a:ext cx="5120640" cy="365760"/>
-          </a:xfrm>
-          <a:prstGeom prst="rect">
-            <a:avLst/>
-          </a:prstGeom>
-          <a:noFill/>
-          <a:ln/>
-        </p:spPr>
-        <p:txBody>
-          <a:bodyPr wrap="square" lIns="0" tIns="0" rIns="0" bIns="0" rtlCol="0" anchor="t"/>
-          <a:lstStyle/>
-          <a:p>
-            <a:pPr algn="r" indent="0" marL="0">
-              <a:buNone/>
-            </a:pPr>
-            <a:r>
-              <a:rPr lang="en-US" sz="1800" dirty="0">
-                <a:solidFill>
-                  <a:schemeClr val="tx2"/>
-                </a:solidFill>
-              </a:rPr>
-              <a:t>Code · app · full report</a:t>
-            </a:r>
-            <a:endParaRPr lang="en-US" sz="1800" dirty="0"/>
-          </a:p>
-        </p:txBody>
-      </p:sp>
-      <p:sp>
-        <p:nvSpPr>
-          <p:cNvPr id="7" name="marker 1"/>
-          <p:cNvSpPr/>
-          <p:nvPr/>
-        </p:nvSpPr>
-        <p:spPr>
-          <a:xfrm>
-            <a:off x="731520" y="3931920"/>
-            <a:ext cx="713232" cy="713232"/>
-          </a:xfrm>
-          <a:prstGeom prst="ellipse">
-            <a:avLst/>
-          </a:prstGeom>
-          <a:solidFill>
-            <a:schemeClr val="tx1"/>
-          </a:solidFill>
-          <a:ln w="12700">
-            <a:solidFill>
-              <a:schemeClr val="tx1"/>
-            </a:solidFill>
-            <a:prstDash val="solid"/>
-          </a:ln>
-        </p:spPr>
-      </p:sp>
-      <p:sp>
-        <p:nvSpPr>
-          <p:cNvPr id="8" name="Text 5"/>
-          <p:cNvSpPr txBox="1"/>
-          <p:nvPr/>
-        </p:nvSpPr>
-        <p:spPr>
-          <a:xfrm>
-            <a:off x="731520" y="3931920"/>
-            <a:ext cx="713232" cy="713232"/>
-          </a:xfrm>
-          <a:prstGeom prst="rect">
-            <a:avLst/>
-          </a:prstGeom>
-          <a:noFill/>
-          <a:ln/>
-        </p:spPr>
-        <p:txBody>
-          <a:bodyPr wrap="square" lIns="0" tIns="0" rIns="0" bIns="0" rtlCol="0" anchor="ctr"/>
-          <a:lstStyle/>
-          <a:p>
-            <a:pPr algn="ctr" indent="0" marL="0">
-              <a:buNone/>
-            </a:pPr>
-            <a:r>
-              <a:rPr lang="en-US" sz="3000" b="1" dirty="0">
-                <a:solidFill>
-                  <a:schemeClr val="bg1"/>
-                </a:solidFill>
-                <a:latin typeface="+mj-lt" pitchFamily="34" charset="0"/>
-                <a:ea typeface="+mj-lt" pitchFamily="34" charset="-122"/>
-                <a:cs typeface="+mj-lt" pitchFamily="34" charset="-120"/>
-              </a:rPr>
-              <a:t>1</a:t>
-            </a:r>
-            <a:endParaRPr lang="en-US" sz="3000" dirty="0"/>
-          </a:p>
-        </p:txBody>
-      </p:sp>
-      <p:sp>
-        <p:nvSpPr>
-          <p:cNvPr id="9" name="Text 6"/>
-          <p:cNvSpPr txBox="1"/>
-          <p:nvPr/>
-        </p:nvSpPr>
-        <p:spPr>
-          <a:xfrm>
-            <a:off x="1691640" y="3913632"/>
-            <a:ext cx="8732520" cy="749808"/>
-          </a:xfrm>
-          <a:prstGeom prst="rect">
-            <a:avLst/>
-          </a:prstGeom>
-          <a:noFill/>
-          <a:ln/>
-        </p:spPr>
-        <p:txBody>
-          <a:bodyPr wrap="square" lIns="0" tIns="0" rIns="0" bIns="0" rtlCol="0" anchor="ctr"/>
-          <a:lstStyle/>
-          <a:p>
-            <a:pPr indent="0" marL="0">
-              <a:lnSpc>
-                <a:spcPct val="95000"/>
-              </a:lnSpc>
-              <a:buNone/>
-            </a:pPr>
-            <a:r>
-              <a:rPr lang="en-US" sz="3800" b="1" dirty="0">
-                <a:solidFill>
-                  <a:schemeClr val="tx1"/>
-                </a:solidFill>
-                <a:latin typeface="+mj-lt" pitchFamily="34" charset="0"/>
-                <a:ea typeface="+mj-lt" pitchFamily="34" charset="-122"/>
-                <a:cs typeface="+mj-lt" pitchFamily="34" charset="-120"/>
-              </a:rPr>
-              <a:t>What is recourse?</a:t>
-            </a:r>
-            <a:endParaRPr lang="en-US" sz="3800" dirty="0"/>
-          </a:p>
-        </p:txBody>
-      </p:sp>
-      <p:sp>
-        <p:nvSpPr>
-          <p:cNvPr id="10" name="Text 7"/>
-          <p:cNvSpPr txBox="1"/>
-          <p:nvPr/>
-        </p:nvSpPr>
-        <p:spPr>
-          <a:xfrm>
-            <a:off x="731520" y="4892040"/>
-            <a:ext cx="9692640" cy="777240"/>
-          </a:xfrm>
-          <a:prstGeom prst="rect">
-            <a:avLst/>
-          </a:prstGeom>
-          <a:noFill/>
-          <a:ln/>
-        </p:spPr>
-        <p:txBody>
-          <a:bodyPr wrap="square" lIns="0" tIns="0" rIns="0" bIns="0" rtlCol="0" anchor="t"/>
-          <a:lstStyle/>
-          <a:p>
-            <a:pPr indent="0" marL="0">
-              <a:buNone/>
-            </a:pPr>
-            <a:r>
-              <a:rPr lang="en-US" sz="2400" dirty="0">
-                <a:solidFill>
-                  <a:schemeClr val="tx1"/>
-                </a:solidFill>
-              </a:rPr>
-              <a:t>If a model denies you, recourse is a change you could make to get approved.</a:t>
-            </a:r>
-            <a:endParaRPr lang="en-US" sz="2400" dirty="0"/>
-          </a:p>
-        </p:txBody>
-      </p:sp>
-      <p:sp>
-        <p:nvSpPr>
-          <p:cNvPr id="11" name="denied pill"/>
-          <p:cNvSpPr/>
-          <p:nvPr/>
-        </p:nvSpPr>
-        <p:spPr>
-          <a:xfrm>
-            <a:off x="731520" y="5806440"/>
-            <a:ext cx="4114800" cy="1188720"/>
-          </a:xfrm>
-          <a:prstGeom prst="roundRect">
-            <a:avLst>
-              <a:gd name="adj" fmla="val 11538"/>
-            </a:avLst>
-          </a:prstGeom>
-          <a:solidFill>
-            <a:schemeClr val="bg2"/>
-          </a:solidFill>
-          <a:ln w="12700">
-            <a:solidFill>
-              <a:schemeClr val="bg2"/>
-            </a:solidFill>
-            <a:prstDash val="solid"/>
-          </a:ln>
-        </p:spPr>
-      </p:sp>
-      <p:sp>
-        <p:nvSpPr>
-          <p:cNvPr id="12" name="Text 9"/>
-          <p:cNvSpPr txBox="1"/>
-          <p:nvPr/>
-        </p:nvSpPr>
-        <p:spPr>
-          <a:xfrm>
-            <a:off x="1005840" y="5971032"/>
-            <a:ext cx="3657600" cy="914400"/>
-          </a:xfrm>
-          <a:prstGeom prst="rect">
-            <a:avLst/>
-          </a:prstGeom>
-          <a:noFill/>
-          <a:ln/>
-        </p:spPr>
-        <p:txBody>
-          <a:bodyPr wrap="square" lIns="0" tIns="0" rIns="0" bIns="0" rtlCol="0" anchor="t"/>
-          <a:lstStyle/>
-          <a:p>
-            <a:pPr indent="0" marL="0">
-              <a:buNone/>
-            </a:pPr>
-            <a:r>
-              <a:rPr lang="en-US" sz="2000" b="1" dirty="0">
-                <a:solidFill>
-                  <a:schemeClr val="accent5"/>
-                </a:solidFill>
-              </a:rPr>
-              <a:t>DENIED</a:t>
-            </a:r>
-            <a:endParaRPr lang="en-US" sz="2000" dirty="0"/>
-          </a:p>
-          <a:p>
-            <a:pPr indent="0" marL="0">
-              <a:buNone/>
-            </a:pPr>
-            <a:r>
-              <a:rPr lang="en-US" sz="2400" dirty="0">
-                <a:solidFill>
-                  <a:schemeClr val="tx1"/>
-                </a:solidFill>
-              </a:rPr>
-              <a:t>works 40 hours/week</a:t>
-            </a:r>
-            <a:endParaRPr lang="en-US" sz="2000" dirty="0"/>
-          </a:p>
-        </p:txBody>
-      </p:sp>
-      <p:sp>
-        <p:nvSpPr>
-          <p:cNvPr id="13" name="arrow"/>
-          <p:cNvSpPr/>
-          <p:nvPr/>
-        </p:nvSpPr>
-        <p:spPr>
-          <a:xfrm>
-            <a:off x="5074920" y="6172200"/>
-            <a:ext cx="1005840" cy="457200"/>
-          </a:xfrm>
-          <a:prstGeom prst="rightArrow">
             <a:avLst/>
           </a:prstGeom>
           <a:solidFill>
@@ -2533,44 +1733,174 @@
             <a:prstDash val="solid"/>
           </a:ln>
         </p:spPr>
-      </p:sp>
-      <p:sp>
-        <p:nvSpPr>
-          <p:cNvPr id="14" name="approved pill"/>
+        <p:txBody>
+          <a:bodyPr/>
+          <a:lstStyle/>
+          <a:p>
+            <a:endParaRPr lang="en-US"/>
+          </a:p>
+        </p:txBody>
+      </p:sp>
+      <p:sp>
+        <p:nvSpPr>
+          <p:cNvPr id="3" name="Text 1"/>
+          <p:cNvSpPr txBox="1"/>
+          <p:nvPr/>
+        </p:nvSpPr>
+        <p:spPr>
+          <a:xfrm>
+            <a:off x="731520" y="457200"/>
+            <a:ext cx="26517600" cy="1463040"/>
+          </a:xfrm>
+          <a:prstGeom prst="rect">
+            <a:avLst/>
+          </a:prstGeom>
+          <a:noFill/>
+          <a:ln/>
+        </p:spPr>
+        <p:txBody>
+          <a:bodyPr wrap="square" lIns="0" tIns="0" rIns="0" bIns="0" rtlCol="0" anchor="t"/>
+          <a:lstStyle/>
+          <a:p>
+            <a:pPr marL="0" indent="0">
+              <a:buNone/>
+            </a:pPr>
+            <a:r>
+              <a:rPr lang="en-US" sz="10800" b="1" dirty="0">
+                <a:solidFill>
+                  <a:schemeClr val="bg1"/>
+                </a:solidFill>
+              </a:rPr>
+              <a:t>Is Recourse Equally Open to Everyone?</a:t>
+            </a:r>
+            <a:endParaRPr lang="en-US" sz="10800" dirty="0"/>
+          </a:p>
+        </p:txBody>
+      </p:sp>
+      <p:sp>
+        <p:nvSpPr>
+          <p:cNvPr id="4" name="Text 2"/>
+          <p:cNvSpPr txBox="1"/>
+          <p:nvPr/>
+        </p:nvSpPr>
+        <p:spPr>
+          <a:xfrm>
+            <a:off x="731520" y="1965960"/>
+            <a:ext cx="26517600" cy="594360"/>
+          </a:xfrm>
+          <a:prstGeom prst="rect">
+            <a:avLst/>
+          </a:prstGeom>
+          <a:noFill/>
+          <a:ln/>
+        </p:spPr>
+        <p:txBody>
+          <a:bodyPr wrap="square" lIns="0" tIns="0" rIns="0" bIns="0" rtlCol="0" anchor="t"/>
+          <a:lstStyle/>
+          <a:p>
+            <a:pPr marL="0" indent="0">
+              <a:buNone/>
+            </a:pPr>
+            <a:r>
+              <a:rPr lang="en-US" sz="3200" dirty="0">
+                <a:solidFill>
+                  <a:schemeClr val="bg2"/>
+                </a:solidFill>
+              </a:rPr>
+              <a:t>Auditing algorithmic recourse in eligibility-style decisions: the 1994 benchmark vs 2023 North Carolina census data</a:t>
+            </a:r>
+            <a:endParaRPr lang="en-US" sz="3200" dirty="0"/>
+          </a:p>
+        </p:txBody>
+      </p:sp>
+      <p:sp>
+        <p:nvSpPr>
+          <p:cNvPr id="5" name="Text 3"/>
+          <p:cNvSpPr txBox="1"/>
+          <p:nvPr/>
+        </p:nvSpPr>
+        <p:spPr>
+          <a:xfrm>
+            <a:off x="731520" y="2697480"/>
+            <a:ext cx="26517600" cy="548640"/>
+          </a:xfrm>
+          <a:prstGeom prst="rect">
+            <a:avLst/>
+          </a:prstGeom>
+          <a:noFill/>
+          <a:ln/>
+        </p:spPr>
+        <p:txBody>
+          <a:bodyPr wrap="square" lIns="0" tIns="0" rIns="0" bIns="0" rtlCol="0" anchor="t"/>
+          <a:lstStyle/>
+          <a:p>
+            <a:pPr marL="0" indent="0">
+              <a:buNone/>
+            </a:pPr>
+            <a:r>
+              <a:rPr lang="en-US" sz="3000" b="1" dirty="0">
+                <a:solidFill>
+                  <a:schemeClr val="bg1"/>
+                </a:solidFill>
+              </a:rPr>
+              <a:t>Ogechukwu Ezenwa</a:t>
+            </a:r>
+            <a:r>
+              <a:rPr lang="en-US" sz="3000" dirty="0">
+                <a:solidFill>
+                  <a:schemeClr val="bg1"/>
+                </a:solidFill>
+              </a:rPr>
+              <a:t>   ·   AIPI 590, Duke University   ·   Fall 2026</a:t>
+            </a:r>
+            <a:endParaRPr lang="en-US" sz="3000" dirty="0"/>
+          </a:p>
+        </p:txBody>
+      </p:sp>
+      <p:sp>
+        <p:nvSpPr>
+          <p:cNvPr id="6" name="topic Explainable AI"/>
           <p:cNvSpPr/>
           <p:nvPr/>
         </p:nvSpPr>
         <p:spPr>
           <a:xfrm>
-            <a:off x="6309360" y="5806440"/>
-            <a:ext cx="4114800" cy="1188720"/>
+            <a:off x="14904720" y="2697480"/>
+            <a:ext cx="2496312" cy="566928"/>
           </a:xfrm>
           <a:prstGeom prst="roundRect">
             <a:avLst>
-              <a:gd name="adj" fmla="val 11538"/>
+              <a:gd name="adj" fmla="val 50000"/>
             </a:avLst>
           </a:prstGeom>
           <a:solidFill>
-            <a:schemeClr val="bg2"/>
+            <a:schemeClr val="tx2"/>
           </a:solidFill>
-          <a:ln w="12700">
+          <a:ln w="19050">
             <a:solidFill>
               <a:schemeClr val="bg2"/>
             </a:solidFill>
             <a:prstDash val="solid"/>
           </a:ln>
         </p:spPr>
-      </p:sp>
-      <p:sp>
-        <p:nvSpPr>
-          <p:cNvPr id="15" name="Text 12"/>
+        <p:txBody>
+          <a:bodyPr/>
+          <a:lstStyle/>
+          <a:p>
+            <a:endParaRPr lang="en-US"/>
+          </a:p>
+        </p:txBody>
+      </p:sp>
+      <p:sp>
+        <p:nvSpPr>
+          <p:cNvPr id="7" name="Text 5"/>
           <p:cNvSpPr txBox="1"/>
           <p:nvPr/>
         </p:nvSpPr>
         <p:spPr>
           <a:xfrm>
-            <a:off x="6583680" y="5971032"/>
-            <a:ext cx="3657600" cy="914400"/>
+            <a:off x="14904720" y="2697480"/>
+            <a:ext cx="2496312" cy="566928"/>
           </a:xfrm>
           <a:prstGeom prst="rect">
             <a:avLst/>
@@ -2579,261 +1909,68 @@
           <a:ln/>
         </p:spPr>
         <p:txBody>
-          <a:bodyPr wrap="square" lIns="0" tIns="0" rIns="0" bIns="0" rtlCol="0" anchor="t"/>
-          <a:lstStyle/>
-          <a:p>
-            <a:pPr indent="0" marL="0">
+          <a:bodyPr wrap="square" lIns="0" tIns="0" rIns="0" bIns="0" rtlCol="0" anchor="ctr"/>
+          <a:lstStyle/>
+          <a:p>
+            <a:pPr marL="0" indent="0" algn="ctr">
               <a:buNone/>
             </a:pPr>
             <a:r>
-              <a:rPr lang="en-US" sz="2000" b="1" dirty="0">
-                <a:solidFill>
-                  <a:schemeClr val="accent1"/>
-                </a:solidFill>
-              </a:rPr>
-              <a:t>APPROVED</a:t>
-            </a:r>
-            <a:endParaRPr lang="en-US" sz="2000" dirty="0"/>
-          </a:p>
-          <a:p>
-            <a:pPr indent="0" marL="0">
-              <a:buNone/>
-            </a:pPr>
-            <a:r>
-              <a:rPr lang="en-US" sz="2400" dirty="0">
-                <a:solidFill>
-                  <a:schemeClr val="tx1"/>
-                </a:solidFill>
-              </a:rPr>
-              <a:t>works 45 hours/week</a:t>
-            </a:r>
-            <a:endParaRPr lang="en-US" sz="2000" dirty="0"/>
-          </a:p>
-        </p:txBody>
-      </p:sp>
-      <p:sp>
-        <p:nvSpPr>
-          <p:cNvPr id="16" name="Text 13"/>
-          <p:cNvSpPr txBox="1"/>
-          <p:nvPr/>
-        </p:nvSpPr>
-        <p:spPr>
-          <a:xfrm>
-            <a:off x="731520" y="7223760"/>
-            <a:ext cx="9692640" cy="1554480"/>
-          </a:xfrm>
-          <a:prstGeom prst="rect">
-            <a:avLst/>
-          </a:prstGeom>
-          <a:noFill/>
-          <a:ln/>
-        </p:spPr>
-        <p:txBody>
-          <a:bodyPr wrap="square" lIns="0" tIns="0" rIns="0" bIns="0" rtlCol="0" anchor="t"/>
-          <a:lstStyle/>
-          <a:p>
-            <a:pPr indent="0" marL="0">
-              <a:buNone/>
-            </a:pPr>
-            <a:r>
-              <a:rPr lang="en-US" sz="2400" dirty="0">
-                <a:solidFill>
-                  <a:schemeClr val="tx1"/>
-                </a:solidFill>
-              </a:rPr>
-              <a:t>An explanation says </a:t>
-            </a:r>
-            <a:pPr indent="0" marL="0">
-              <a:buNone/>
-            </a:pPr>
-            <a:r>
-              <a:rPr lang="en-US" sz="2400" i="1" dirty="0">
-                <a:solidFill>
-                  <a:schemeClr val="tx1"/>
-                </a:solidFill>
-              </a:rPr>
-              <a:t>why</a:t>
-            </a:r>
-            <a:pPr indent="0" marL="0">
-              <a:buNone/>
-            </a:pPr>
-            <a:r>
-              <a:rPr lang="en-US" sz="2400" dirty="0">
-                <a:solidFill>
-                  <a:schemeClr val="tx1"/>
-                </a:solidFill>
-              </a:rPr>
-              <a:t> you were denied. Recourse says </a:t>
-            </a:r>
-            <a:pPr indent="0" marL="0">
-              <a:buNone/>
-            </a:pPr>
-            <a:r>
-              <a:rPr lang="en-US" sz="2400" i="1" dirty="0">
-                <a:solidFill>
-                  <a:schemeClr val="tx1"/>
-                </a:solidFill>
-              </a:rPr>
-              <a:t>what you can do</a:t>
-            </a:r>
-            <a:pPr indent="0" marL="0">
-              <a:buNone/>
-            </a:pPr>
-            <a:r>
-              <a:rPr lang="en-US" sz="2400" dirty="0">
-                <a:solidFill>
-                  <a:schemeClr val="tx1"/>
-                </a:solidFill>
-              </a:rPr>
-              <a:t>. “Be older” or “get married” may flip the model, but it is not recourse: no one can act on it.</a:t>
-            </a:r>
-            <a:endParaRPr lang="en-US" sz="2400" dirty="0"/>
-          </a:p>
-        </p:txBody>
-      </p:sp>
-      <p:sp>
-        <p:nvSpPr>
-          <p:cNvPr id="17" name="marker 2"/>
+              <a:rPr lang="en-US" sz="2200" b="1" dirty="0">
+                <a:solidFill>
+                  <a:schemeClr val="bg1"/>
+                </a:solidFill>
+              </a:rPr>
+              <a:t>Explainable AI</a:t>
+            </a:r>
+            <a:endParaRPr lang="en-US" sz="2200" dirty="0"/>
+          </a:p>
+        </p:txBody>
+      </p:sp>
+      <p:sp>
+        <p:nvSpPr>
+          <p:cNvPr id="8" name="topic AI Evaluation"/>
           <p:cNvSpPr/>
           <p:nvPr/>
         </p:nvSpPr>
         <p:spPr>
           <a:xfrm>
-            <a:off x="731520" y="9144000"/>
-            <a:ext cx="713232" cy="713232"/>
-          </a:xfrm>
-          <a:prstGeom prst="ellipse">
-            <a:avLst/>
-          </a:prstGeom>
-          <a:solidFill>
-            <a:schemeClr val="tx1"/>
-          </a:solidFill>
-          <a:ln w="12700">
-            <a:solidFill>
-              <a:schemeClr val="tx1"/>
-            </a:solidFill>
-            <a:prstDash val="solid"/>
-          </a:ln>
-        </p:spPr>
-      </p:sp>
-      <p:sp>
-        <p:nvSpPr>
-          <p:cNvPr id="18" name="Text 15"/>
-          <p:cNvSpPr txBox="1"/>
-          <p:nvPr/>
-        </p:nvSpPr>
-        <p:spPr>
-          <a:xfrm>
-            <a:off x="731520" y="9144000"/>
-            <a:ext cx="713232" cy="713232"/>
-          </a:xfrm>
-          <a:prstGeom prst="rect">
-            <a:avLst/>
-          </a:prstGeom>
-          <a:noFill/>
-          <a:ln/>
-        </p:spPr>
-        <p:txBody>
-          <a:bodyPr wrap="square" lIns="0" tIns="0" rIns="0" bIns="0" rtlCol="0" anchor="ctr"/>
-          <a:lstStyle/>
-          <a:p>
-            <a:pPr algn="ctr" indent="0" marL="0">
-              <a:buNone/>
-            </a:pPr>
-            <a:r>
-              <a:rPr lang="en-US" sz="3000" b="1" dirty="0">
-                <a:solidFill>
-                  <a:schemeClr val="bg1"/>
-                </a:solidFill>
-                <a:latin typeface="+mj-lt" pitchFamily="34" charset="0"/>
-                <a:ea typeface="+mj-lt" pitchFamily="34" charset="-122"/>
-                <a:cs typeface="+mj-lt" pitchFamily="34" charset="-120"/>
-              </a:rPr>
-              <a:t>2</a:t>
-            </a:r>
-            <a:endParaRPr lang="en-US" sz="3000" dirty="0"/>
-          </a:p>
-        </p:txBody>
-      </p:sp>
-      <p:sp>
-        <p:nvSpPr>
-          <p:cNvPr id="19" name="Text 16"/>
-          <p:cNvSpPr txBox="1"/>
-          <p:nvPr/>
-        </p:nvSpPr>
-        <p:spPr>
-          <a:xfrm>
-            <a:off x="1691640" y="9125712"/>
-            <a:ext cx="8732520" cy="749808"/>
-          </a:xfrm>
-          <a:prstGeom prst="rect">
-            <a:avLst/>
-          </a:prstGeom>
-          <a:noFill/>
-          <a:ln/>
-        </p:spPr>
-        <p:txBody>
-          <a:bodyPr wrap="square" lIns="0" tIns="0" rIns="0" bIns="0" rtlCol="0" anchor="ctr"/>
-          <a:lstStyle/>
-          <a:p>
-            <a:pPr indent="0" marL="0">
-              <a:lnSpc>
-                <a:spcPct val="95000"/>
-              </a:lnSpc>
-              <a:buNone/>
-            </a:pPr>
-            <a:r>
-              <a:rPr lang="en-US" sz="3800" b="1" dirty="0">
-                <a:solidFill>
-                  <a:schemeClr val="tx1"/>
-                </a:solidFill>
-                <a:latin typeface="+mj-lt" pitchFamily="34" charset="0"/>
-                <a:ea typeface="+mj-lt" pitchFamily="34" charset="-122"/>
-                <a:cs typeface="+mj-lt" pitchFamily="34" charset="-120"/>
-              </a:rPr>
-              <a:t>The question</a:t>
-            </a:r>
-            <a:endParaRPr lang="en-US" sz="3800" dirty="0"/>
-          </a:p>
-        </p:txBody>
-      </p:sp>
-      <p:sp>
-        <p:nvSpPr>
-          <p:cNvPr id="20" name="question card"/>
-          <p:cNvSpPr/>
-          <p:nvPr/>
-        </p:nvSpPr>
-        <p:spPr>
-          <a:xfrm>
-            <a:off x="731520" y="10104120"/>
-            <a:ext cx="9692640" cy="1828800"/>
+            <a:off x="17675352" y="2697480"/>
+            <a:ext cx="2345436" cy="566928"/>
           </a:xfrm>
           <a:prstGeom prst="roundRect">
             <a:avLst>
-              <a:gd name="adj" fmla="val 7500"/>
+              <a:gd name="adj" fmla="val 50000"/>
             </a:avLst>
           </a:prstGeom>
           <a:solidFill>
-            <a:schemeClr val="bg2"/>
+            <a:schemeClr val="tx2"/>
           </a:solidFill>
-          <a:ln w="12700">
+          <a:ln w="19050">
             <a:solidFill>
               <a:schemeClr val="bg2"/>
             </a:solidFill>
             <a:prstDash val="solid"/>
           </a:ln>
         </p:spPr>
-      </p:sp>
-      <p:sp>
-        <p:nvSpPr>
-          <p:cNvPr id="21" name="Text 18"/>
+        <p:txBody>
+          <a:bodyPr/>
+          <a:lstStyle/>
+          <a:p>
+            <a:endParaRPr lang="en-US"/>
+          </a:p>
+        </p:txBody>
+      </p:sp>
+      <p:sp>
+        <p:nvSpPr>
+          <p:cNvPr id="9" name="Text 7"/>
           <p:cNvSpPr txBox="1"/>
           <p:nvPr/>
         </p:nvSpPr>
         <p:spPr>
           <a:xfrm>
-            <a:off x="1051560" y="10332720"/>
-            <a:ext cx="9052560" cy="1828800"/>
+            <a:off x="17675352" y="2697480"/>
+            <a:ext cx="2345436" cy="566928"/>
           </a:xfrm>
           <a:prstGeom prst="rect">
             <a:avLst/>
@@ -2842,62 +1979,232 @@
           <a:ln/>
         </p:spPr>
         <p:txBody>
-          <a:bodyPr wrap="square" lIns="0" tIns="0" rIns="0" bIns="0" rtlCol="0" anchor="t"/>
-          <a:lstStyle/>
-          <a:p>
-            <a:pPr indent="0" marL="0">
+          <a:bodyPr wrap="square" lIns="0" tIns="0" rIns="0" bIns="0" rtlCol="0" anchor="ctr"/>
+          <a:lstStyle/>
+          <a:p>
+            <a:pPr marL="0" indent="0" algn="ctr">
               <a:buNone/>
             </a:pPr>
             <a:r>
-              <a:rPr lang="en-US" sz="2600" i="1" dirty="0">
-                <a:solidFill>
-                  <a:schemeClr val="tx1"/>
-                </a:solidFill>
-                <a:latin typeface="+mj-lt" pitchFamily="34" charset="0"/>
-                <a:ea typeface="+mj-lt" pitchFamily="34" charset="-122"/>
-                <a:cs typeface="+mj-lt" pitchFamily="34" charset="-120"/>
-              </a:rPr>
-              <a:t>When tools suggest how to reverse an automated denial, is the path realistic, and equally open to every group? Do findings from the 1994 benchmark still hold in 2023?</a:t>
-            </a:r>
-            <a:endParaRPr lang="en-US" sz="2600" dirty="0"/>
-          </a:p>
-        </p:txBody>
-      </p:sp>
-      <p:sp>
-        <p:nvSpPr>
-          <p:cNvPr id="22" name="marker 3"/>
+              <a:rPr lang="en-US" sz="2200" b="1" dirty="0">
+                <a:solidFill>
+                  <a:schemeClr val="bg1"/>
+                </a:solidFill>
+              </a:rPr>
+              <a:t>AI Evaluation</a:t>
+            </a:r>
+            <a:endParaRPr lang="en-US" sz="2200" dirty="0"/>
+          </a:p>
+        </p:txBody>
+      </p:sp>
+      <p:sp>
+        <p:nvSpPr>
+          <p:cNvPr id="10" name="topic AI Harms"/>
           <p:cNvSpPr/>
           <p:nvPr/>
         </p:nvSpPr>
         <p:spPr>
           <a:xfrm>
-            <a:off x="731520" y="12435840"/>
-            <a:ext cx="713232" cy="713232"/>
-          </a:xfrm>
-          <a:prstGeom prst="ellipse">
-            <a:avLst/>
+            <a:off x="20295108" y="2697480"/>
+            <a:ext cx="1591056" cy="566928"/>
+          </a:xfrm>
+          <a:prstGeom prst="roundRect">
+            <a:avLst>
+              <a:gd name="adj" fmla="val 50000"/>
+            </a:avLst>
           </a:prstGeom>
           <a:solidFill>
-            <a:schemeClr val="tx1"/>
+            <a:schemeClr val="tx2"/>
+          </a:solidFill>
+          <a:ln w="19050">
+            <a:solidFill>
+              <a:schemeClr val="bg2"/>
+            </a:solidFill>
+            <a:prstDash val="solid"/>
+          </a:ln>
+        </p:spPr>
+        <p:txBody>
+          <a:bodyPr/>
+          <a:lstStyle/>
+          <a:p>
+            <a:endParaRPr lang="en-US"/>
+          </a:p>
+        </p:txBody>
+      </p:sp>
+      <p:sp>
+        <p:nvSpPr>
+          <p:cNvPr id="11" name="Text 9"/>
+          <p:cNvSpPr txBox="1"/>
+          <p:nvPr/>
+        </p:nvSpPr>
+        <p:spPr>
+          <a:xfrm>
+            <a:off x="20295108" y="2697480"/>
+            <a:ext cx="1591056" cy="566928"/>
+          </a:xfrm>
+          <a:prstGeom prst="rect">
+            <a:avLst/>
+          </a:prstGeom>
+          <a:noFill/>
+          <a:ln/>
+        </p:spPr>
+        <p:txBody>
+          <a:bodyPr wrap="square" lIns="0" tIns="0" rIns="0" bIns="0" rtlCol="0" anchor="ctr"/>
+          <a:lstStyle/>
+          <a:p>
+            <a:pPr marL="0" indent="0" algn="ctr">
+              <a:buNone/>
+            </a:pPr>
+            <a:r>
+              <a:rPr lang="en-US" sz="2200" b="1" dirty="0">
+                <a:solidFill>
+                  <a:schemeClr val="bg1"/>
+                </a:solidFill>
+              </a:rPr>
+              <a:t>AI Harms</a:t>
+            </a:r>
+            <a:endParaRPr lang="en-US" sz="2200" dirty="0"/>
+          </a:p>
+        </p:txBody>
+      </p:sp>
+      <p:sp>
+        <p:nvSpPr>
+          <p:cNvPr id="12" name="topic AI Governance"/>
+          <p:cNvSpPr/>
+          <p:nvPr/>
+        </p:nvSpPr>
+        <p:spPr>
+          <a:xfrm>
+            <a:off x="22160484" y="2697480"/>
+            <a:ext cx="2345436" cy="566928"/>
+          </a:xfrm>
+          <a:prstGeom prst="roundRect">
+            <a:avLst>
+              <a:gd name="adj" fmla="val 50000"/>
+            </a:avLst>
+          </a:prstGeom>
+          <a:solidFill>
+            <a:schemeClr val="tx2"/>
+          </a:solidFill>
+          <a:ln w="19050">
+            <a:solidFill>
+              <a:schemeClr val="bg2"/>
+            </a:solidFill>
+            <a:prstDash val="solid"/>
+          </a:ln>
+        </p:spPr>
+        <p:txBody>
+          <a:bodyPr/>
+          <a:lstStyle/>
+          <a:p>
+            <a:endParaRPr lang="en-US"/>
+          </a:p>
+        </p:txBody>
+      </p:sp>
+      <p:sp>
+        <p:nvSpPr>
+          <p:cNvPr id="13" name="Text 11"/>
+          <p:cNvSpPr txBox="1"/>
+          <p:nvPr/>
+        </p:nvSpPr>
+        <p:spPr>
+          <a:xfrm>
+            <a:off x="22160484" y="2697480"/>
+            <a:ext cx="2345436" cy="566928"/>
+          </a:xfrm>
+          <a:prstGeom prst="rect">
+            <a:avLst/>
+          </a:prstGeom>
+          <a:noFill/>
+          <a:ln/>
+        </p:spPr>
+        <p:txBody>
+          <a:bodyPr wrap="square" lIns="0" tIns="0" rIns="0" bIns="0" rtlCol="0" anchor="ctr"/>
+          <a:lstStyle/>
+          <a:p>
+            <a:pPr marL="0" indent="0" algn="ctr">
+              <a:buNone/>
+            </a:pPr>
+            <a:r>
+              <a:rPr lang="en-US" sz="2200" b="1" dirty="0">
+                <a:solidFill>
+                  <a:schemeClr val="bg1"/>
+                </a:solidFill>
+              </a:rPr>
+              <a:t>AI Governance</a:t>
+            </a:r>
+            <a:endParaRPr lang="en-US" sz="2200" dirty="0"/>
+          </a:p>
+        </p:txBody>
+      </p:sp>
+      <p:sp>
+        <p:nvSpPr>
+          <p:cNvPr id="14" name="QR backing"/>
+          <p:cNvSpPr/>
+          <p:nvPr/>
+        </p:nvSpPr>
+        <p:spPr>
+          <a:xfrm>
+            <a:off x="29489400" y="411480"/>
+            <a:ext cx="2743200" cy="2743200"/>
+          </a:xfrm>
+          <a:prstGeom prst="roundRect">
+            <a:avLst>
+              <a:gd name="adj" fmla="val 5000"/>
+            </a:avLst>
+          </a:prstGeom>
+          <a:solidFill>
+            <a:schemeClr val="bg1"/>
           </a:solidFill>
           <a:ln w="12700">
             <a:solidFill>
-              <a:schemeClr val="tx1"/>
+              <a:schemeClr val="bg1"/>
             </a:solidFill>
             <a:prstDash val="solid"/>
           </a:ln>
         </p:spPr>
-      </p:sp>
-      <p:sp>
-        <p:nvSpPr>
-          <p:cNvPr id="23" name="Text 20"/>
+        <p:txBody>
+          <a:bodyPr/>
+          <a:lstStyle/>
+          <a:p>
+            <a:endParaRPr lang="en-US"/>
+          </a:p>
+        </p:txBody>
+      </p:sp>
+      <p:pic>
+        <p:nvPicPr>
+          <p:cNvPr id="15" name="QR code" descr="QR code linking to the GitHub repository"/>
+          <p:cNvPicPr>
+            <a:picLocks noChangeAspect="1"/>
+          </p:cNvPicPr>
+          <p:nvPr/>
+        </p:nvPicPr>
+        <p:blipFill>
+          <a:blip r:embed="rId3"/>
+          <a:stretch>
+            <a:fillRect/>
+          </a:stretch>
+        </p:blipFill>
+        <p:spPr>
+          <a:xfrm>
+            <a:off x="29626560" y="548640"/>
+            <a:ext cx="2468880" cy="2468880"/>
+          </a:xfrm>
+          <a:prstGeom prst="rect">
+            <a:avLst/>
+          </a:prstGeom>
+        </p:spPr>
+      </p:pic>
+      <p:sp>
+        <p:nvSpPr>
+          <p:cNvPr id="16" name="Text 13"/>
           <p:cNvSpPr txBox="1"/>
           <p:nvPr/>
         </p:nvSpPr>
         <p:spPr>
           <a:xfrm>
-            <a:off x="731520" y="12435840"/>
-            <a:ext cx="713232" cy="713232"/>
+            <a:off x="26517600" y="3246120"/>
+            <a:ext cx="5715000" cy="411480"/>
           </a:xfrm>
           <a:prstGeom prst="rect">
             <a:avLst/>
@@ -2906,10 +2213,78 @@
           <a:ln/>
         </p:spPr>
         <p:txBody>
+          <a:bodyPr wrap="square" lIns="0" tIns="0" rIns="0" bIns="0" rtlCol="0" anchor="t"/>
+          <a:lstStyle/>
+          <a:p>
+            <a:pPr marL="0" indent="0" algn="r">
+              <a:buNone/>
+            </a:pPr>
+            <a:r>
+              <a:rPr lang="en-US" sz="2000" dirty="0">
+                <a:solidFill>
+                  <a:schemeClr val="bg2"/>
+                </a:solidFill>
+              </a:rPr>
+              <a:t>Code, app &amp; full report</a:t>
+            </a:r>
+            <a:endParaRPr lang="en-US" sz="2000" dirty="0"/>
+          </a:p>
+        </p:txBody>
+      </p:sp>
+      <p:sp>
+        <p:nvSpPr>
+          <p:cNvPr id="17" name="marker 1"/>
+          <p:cNvSpPr/>
+          <p:nvPr/>
+        </p:nvSpPr>
+        <p:spPr>
+          <a:xfrm>
+            <a:off x="731520" y="4800600"/>
+            <a:ext cx="731520" cy="731520"/>
+          </a:xfrm>
+          <a:prstGeom prst="ellipse">
+            <a:avLst/>
+          </a:prstGeom>
+          <a:solidFill>
+            <a:schemeClr val="tx2"/>
+          </a:solidFill>
+          <a:ln w="12700">
+            <a:solidFill>
+              <a:schemeClr val="tx2"/>
+            </a:solidFill>
+            <a:prstDash val="solid"/>
+          </a:ln>
+        </p:spPr>
+        <p:txBody>
+          <a:bodyPr/>
+          <a:lstStyle/>
+          <a:p>
+            <a:endParaRPr lang="en-US"/>
+          </a:p>
+        </p:txBody>
+      </p:sp>
+      <p:sp>
+        <p:nvSpPr>
+          <p:cNvPr id="18" name="Text 15"/>
+          <p:cNvSpPr txBox="1"/>
+          <p:nvPr/>
+        </p:nvSpPr>
+        <p:spPr>
+          <a:xfrm>
+            <a:off x="731520" y="4800600"/>
+            <a:ext cx="731520" cy="731520"/>
+          </a:xfrm>
+          <a:prstGeom prst="rect">
+            <a:avLst/>
+          </a:prstGeom>
+          <a:noFill/>
+          <a:ln/>
+        </p:spPr>
+        <p:txBody>
           <a:bodyPr wrap="square" lIns="0" tIns="0" rIns="0" bIns="0" rtlCol="0" anchor="ctr"/>
           <a:lstStyle/>
           <a:p>
-            <a:pPr algn="ctr" indent="0" marL="0">
+            <a:pPr marL="0" indent="0" algn="ctr">
               <a:buNone/>
             </a:pPr>
             <a:r>
@@ -2917,13 +2292,229 @@
                 <a:solidFill>
                   <a:schemeClr val="bg1"/>
                 </a:solidFill>
-                <a:latin typeface="+mj-lt" pitchFamily="34" charset="0"/>
-                <a:ea typeface="+mj-lt" pitchFamily="34" charset="-122"/>
-                <a:cs typeface="+mj-lt" pitchFamily="34" charset="-120"/>
-              </a:rPr>
-              <a:t>3</a:t>
+              </a:rPr>
+              <a:t>1</a:t>
             </a:r>
             <a:endParaRPr lang="en-US" sz="3000" dirty="0"/>
+          </a:p>
+        </p:txBody>
+      </p:sp>
+      <p:sp>
+        <p:nvSpPr>
+          <p:cNvPr id="19" name="Text 16"/>
+          <p:cNvSpPr txBox="1"/>
+          <p:nvPr/>
+        </p:nvSpPr>
+        <p:spPr>
+          <a:xfrm>
+            <a:off x="1691640" y="4754880"/>
+            <a:ext cx="8732520" cy="822960"/>
+          </a:xfrm>
+          <a:prstGeom prst="rect">
+            <a:avLst/>
+          </a:prstGeom>
+          <a:noFill/>
+          <a:ln/>
+        </p:spPr>
+        <p:txBody>
+          <a:bodyPr wrap="square" lIns="0" tIns="0" rIns="0" bIns="0" rtlCol="0" anchor="ctr"/>
+          <a:lstStyle/>
+          <a:p>
+            <a:pPr marL="0" indent="0">
+              <a:lnSpc>
+                <a:spcPct val="92000"/>
+              </a:lnSpc>
+              <a:buNone/>
+            </a:pPr>
+            <a:r>
+              <a:rPr lang="en-US" sz="3600" b="1" dirty="0">
+                <a:solidFill>
+                  <a:schemeClr val="tx2"/>
+                </a:solidFill>
+              </a:rPr>
+              <a:t>Explanations should show what you can do</a:t>
+            </a:r>
+            <a:endParaRPr lang="en-US" sz="3600" dirty="0"/>
+          </a:p>
+        </p:txBody>
+      </p:sp>
+      <p:sp>
+        <p:nvSpPr>
+          <p:cNvPr id="20" name="Text 17"/>
+          <p:cNvSpPr txBox="1"/>
+          <p:nvPr/>
+        </p:nvSpPr>
+        <p:spPr>
+          <a:xfrm>
+            <a:off x="731520" y="6035040"/>
+            <a:ext cx="9692640" cy="1280160"/>
+          </a:xfrm>
+          <a:prstGeom prst="rect">
+            <a:avLst/>
+          </a:prstGeom>
+          <a:noFill/>
+          <a:ln/>
+        </p:spPr>
+        <p:txBody>
+          <a:bodyPr wrap="square" lIns="0" tIns="0" rIns="0" bIns="0" rtlCol="0" anchor="t"/>
+          <a:lstStyle/>
+          <a:p>
+            <a:pPr marL="0" indent="0">
+              <a:buNone/>
+            </a:pPr>
+            <a:r>
+              <a:rPr lang="en-US" sz="2600" b="1" dirty="0">
+                <a:solidFill>
+                  <a:schemeClr val="tx1"/>
+                </a:solidFill>
+              </a:rPr>
+              <a:t>Counterfactual explanations</a:t>
+            </a:r>
+            <a:r>
+              <a:rPr lang="en-US" sz="2600" dirty="0">
+                <a:solidFill>
+                  <a:schemeClr val="tx1"/>
+                </a:solidFill>
+              </a:rPr>
+              <a:t>, a core XAI method, answer: what would need to change for the model to say yes? If a person can act on the answer, it is </a:t>
+            </a:r>
+            <a:r>
+              <a:rPr lang="en-US" sz="2600" b="1" dirty="0">
+                <a:solidFill>
+                  <a:schemeClr val="tx1"/>
+                </a:solidFill>
+              </a:rPr>
+              <a:t>recourse</a:t>
+            </a:r>
+            <a:r>
+              <a:rPr lang="en-US" sz="2600" dirty="0">
+                <a:solidFill>
+                  <a:schemeClr val="tx1"/>
+                </a:solidFill>
+              </a:rPr>
+              <a:t>.</a:t>
+            </a:r>
+            <a:endParaRPr lang="en-US" sz="2600" dirty="0"/>
+          </a:p>
+        </p:txBody>
+      </p:sp>
+      <p:sp>
+        <p:nvSpPr>
+          <p:cNvPr id="21" name="DENIED pill"/>
+          <p:cNvSpPr/>
+          <p:nvPr/>
+        </p:nvSpPr>
+        <p:spPr>
+          <a:xfrm>
+            <a:off x="731520" y="7498080"/>
+            <a:ext cx="3794760" cy="1234440"/>
+          </a:xfrm>
+          <a:prstGeom prst="roundRect">
+            <a:avLst>
+              <a:gd name="adj" fmla="val 11111"/>
+            </a:avLst>
+          </a:prstGeom>
+          <a:solidFill>
+            <a:schemeClr val="bg1"/>
+          </a:solidFill>
+          <a:ln w="12700">
+            <a:solidFill>
+              <a:schemeClr val="bg1"/>
+            </a:solidFill>
+            <a:prstDash val="solid"/>
+          </a:ln>
+        </p:spPr>
+        <p:txBody>
+          <a:bodyPr/>
+          <a:lstStyle/>
+          <a:p>
+            <a:endParaRPr lang="en-US"/>
+          </a:p>
+        </p:txBody>
+      </p:sp>
+      <p:sp>
+        <p:nvSpPr>
+          <p:cNvPr id="22" name="Text 19"/>
+          <p:cNvSpPr txBox="1"/>
+          <p:nvPr/>
+        </p:nvSpPr>
+        <p:spPr>
+          <a:xfrm>
+            <a:off x="1005840" y="7635240"/>
+            <a:ext cx="3383280" cy="1005840"/>
+          </a:xfrm>
+          <a:prstGeom prst="rect">
+            <a:avLst/>
+          </a:prstGeom>
+          <a:solidFill>
+            <a:schemeClr val="bg2"/>
+          </a:solidFill>
+          <a:ln/>
+        </p:spPr>
+        <p:txBody>
+          <a:bodyPr wrap="square" lIns="0" tIns="0" rIns="0" bIns="0" rtlCol="0" anchor="t"/>
+          <a:lstStyle/>
+          <a:p>
+            <a:pPr marL="0" indent="0">
+              <a:buNone/>
+            </a:pPr>
+            <a:r>
+              <a:rPr lang="en-US" sz="2200" b="1" dirty="0">
+                <a:solidFill>
+                  <a:schemeClr val="accent2"/>
+                </a:solidFill>
+              </a:rPr>
+              <a:t>DENIED</a:t>
+            </a:r>
+            <a:endParaRPr lang="en-US" sz="2200" dirty="0"/>
+          </a:p>
+          <a:p>
+            <a:pPr marL="0" indent="0">
+              <a:buNone/>
+            </a:pPr>
+            <a:r>
+              <a:rPr lang="en-US" sz="2800" dirty="0">
+                <a:solidFill>
+                  <a:schemeClr val="tx1"/>
+                </a:solidFill>
+              </a:rPr>
+              <a:t>works 40 h/week</a:t>
+            </a:r>
+            <a:endParaRPr lang="en-US" sz="2200" dirty="0"/>
+          </a:p>
+        </p:txBody>
+      </p:sp>
+      <p:sp>
+        <p:nvSpPr>
+          <p:cNvPr id="23" name="APPROVED pill"/>
+          <p:cNvSpPr/>
+          <p:nvPr/>
+        </p:nvSpPr>
+        <p:spPr>
+          <a:xfrm>
+            <a:off x="5715000" y="7498080"/>
+            <a:ext cx="3794760" cy="1234440"/>
+          </a:xfrm>
+          <a:prstGeom prst="roundRect">
+            <a:avLst>
+              <a:gd name="adj" fmla="val 11111"/>
+            </a:avLst>
+          </a:prstGeom>
+          <a:solidFill>
+            <a:schemeClr val="bg1"/>
+          </a:solidFill>
+          <a:ln w="12700">
+            <a:solidFill>
+              <a:schemeClr val="bg1"/>
+            </a:solidFill>
+            <a:prstDash val="solid"/>
+          </a:ln>
+        </p:spPr>
+        <p:txBody>
+          <a:bodyPr/>
+          <a:lstStyle/>
+          <a:p>
+            <a:endParaRPr lang="en-US"/>
           </a:p>
         </p:txBody>
       </p:sp>
@@ -2935,253 +2526,249 @@
         </p:nvSpPr>
         <p:spPr>
           <a:xfrm>
-            <a:off x="1691640" y="12417552"/>
-            <a:ext cx="8732520" cy="749808"/>
+            <a:off x="5989320" y="7635240"/>
+            <a:ext cx="3383280" cy="1005840"/>
           </a:xfrm>
           <a:prstGeom prst="rect">
             <a:avLst/>
           </a:prstGeom>
-          <a:noFill/>
+          <a:solidFill>
+            <a:schemeClr val="bg2"/>
+          </a:solidFill>
           <a:ln/>
         </p:spPr>
         <p:txBody>
+          <a:bodyPr wrap="square" lIns="0" tIns="0" rIns="0" bIns="0" rtlCol="0" anchor="t"/>
+          <a:lstStyle/>
+          <a:p>
+            <a:pPr marL="0" indent="0">
+              <a:buNone/>
+            </a:pPr>
+            <a:r>
+              <a:rPr lang="en-US" sz="2200" b="1" dirty="0">
+                <a:solidFill>
+                  <a:schemeClr val="accent1"/>
+                </a:solidFill>
+              </a:rPr>
+              <a:t>APPROVED</a:t>
+            </a:r>
+            <a:endParaRPr lang="en-US" sz="2200" dirty="0"/>
+          </a:p>
+          <a:p>
+            <a:pPr marL="0" indent="0">
+              <a:buNone/>
+            </a:pPr>
+            <a:r>
+              <a:rPr lang="en-US" sz="2800" dirty="0">
+                <a:solidFill>
+                  <a:schemeClr val="tx1"/>
+                </a:solidFill>
+              </a:rPr>
+              <a:t>works 45 h/week</a:t>
+            </a:r>
+            <a:endParaRPr lang="en-US" sz="2200" dirty="0"/>
+          </a:p>
+        </p:txBody>
+      </p:sp>
+      <p:sp>
+        <p:nvSpPr>
+          <p:cNvPr id="25" name="arrow"/>
+          <p:cNvSpPr/>
+          <p:nvPr/>
+        </p:nvSpPr>
+        <p:spPr>
+          <a:xfrm>
+            <a:off x="4709160" y="7882128"/>
+            <a:ext cx="822960" cy="457200"/>
+          </a:xfrm>
+          <a:prstGeom prst="rightArrow">
+            <a:avLst/>
+          </a:prstGeom>
+          <a:solidFill>
+            <a:schemeClr val="tx2"/>
+          </a:solidFill>
+          <a:ln w="12700">
+            <a:solidFill>
+              <a:schemeClr val="tx2"/>
+            </a:solidFill>
+            <a:prstDash val="solid"/>
+          </a:ln>
+        </p:spPr>
+        <p:txBody>
+          <a:bodyPr/>
+          <a:lstStyle/>
+          <a:p>
+            <a:endParaRPr lang="en-US"/>
+          </a:p>
+        </p:txBody>
+      </p:sp>
+      <p:sp>
+        <p:nvSpPr>
+          <p:cNvPr id="26" name="Text 23"/>
+          <p:cNvSpPr txBox="1"/>
+          <p:nvPr/>
+        </p:nvSpPr>
+        <p:spPr>
+          <a:xfrm>
+            <a:off x="731520" y="8961120"/>
+            <a:ext cx="9692640" cy="868680"/>
+          </a:xfrm>
+          <a:prstGeom prst="rect">
+            <a:avLst/>
+          </a:prstGeom>
+          <a:noFill/>
+          <a:ln/>
+        </p:spPr>
+        <p:txBody>
+          <a:bodyPr wrap="square" lIns="0" tIns="0" rIns="0" bIns="0" rtlCol="0" anchor="t"/>
+          <a:lstStyle/>
+          <a:p>
+            <a:pPr marL="0" indent="0">
+              <a:buNone/>
+            </a:pPr>
+            <a:r>
+              <a:rPr lang="en-US" sz="2600" dirty="0"/>
+              <a:t>An explanation says why you were denied. Recourse says what you can </a:t>
+            </a:r>
+            <a:r>
+              <a:rPr lang="en-US" sz="2600" dirty="0" err="1"/>
+              <a:t>do.</a:t>
+            </a:r>
+            <a:r>
+              <a:rPr lang="en-US" sz="2600" dirty="0" err="1">
+                <a:solidFill>
+                  <a:schemeClr val="tx1"/>
+                </a:solidFill>
+              </a:rPr>
+              <a:t>“Be</a:t>
+            </a:r>
+            <a:r>
+              <a:rPr lang="en-US" sz="2600" dirty="0">
+                <a:solidFill>
+                  <a:schemeClr val="tx1"/>
+                </a:solidFill>
+              </a:rPr>
+              <a:t> older” or “get married” may flip the model, but no one can act on that.</a:t>
+            </a:r>
+          </a:p>
+          <a:p>
+            <a:pPr marL="0" indent="0">
+              <a:buNone/>
+            </a:pPr>
+            <a:endParaRPr lang="en-US" sz="2600" dirty="0"/>
+          </a:p>
+          <a:p>
+            <a:pPr marL="0" indent="0">
+              <a:buNone/>
+            </a:pPr>
+            <a:endParaRPr lang="en-US" sz="2600" dirty="0"/>
+          </a:p>
+        </p:txBody>
+      </p:sp>
+      <p:sp>
+        <p:nvSpPr>
+          <p:cNvPr id="28" name="marker 2"/>
+          <p:cNvSpPr/>
+          <p:nvPr/>
+        </p:nvSpPr>
+        <p:spPr>
+          <a:xfrm>
+            <a:off x="701675" y="13446252"/>
+            <a:ext cx="731520" cy="731520"/>
+          </a:xfrm>
+          <a:prstGeom prst="ellipse">
+            <a:avLst/>
+          </a:prstGeom>
+          <a:solidFill>
+            <a:schemeClr val="tx2"/>
+          </a:solidFill>
+          <a:ln w="12700">
+            <a:solidFill>
+              <a:schemeClr val="tx2"/>
+            </a:solidFill>
+            <a:prstDash val="solid"/>
+          </a:ln>
+        </p:spPr>
+        <p:txBody>
+          <a:bodyPr/>
+          <a:lstStyle/>
+          <a:p>
+            <a:endParaRPr lang="en-US"/>
+          </a:p>
+        </p:txBody>
+      </p:sp>
+      <p:sp>
+        <p:nvSpPr>
+          <p:cNvPr id="29" name="Text 26"/>
+          <p:cNvSpPr txBox="1"/>
+          <p:nvPr/>
+        </p:nvSpPr>
+        <p:spPr>
+          <a:xfrm>
+            <a:off x="701675" y="13446252"/>
+            <a:ext cx="731520" cy="731520"/>
+          </a:xfrm>
+          <a:prstGeom prst="rect">
+            <a:avLst/>
+          </a:prstGeom>
+          <a:noFill/>
+          <a:ln/>
+        </p:spPr>
+        <p:txBody>
           <a:bodyPr wrap="square" lIns="0" tIns="0" rIns="0" bIns="0" rtlCol="0" anchor="ctr"/>
           <a:lstStyle/>
           <a:p>
-            <a:pPr indent="0" marL="0">
+            <a:pPr marL="0" indent="0" algn="ctr">
+              <a:buNone/>
+            </a:pPr>
+            <a:r>
+              <a:rPr lang="en-US" sz="3000" b="1" dirty="0">
+                <a:solidFill>
+                  <a:schemeClr val="bg1"/>
+                </a:solidFill>
+              </a:rPr>
+              <a:t>3</a:t>
+            </a:r>
+            <a:endParaRPr lang="en-US" sz="3000" dirty="0"/>
+          </a:p>
+        </p:txBody>
+      </p:sp>
+      <p:sp>
+        <p:nvSpPr>
+          <p:cNvPr id="30" name="Text 27"/>
+          <p:cNvSpPr txBox="1"/>
+          <p:nvPr/>
+        </p:nvSpPr>
+        <p:spPr>
+          <a:xfrm>
+            <a:off x="1661795" y="13400532"/>
+            <a:ext cx="8732520" cy="1371600"/>
+          </a:xfrm>
+          <a:prstGeom prst="rect">
+            <a:avLst/>
+          </a:prstGeom>
+          <a:noFill/>
+          <a:ln/>
+        </p:spPr>
+        <p:txBody>
+          <a:bodyPr wrap="square" lIns="0" tIns="0" rIns="0" bIns="0" rtlCol="0" anchor="t"/>
+          <a:lstStyle/>
+          <a:p>
+            <a:pPr marL="0" indent="0">
               <a:lnSpc>
-                <a:spcPct val="95000"/>
+                <a:spcPct val="92000"/>
               </a:lnSpc>
               <a:buNone/>
             </a:pPr>
             <a:r>
-              <a:rPr lang="en-US" sz="3800" b="1" dirty="0">
-                <a:solidFill>
-                  <a:schemeClr val="tx1"/>
-                </a:solidFill>
-                <a:latin typeface="+mj-lt" pitchFamily="34" charset="0"/>
-                <a:ea typeface="+mj-lt" pitchFamily="34" charset="-122"/>
-                <a:cs typeface="+mj-lt" pitchFamily="34" charset="-120"/>
-              </a:rPr>
-              <a:t>How the audit works</a:t>
-            </a:r>
-            <a:endParaRPr lang="en-US" sz="3800" dirty="0"/>
-          </a:p>
-        </p:txBody>
-      </p:sp>
-      <p:sp>
-        <p:nvSpPr>
-          <p:cNvPr id="25" name="Text 22"/>
-          <p:cNvSpPr txBox="1"/>
-          <p:nvPr/>
-        </p:nvSpPr>
-        <p:spPr>
-          <a:xfrm>
-            <a:off x="731520" y="13395960"/>
-            <a:ext cx="2011680" cy="1051560"/>
-          </a:xfrm>
-          <a:prstGeom prst="rect">
-            <a:avLst/>
-          </a:prstGeom>
-          <a:noFill/>
-          <a:ln/>
-        </p:spPr>
-        <p:txBody>
-          <a:bodyPr wrap="square" lIns="0" tIns="0" rIns="0" bIns="0" rtlCol="0" anchor="t"/>
-          <a:lstStyle/>
-          <a:p>
-            <a:pPr indent="0" marL="0">
-              <a:buNone/>
-            </a:pPr>
-            <a:r>
-              <a:rPr lang="en-US" sz="2200" b="1" dirty="0">
+              <a:rPr lang="en-US" sz="3600" b="1" dirty="0">
                 <a:solidFill>
                   <a:schemeClr val="tx2"/>
                 </a:solidFill>
               </a:rPr>
-              <a:t>Data</a:t>
-            </a:r>
-            <a:endParaRPr lang="en-US" sz="2200" dirty="0"/>
-          </a:p>
-        </p:txBody>
-      </p:sp>
-      <p:sp>
-        <p:nvSpPr>
-          <p:cNvPr id="26" name="Text 23"/>
-          <p:cNvSpPr txBox="1"/>
-          <p:nvPr/>
-        </p:nvSpPr>
-        <p:spPr>
-          <a:xfrm>
-            <a:off x="2880360" y="13395960"/>
-            <a:ext cx="7543800" cy="1051560"/>
-          </a:xfrm>
-          <a:prstGeom prst="rect">
-            <a:avLst/>
-          </a:prstGeom>
-          <a:noFill/>
-          <a:ln/>
-        </p:spPr>
-        <p:txBody>
-          <a:bodyPr wrap="square" lIns="0" tIns="0" rIns="0" bIns="0" rtlCol="0" anchor="t"/>
-          <a:lstStyle/>
-          <a:p>
-            <a:pPr indent="0" marL="0">
-              <a:buNone/>
-            </a:pPr>
-            <a:r>
-              <a:rPr lang="en-US" sz="2200" dirty="0">
-                <a:solidFill>
-                  <a:schemeClr val="tx1"/>
-                </a:solidFill>
-              </a:rPr>
-              <a:t>UCI Adult 1994 (48,842 people) and ACS North Carolina 2023 (56,486 workers). “Approved” = income above $50K in 1994, $103K in 2023 (the same bar in 2023 dollars).</a:t>
-            </a:r>
-            <a:endParaRPr lang="en-US" sz="2200" dirty="0"/>
-          </a:p>
-        </p:txBody>
-      </p:sp>
-      <p:sp>
-        <p:nvSpPr>
-          <p:cNvPr id="27" name="Text 24"/>
-          <p:cNvSpPr txBox="1"/>
-          <p:nvPr/>
-        </p:nvSpPr>
-        <p:spPr>
-          <a:xfrm>
-            <a:off x="731520" y="14859000"/>
-            <a:ext cx="2011680" cy="731520"/>
-          </a:xfrm>
-          <a:prstGeom prst="rect">
-            <a:avLst/>
-          </a:prstGeom>
-          <a:noFill/>
-          <a:ln/>
-        </p:spPr>
-        <p:txBody>
-          <a:bodyPr wrap="square" lIns="0" tIns="0" rIns="0" bIns="0" rtlCol="0" anchor="t"/>
-          <a:lstStyle/>
-          <a:p>
-            <a:pPr indent="0" marL="0">
-              <a:buNone/>
-            </a:pPr>
-            <a:r>
-              <a:rPr lang="en-US" sz="2200" b="1" dirty="0">
-                <a:solidFill>
-                  <a:schemeClr val="tx2"/>
-                </a:solidFill>
-              </a:rPr>
-              <a:t>Models</a:t>
-            </a:r>
-            <a:endParaRPr lang="en-US" sz="2200" dirty="0"/>
-          </a:p>
-        </p:txBody>
-      </p:sp>
-      <p:sp>
-        <p:nvSpPr>
-          <p:cNvPr id="28" name="Text 25"/>
-          <p:cNvSpPr txBox="1"/>
-          <p:nvPr/>
-        </p:nvSpPr>
-        <p:spPr>
-          <a:xfrm>
-            <a:off x="2880360" y="14859000"/>
-            <a:ext cx="7543800" cy="731520"/>
-          </a:xfrm>
-          <a:prstGeom prst="rect">
-            <a:avLst/>
-          </a:prstGeom>
-          <a:noFill/>
-          <a:ln/>
-        </p:spPr>
-        <p:txBody>
-          <a:bodyPr wrap="square" lIns="0" tIns="0" rIns="0" bIns="0" rtlCol="0" anchor="t"/>
-          <a:lstStyle/>
-          <a:p>
-            <a:pPr indent="0" marL="0">
-              <a:buNone/>
-            </a:pPr>
-            <a:r>
-              <a:rPr lang="en-US" sz="2200" dirty="0">
-                <a:solidFill>
-                  <a:schemeClr val="tx1"/>
-                </a:solidFill>
-              </a:rPr>
-              <a:t>Gradient boosting and logistic regression. Sex and race are not model inputs.</a:t>
-            </a:r>
-            <a:endParaRPr lang="en-US" sz="2200" dirty="0"/>
-          </a:p>
-        </p:txBody>
-      </p:sp>
-      <p:sp>
-        <p:nvSpPr>
-          <p:cNvPr id="29" name="Text 26"/>
-          <p:cNvSpPr txBox="1"/>
-          <p:nvPr/>
-        </p:nvSpPr>
-        <p:spPr>
-          <a:xfrm>
-            <a:off x="731520" y="16002000"/>
-            <a:ext cx="2011680" cy="1371600"/>
-          </a:xfrm>
-          <a:prstGeom prst="rect">
-            <a:avLst/>
-          </a:prstGeom>
-          <a:noFill/>
-          <a:ln/>
-        </p:spPr>
-        <p:txBody>
-          <a:bodyPr wrap="square" lIns="0" tIns="0" rIns="0" bIns="0" rtlCol="0" anchor="t"/>
-          <a:lstStyle/>
-          <a:p>
-            <a:pPr indent="0" marL="0">
-              <a:buNone/>
-            </a:pPr>
-            <a:r>
-              <a:rPr lang="en-US" sz="2200" b="1" dirty="0">
-                <a:solidFill>
-                  <a:schemeClr val="tx2"/>
-                </a:solidFill>
-              </a:rPr>
-              <a:t>Realistic</a:t>
-            </a:r>
-            <a:endParaRPr lang="en-US" sz="2200" dirty="0"/>
-          </a:p>
-        </p:txBody>
-      </p:sp>
-      <p:sp>
-        <p:nvSpPr>
-          <p:cNvPr id="30" name="Text 27"/>
-          <p:cNvSpPr txBox="1"/>
-          <p:nvPr/>
-        </p:nvSpPr>
-        <p:spPr>
-          <a:xfrm>
-            <a:off x="2880360" y="16002000"/>
-            <a:ext cx="7543800" cy="1371600"/>
-          </a:xfrm>
-          <a:prstGeom prst="rect">
-            <a:avLst/>
-          </a:prstGeom>
-          <a:noFill/>
-          <a:ln/>
-        </p:spPr>
-        <p:txBody>
-          <a:bodyPr wrap="square" lIns="0" tIns="0" rIns="0" bIns="0" rtlCol="0" anchor="t"/>
-          <a:lstStyle/>
-          <a:p>
-            <a:pPr indent="0" marL="0">
-              <a:buNone/>
-            </a:pPr>
-            <a:r>
-              <a:rPr lang="en-US" sz="2200" dirty="0">
-                <a:solidFill>
-                  <a:schemeClr val="tx1"/>
-                </a:solidFill>
-              </a:rPr>
-              <a:t>Cheapest change within 6 effort units (1 = a year of school), touching only what a person can change. Immutable: age, marital status, household role, birthplace, capital gains. Up only: education. Bounded: hours, work sector, occupation.</a:t>
-            </a:r>
-            <a:endParaRPr lang="en-US" sz="2200" dirty="0"/>
+              <a:t>We compared realistic and off-the-shelf recourse</a:t>
+            </a:r>
+            <a:endParaRPr lang="en-US" sz="3600" dirty="0"/>
           </a:p>
         </p:txBody>
       </p:sp>
@@ -3193,8 +2780,8 @@
         </p:nvSpPr>
         <p:spPr>
           <a:xfrm>
-            <a:off x="731520" y="17785080"/>
-            <a:ext cx="2011680" cy="731520"/>
+            <a:off x="610870" y="14752789"/>
+            <a:ext cx="2148840" cy="1143000"/>
           </a:xfrm>
           <a:prstGeom prst="rect">
             <a:avLst/>
@@ -3206,18 +2793,18 @@
           <a:bodyPr wrap="square" lIns="0" tIns="0" rIns="0" bIns="0" rtlCol="0" anchor="t"/>
           <a:lstStyle/>
           <a:p>
-            <a:pPr indent="0" marL="0">
+            <a:pPr marL="0" indent="0">
               <a:buNone/>
             </a:pPr>
             <a:r>
-              <a:rPr lang="en-US" sz="2200" b="1" dirty="0">
+              <a:rPr lang="en-US" sz="2400" b="1" dirty="0">
                 <a:solidFill>
                   <a:schemeClr val="tx2"/>
                 </a:solidFill>
               </a:rPr>
-              <a:t>Off-the-shelf</a:t>
-            </a:r>
-            <a:endParaRPr lang="en-US" sz="2200" dirty="0"/>
+              <a:t>Data</a:t>
+            </a:r>
+            <a:endParaRPr lang="en-US" sz="2400" dirty="0"/>
           </a:p>
         </p:txBody>
       </p:sp>
@@ -3229,8 +2816,8 @@
         </p:nvSpPr>
         <p:spPr>
           <a:xfrm>
-            <a:off x="2880360" y="17785080"/>
-            <a:ext cx="7543800" cy="731520"/>
+            <a:off x="2851150" y="14752789"/>
+            <a:ext cx="7452360" cy="1143000"/>
           </a:xfrm>
           <a:prstGeom prst="rect">
             <a:avLst/>
@@ -3242,18 +2829,18 @@
           <a:bodyPr wrap="square" lIns="0" tIns="0" rIns="0" bIns="0" rtlCol="0" anchor="t"/>
           <a:lstStyle/>
           <a:p>
-            <a:pPr indent="0" marL="0">
-              <a:buNone/>
-            </a:pPr>
-            <a:r>
-              <a:rPr lang="en-US" sz="2200" dirty="0">
+            <a:r>
+              <a:rPr lang="en-US" sz="2400" dirty="0">
                 <a:solidFill>
                   <a:schemeClr val="tx1"/>
                 </a:solidFill>
               </a:rPr>
-              <a:t>Any feature may change, cheapest by plain distance, as generic counterfactual tools do.</a:t>
-            </a:r>
-            <a:endParaRPr lang="en-US" sz="2200" dirty="0"/>
+              <a:t>1994 US Census (Adult) and 2023 North Carolina census (ACS), with the same inflation-adjusted income </a:t>
+            </a:r>
+            <a:r>
+              <a:rPr lang="en-US" sz="2400" dirty="0"/>
+              <a:t>bar “Approved” = income above $50K in 1994, $103K in 2023 (the same bar in 2023 dollars).</a:t>
+            </a:r>
           </a:p>
         </p:txBody>
       </p:sp>
@@ -3265,8 +2852,8 @@
         </p:nvSpPr>
         <p:spPr>
           <a:xfrm>
-            <a:off x="731520" y="18928080"/>
-            <a:ext cx="2011680" cy="731520"/>
+            <a:off x="610870" y="17419320"/>
+            <a:ext cx="2148840" cy="1143000"/>
           </a:xfrm>
           <a:prstGeom prst="rect">
             <a:avLst/>
@@ -3278,18 +2865,18 @@
           <a:bodyPr wrap="square" lIns="0" tIns="0" rIns="0" bIns="0" rtlCol="0" anchor="t"/>
           <a:lstStyle/>
           <a:p>
-            <a:pPr indent="0" marL="0">
+            <a:pPr marL="0" indent="0">
               <a:buNone/>
             </a:pPr>
             <a:r>
-              <a:rPr lang="en-US" sz="2200" b="1" dirty="0">
+              <a:rPr lang="en-US" sz="2400" b="1" dirty="0">
                 <a:solidFill>
                   <a:schemeClr val="tx2"/>
                 </a:solidFill>
               </a:rPr>
-              <a:t>Statistics</a:t>
-            </a:r>
-            <a:endParaRPr lang="en-US" sz="2200" dirty="0"/>
+              <a:t>Realistic</a:t>
+            </a:r>
+            <a:endParaRPr lang="en-US" sz="2400" dirty="0"/>
           </a:p>
         </p:txBody>
       </p:sp>
@@ -3301,8 +2888,8 @@
         </p:nvSpPr>
         <p:spPr>
           <a:xfrm>
-            <a:off x="2880360" y="18928080"/>
-            <a:ext cx="7543800" cy="731520"/>
+            <a:off x="2851150" y="17419320"/>
+            <a:ext cx="7452360" cy="1143000"/>
           </a:xfrm>
           <a:prstGeom prst="rect">
             <a:avLst/>
@@ -3314,18 +2901,18 @@
           <a:bodyPr wrap="square" lIns="0" tIns="0" rIns="0" bIns="0" rtlCol="0" anchor="t"/>
           <a:lstStyle/>
           <a:p>
-            <a:pPr indent="0" marL="0">
+            <a:pPr marL="0" indent="0">
               <a:buNone/>
             </a:pPr>
             <a:r>
-              <a:rPr lang="en-US" sz="2200" dirty="0">
+              <a:rPr lang="en-US" sz="2400" dirty="0">
                 <a:solidFill>
                   <a:schemeClr val="tx1"/>
                 </a:solidFill>
               </a:rPr>
-              <a:t>~800 denied applicants per dataset; 95% bootstrap CIs; groups compared at the same starting distance from approval.</a:t>
-            </a:r>
-            <a:endParaRPr lang="en-US" sz="2200" dirty="0"/>
+              <a:t>Only what a person can change: more school, hours, job. Never age, marriage, or birthplace</a:t>
+            </a:r>
+            <a:endParaRPr lang="en-US" sz="2400" dirty="0"/>
           </a:p>
         </p:txBody>
       </p:sp>
@@ -3337,8 +2924,8 @@
         </p:nvSpPr>
         <p:spPr>
           <a:xfrm>
-            <a:off x="10972800" y="3931920"/>
-            <a:ext cx="10972800" cy="1463040"/>
+            <a:off x="593028" y="18520117"/>
+            <a:ext cx="2148840" cy="777240"/>
           </a:xfrm>
           <a:prstGeom prst="rect">
             <a:avLst/>
@@ -3350,35 +2937,18 @@
           <a:bodyPr wrap="square" lIns="0" tIns="0" rIns="0" bIns="0" rtlCol="0" anchor="t"/>
           <a:lstStyle/>
           <a:p>
-            <a:pPr indent="0" marL="0">
+            <a:pPr marL="0" indent="0">
               <a:buNone/>
             </a:pPr>
             <a:r>
-              <a:rPr lang="en-US" sz="4600" b="1" dirty="0">
-                <a:solidFill>
-                  <a:schemeClr val="tx1"/>
-                </a:solidFill>
-                <a:latin typeface="+mj-lt" pitchFamily="34" charset="0"/>
-                <a:ea typeface="+mj-lt" pitchFamily="34" charset="-122"/>
-                <a:cs typeface="+mj-lt" pitchFamily="34" charset="-120"/>
-              </a:rPr>
-              <a:t>Young applicants have almost no path to approval, </a:t>
-            </a:r>
-            <a:pPr indent="0" marL="0">
-              <a:buNone/>
-            </a:pPr>
-            <a:r>
-              <a:rPr lang="en-US" sz="4600" b="1" dirty="0">
-                <a:solidFill>
-                  <a:schemeClr val="accent5"/>
-                </a:solidFill>
-                <a:latin typeface="+mj-lt" pitchFamily="34" charset="0"/>
-                <a:ea typeface="+mj-lt" pitchFamily="34" charset="-122"/>
-                <a:cs typeface="+mj-lt" pitchFamily="34" charset="-120"/>
-              </a:rPr>
-              <a:t>and the gap grew</a:t>
-            </a:r>
-            <a:endParaRPr lang="en-US" sz="4600" dirty="0"/>
+              <a:rPr lang="en-US" sz="2400" b="1" dirty="0">
+                <a:solidFill>
+                  <a:schemeClr val="tx2"/>
+                </a:solidFill>
+              </a:rPr>
+              <a:t>Off-the-shelf</a:t>
+            </a:r>
+            <a:endParaRPr lang="en-US" sz="2400" dirty="0"/>
           </a:p>
         </p:txBody>
       </p:sp>
@@ -3390,8 +2960,8 @@
         </p:nvSpPr>
         <p:spPr>
           <a:xfrm>
-            <a:off x="10972800" y="5532120"/>
-            <a:ext cx="3474720" cy="1143000"/>
+            <a:off x="2833308" y="18520117"/>
+            <a:ext cx="7452360" cy="777240"/>
           </a:xfrm>
           <a:prstGeom prst="rect">
             <a:avLst/>
@@ -3403,21 +2973,18 @@
           <a:bodyPr wrap="square" lIns="0" tIns="0" rIns="0" bIns="0" rtlCol="0" anchor="t"/>
           <a:lstStyle/>
           <a:p>
-            <a:pPr indent="0" marL="0">
+            <a:pPr marL="0" indent="0">
               <a:buNone/>
             </a:pPr>
             <a:r>
-              <a:rPr lang="en-US" sz="8000" b="1" dirty="0">
-                <a:solidFill>
-                  <a:schemeClr val="accent5"/>
-                </a:solidFill>
-                <a:latin typeface="+mj-lt" pitchFamily="34" charset="0"/>
-                <a:ea typeface="+mj-lt" pitchFamily="34" charset="-122"/>
-                <a:cs typeface="+mj-lt" pitchFamily="34" charset="-120"/>
-              </a:rPr>
-              <a:t>8%</a:t>
-            </a:r>
-            <a:endParaRPr lang="en-US" sz="8000" dirty="0"/>
+              <a:rPr lang="en-US" sz="2400" dirty="0">
+                <a:solidFill>
+                  <a:schemeClr val="tx1"/>
+                </a:solidFill>
+              </a:rPr>
+              <a:t>Anything may change, as generic counterfactual tools allow</a:t>
+            </a:r>
+            <a:endParaRPr lang="en-US" sz="2400" dirty="0"/>
           </a:p>
         </p:txBody>
       </p:sp>
@@ -3429,8 +2996,8 @@
         </p:nvSpPr>
         <p:spPr>
           <a:xfrm>
-            <a:off x="10972800" y="6720840"/>
-            <a:ext cx="3474720" cy="914400"/>
+            <a:off x="647034" y="19408140"/>
+            <a:ext cx="2148840" cy="1143000"/>
           </a:xfrm>
           <a:prstGeom prst="rect">
             <a:avLst/>
@@ -3442,18 +3009,18 @@
           <a:bodyPr wrap="square" lIns="0" tIns="0" rIns="0" bIns="0" rtlCol="0" anchor="t"/>
           <a:lstStyle/>
           <a:p>
-            <a:pPr indent="0" marL="0">
+            <a:pPr marL="0" indent="0">
               <a:buNone/>
             </a:pPr>
             <a:r>
-              <a:rPr lang="en-US" sz="2000" dirty="0">
+              <a:rPr lang="en-US" sz="2400" b="1" dirty="0">
                 <a:solidFill>
                   <a:schemeClr val="tx2"/>
                 </a:solidFill>
               </a:rPr>
-              <a:t>of denied under-30s have realistic recourse (2023)</a:t>
-            </a:r>
-            <a:endParaRPr lang="en-US" sz="2000" dirty="0"/>
+              <a:t>Evidence</a:t>
+            </a:r>
+            <a:endParaRPr lang="en-US" sz="2400" dirty="0"/>
           </a:p>
         </p:txBody>
       </p:sp>
@@ -3465,8 +3032,8 @@
         </p:nvSpPr>
         <p:spPr>
           <a:xfrm>
-            <a:off x="14630400" y="5532120"/>
-            <a:ext cx="3474720" cy="1143000"/>
+            <a:off x="2887314" y="19408140"/>
+            <a:ext cx="7452360" cy="1143000"/>
           </a:xfrm>
           <a:prstGeom prst="rect">
             <a:avLst/>
@@ -3478,21 +3045,18 @@
           <a:bodyPr wrap="square" lIns="0" tIns="0" rIns="0" bIns="0" rtlCol="0" anchor="t"/>
           <a:lstStyle/>
           <a:p>
-            <a:pPr indent="0" marL="0">
+            <a:pPr marL="0" indent="0">
               <a:buNone/>
             </a:pPr>
             <a:r>
-              <a:rPr lang="en-US" sz="8000" b="1" dirty="0">
-                <a:solidFill>
-                  <a:schemeClr val="accent4"/>
-                </a:solidFill>
-                <a:latin typeface="+mj-lt" pitchFamily="34" charset="0"/>
-                <a:ea typeface="+mj-lt" pitchFamily="34" charset="-122"/>
-                <a:cs typeface="+mj-lt" pitchFamily="34" charset="-120"/>
-              </a:rPr>
-              <a:t>84%</a:t>
-            </a:r>
-            <a:endParaRPr lang="en-US" sz="8000" dirty="0"/>
+              <a:rPr lang="en-US" sz="2400" dirty="0">
+                <a:solidFill>
+                  <a:schemeClr val="tx1"/>
+                </a:solidFill>
+              </a:rPr>
+              <a:t>~800 denied applicants per dataset; 95% bootstrap CIs; groups compared at the same starting distance</a:t>
+            </a:r>
+            <a:endParaRPr lang="en-US" sz="2400" dirty="0"/>
           </a:p>
         </p:txBody>
       </p:sp>
@@ -3504,8 +3068,8 @@
         </p:nvSpPr>
         <p:spPr>
           <a:xfrm>
-            <a:off x="14630400" y="6720840"/>
-            <a:ext cx="3474720" cy="914400"/>
+            <a:off x="10972800" y="4617720"/>
+            <a:ext cx="10789920" cy="1417320"/>
           </a:xfrm>
           <a:prstGeom prst="rect">
             <a:avLst/>
@@ -3517,18 +3081,24 @@
           <a:bodyPr wrap="square" lIns="0" tIns="0" rIns="0" bIns="0" rtlCol="0" anchor="t"/>
           <a:lstStyle/>
           <a:p>
-            <a:pPr indent="0" marL="0">
-              <a:buNone/>
-            </a:pPr>
-            <a:r>
-              <a:rPr lang="en-US" sz="2000" dirty="0">
+            <a:r>
+              <a:rPr lang="en-US" sz="5000" b="1" dirty="0">
                 <a:solidFill>
                   <a:schemeClr val="tx2"/>
                 </a:solidFill>
               </a:rPr>
-              <a:t>of denied 30–49-year-olds do</a:t>
-            </a:r>
-            <a:endParaRPr lang="en-US" sz="2000" dirty="0"/>
+              <a:t>Under-30s have almost no realistic path to approval</a:t>
+            </a:r>
+          </a:p>
+          <a:p>
+            <a:br>
+              <a:rPr lang="en-US" sz="5000" b="1" dirty="0">
+                <a:solidFill>
+                  <a:schemeClr val="accent2"/>
+                </a:solidFill>
+              </a:rPr>
+            </a:br>
+            <a:endParaRPr lang="en-US" sz="5000" dirty="0"/>
           </a:p>
         </p:txBody>
       </p:sp>
@@ -3540,7 +3110,7 @@
         </p:nvSpPr>
         <p:spPr>
           <a:xfrm>
-            <a:off x="18288000" y="5532120"/>
+            <a:off x="10972800" y="7669530"/>
             <a:ext cx="3474720" cy="1143000"/>
           </a:xfrm>
           <a:prstGeom prst="rect">
@@ -3553,19 +3123,16 @@
           <a:bodyPr wrap="square" lIns="0" tIns="0" rIns="0" bIns="0" rtlCol="0" anchor="t"/>
           <a:lstStyle/>
           <a:p>
-            <a:pPr indent="0" marL="0">
+            <a:pPr marL="0" indent="0">
               <a:buNone/>
             </a:pPr>
             <a:r>
               <a:rPr lang="en-US" sz="8000" b="1" dirty="0">
                 <a:solidFill>
-                  <a:schemeClr val="accent5"/>
-                </a:solidFill>
-                <a:latin typeface="+mj-lt" pitchFamily="34" charset="0"/>
-                <a:ea typeface="+mj-lt" pitchFamily="34" charset="-122"/>
-                <a:cs typeface="+mj-lt" pitchFamily="34" charset="-120"/>
-              </a:rPr>
-              <a:t>−47 pp</a:t>
+                  <a:schemeClr val="accent2"/>
+                </a:solidFill>
+              </a:rPr>
+              <a:t>98%</a:t>
             </a:r>
             <a:endParaRPr lang="en-US" sz="8000" dirty="0"/>
           </a:p>
@@ -3579,8 +3146,8 @@
         </p:nvSpPr>
         <p:spPr>
           <a:xfrm>
-            <a:off x="18288000" y="6720840"/>
-            <a:ext cx="3474720" cy="914400"/>
+            <a:off x="10972800" y="8858250"/>
+            <a:ext cx="3429000" cy="1097280"/>
           </a:xfrm>
           <a:prstGeom prst="rect">
             <a:avLst/>
@@ -3592,18 +3159,18 @@
           <a:bodyPr wrap="square" lIns="0" tIns="0" rIns="0" bIns="0" rtlCol="0" anchor="t"/>
           <a:lstStyle/>
           <a:p>
-            <a:pPr indent="0" marL="0">
+            <a:pPr marL="0" indent="0">
               <a:buNone/>
             </a:pPr>
             <a:r>
-              <a:rPr lang="en-US" sz="2000" dirty="0">
-                <a:solidFill>
-                  <a:schemeClr val="tx2"/>
-                </a:solidFill>
-              </a:rPr>
-              <a:t>gap at the same starting distance (2023), up from −6 pp in 1994</a:t>
-            </a:r>
-            <a:endParaRPr lang="en-US" sz="2000" dirty="0"/>
+              <a:rPr lang="en-US" sz="2200" dirty="0">
+                <a:solidFill>
+                  <a:schemeClr val="tx1"/>
+                </a:solidFill>
+              </a:rPr>
+              <a:t>of qualified under-30s are denied (2023)</a:t>
+            </a:r>
+            <a:endParaRPr lang="en-US" sz="2200" dirty="0"/>
           </a:p>
         </p:txBody>
       </p:sp>
@@ -3615,8 +3182,8 @@
         </p:nvSpPr>
         <p:spPr>
           <a:xfrm>
-            <a:off x="10972800" y="8092440"/>
-            <a:ext cx="10972800" cy="457200"/>
+            <a:off x="14630400" y="7669530"/>
+            <a:ext cx="3474720" cy="1143000"/>
           </a:xfrm>
           <a:prstGeom prst="rect">
             <a:avLst/>
@@ -3628,16 +3195,52 @@
           <a:bodyPr wrap="square" lIns="0" tIns="0" rIns="0" bIns="0" rtlCol="0" anchor="t"/>
           <a:lstStyle/>
           <a:p>
-            <a:pPr indent="0" marL="0">
+            <a:pPr marL="0" indent="0">
               <a:buNone/>
             </a:pPr>
             <a:r>
-              <a:rPr lang="en-US" sz="2200" b="1" dirty="0">
+              <a:rPr lang="en-US" sz="8000" b="1" dirty="0">
+                <a:solidFill>
+                  <a:schemeClr val="accent2"/>
+                </a:solidFill>
+              </a:rPr>
+              <a:t>8%</a:t>
+            </a:r>
+            <a:endParaRPr lang="en-US" sz="8000" dirty="0"/>
+          </a:p>
+        </p:txBody>
+      </p:sp>
+      <p:sp>
+        <p:nvSpPr>
+          <p:cNvPr id="43" name="Text 40"/>
+          <p:cNvSpPr txBox="1"/>
+          <p:nvPr/>
+        </p:nvSpPr>
+        <p:spPr>
+          <a:xfrm>
+            <a:off x="14630400" y="8858250"/>
+            <a:ext cx="3429000" cy="1097280"/>
+          </a:xfrm>
+          <a:prstGeom prst="rect">
+            <a:avLst/>
+          </a:prstGeom>
+          <a:noFill/>
+          <a:ln/>
+        </p:spPr>
+        <p:txBody>
+          <a:bodyPr wrap="square" lIns="0" tIns="0" rIns="0" bIns="0" rtlCol="0" anchor="t"/>
+          <a:lstStyle/>
+          <a:p>
+            <a:pPr marL="0" indent="0">
+              <a:buNone/>
+            </a:pPr>
+            <a:r>
+              <a:rPr lang="en-US" sz="2200" dirty="0">
                 <a:solidFill>
                   <a:schemeClr val="tx1"/>
                 </a:solidFill>
               </a:rPr>
-              <a:t>Recourse gap vs the largest group, compared at the same starting distance (95% CI)</a:t>
+              <a:t>of denied under-30s have a realistic path</a:t>
             </a:r>
             <a:endParaRPr lang="en-US" sz="2200" dirty="0"/>
           </a:p>
@@ -3645,43 +3248,204 @@
       </p:sp>
       <p:sp>
         <p:nvSpPr>
-          <p:cNvPr id="43" name="under-30 highlight"/>
+          <p:cNvPr id="44" name="Text 41"/>
+          <p:cNvSpPr txBox="1"/>
+          <p:nvPr/>
+        </p:nvSpPr>
+        <p:spPr>
+          <a:xfrm>
+            <a:off x="18288000" y="7669530"/>
+            <a:ext cx="3474720" cy="1143000"/>
+          </a:xfrm>
+          <a:prstGeom prst="rect">
+            <a:avLst/>
+          </a:prstGeom>
+          <a:noFill/>
+          <a:ln/>
+        </p:spPr>
+        <p:txBody>
+          <a:bodyPr wrap="square" lIns="0" tIns="0" rIns="0" bIns="0" rtlCol="0" anchor="t"/>
+          <a:lstStyle/>
+          <a:p>
+            <a:pPr marL="0" indent="0">
+              <a:buNone/>
+            </a:pPr>
+            <a:r>
+              <a:rPr lang="en-US" sz="8000" b="1" dirty="0">
+                <a:solidFill>
+                  <a:schemeClr val="accent4"/>
+                </a:solidFill>
+              </a:rPr>
+              <a:t>84%</a:t>
+            </a:r>
+            <a:endParaRPr lang="en-US" sz="8000" dirty="0"/>
+          </a:p>
+        </p:txBody>
+      </p:sp>
+      <p:sp>
+        <p:nvSpPr>
+          <p:cNvPr id="45" name="Text 42"/>
+          <p:cNvSpPr txBox="1"/>
+          <p:nvPr/>
+        </p:nvSpPr>
+        <p:spPr>
+          <a:xfrm>
+            <a:off x="18288000" y="8858250"/>
+            <a:ext cx="3429000" cy="1097280"/>
+          </a:xfrm>
+          <a:prstGeom prst="rect">
+            <a:avLst/>
+          </a:prstGeom>
+          <a:noFill/>
+          <a:ln/>
+        </p:spPr>
+        <p:txBody>
+          <a:bodyPr wrap="square" lIns="0" tIns="0" rIns="0" bIns="0" rtlCol="0" anchor="t"/>
+          <a:lstStyle/>
+          <a:p>
+            <a:pPr marL="0" indent="0">
+              <a:buNone/>
+            </a:pPr>
+            <a:r>
+              <a:rPr lang="en-US" sz="2200" dirty="0">
+                <a:solidFill>
+                  <a:schemeClr val="tx1"/>
+                </a:solidFill>
+              </a:rPr>
+              <a:t>of denied 30–49-year-olds do</a:t>
+            </a:r>
+            <a:endParaRPr lang="en-US" sz="2200" dirty="0"/>
+          </a:p>
+        </p:txBody>
+      </p:sp>
+      <p:sp>
+        <p:nvSpPr>
+          <p:cNvPr id="46" name="Text 43"/>
+          <p:cNvSpPr txBox="1"/>
+          <p:nvPr/>
+        </p:nvSpPr>
+        <p:spPr>
+          <a:xfrm>
+            <a:off x="10972800" y="10012680"/>
+            <a:ext cx="10972800" cy="868680"/>
+          </a:xfrm>
+          <a:prstGeom prst="rect">
+            <a:avLst/>
+          </a:prstGeom>
+          <a:noFill/>
+          <a:ln/>
+        </p:spPr>
+        <p:txBody>
+          <a:bodyPr wrap="square" lIns="0" tIns="0" rIns="0" bIns="0" rtlCol="0" anchor="t"/>
+          <a:lstStyle/>
+          <a:p>
+            <a:pPr marL="0" indent="0">
+              <a:buNone/>
+            </a:pPr>
+            <a:r>
+              <a:rPr lang="en-US" sz="2400" b="1" dirty="0">
+                <a:solidFill>
+                  <a:schemeClr val="tx2"/>
+                </a:solidFill>
+              </a:rPr>
+              <a:t>Recourse gap vs the largest group, at the same starting distance (95% CI)</a:t>
+            </a:r>
+            <a:endParaRPr lang="en-US" sz="2400" dirty="0"/>
+          </a:p>
+          <a:p>
+            <a:pPr marL="0" indent="0">
+              <a:buNone/>
+            </a:pPr>
+            <a:r>
+              <a:rPr lang="en-US" sz="2400" b="1" dirty="0">
+                <a:solidFill>
+                  <a:srgbClr val="666666"/>
+                </a:solidFill>
+              </a:rPr>
+              <a:t>● 1994</a:t>
+            </a:r>
+            <a:r>
+              <a:rPr lang="en-US" sz="2400" b="1" dirty="0">
+                <a:solidFill>
+                  <a:schemeClr val="tx1"/>
+                </a:solidFill>
+              </a:rPr>
+              <a:t>      </a:t>
+            </a:r>
+            <a:r>
+              <a:rPr lang="en-US" sz="2400" b="1" dirty="0">
+                <a:solidFill>
+                  <a:srgbClr val="0577B1"/>
+                </a:solidFill>
+              </a:rPr>
+              <a:t>● 2023</a:t>
+            </a:r>
+            <a:r>
+              <a:rPr lang="en-US" sz="2400" b="1" dirty="0">
+                <a:solidFill>
+                  <a:schemeClr val="tx1"/>
+                </a:solidFill>
+              </a:rPr>
+              <a:t>      </a:t>
+            </a:r>
+            <a:r>
+              <a:rPr lang="en-US" sz="2400" b="1" dirty="0">
+                <a:solidFill>
+                  <a:srgbClr val="339898"/>
+                </a:solidFill>
+              </a:rPr>
+              <a:t>● 2023 at a $50K bar</a:t>
+            </a:r>
+            <a:endParaRPr lang="en-US" sz="2400" dirty="0"/>
+          </a:p>
+        </p:txBody>
+      </p:sp>
+      <p:sp>
+        <p:nvSpPr>
+          <p:cNvPr id="47" name="under-30 highlight"/>
           <p:cNvSpPr/>
           <p:nvPr/>
         </p:nvSpPr>
         <p:spPr>
           <a:xfrm>
-            <a:off x="10972800" y="13414248"/>
-            <a:ext cx="10972800" cy="1170432"/>
+            <a:off x="10972800" y="14859000"/>
+            <a:ext cx="10972800" cy="960120"/>
           </a:xfrm>
           <a:prstGeom prst="rect">
             <a:avLst/>
           </a:prstGeom>
           <a:solidFill>
-            <a:schemeClr val="accent5">
-              <a:alpha val="10000"/>
+            <a:schemeClr val="accent2">
+              <a:alpha val="12000"/>
             </a:schemeClr>
           </a:solidFill>
           <a:ln w="12700">
             <a:solidFill>
-              <a:schemeClr val="accent5">
+              <a:schemeClr val="accent2">
                 <a:alpha val="0"/>
               </a:schemeClr>
             </a:solidFill>
             <a:prstDash val="solid"/>
           </a:ln>
         </p:spPr>
-      </p:sp>
-      <p:sp>
-        <p:nvSpPr>
-          <p:cNvPr id="44" name="Shape 41"/>
+        <p:txBody>
+          <a:bodyPr/>
+          <a:lstStyle/>
+          <a:p>
+            <a:endParaRPr lang="en-US"/>
+          </a:p>
+        </p:txBody>
+      </p:sp>
+      <p:sp>
+        <p:nvSpPr>
+          <p:cNvPr id="48" name="Shape 45"/>
           <p:cNvSpPr/>
           <p:nvPr/>
         </p:nvSpPr>
         <p:spPr>
           <a:xfrm>
-            <a:off x="14610080" y="8732520"/>
-            <a:ext cx="0" cy="5852160"/>
+            <a:off x="14605000" y="11018520"/>
+            <a:ext cx="0" cy="4800600"/>
           </a:xfrm>
           <a:prstGeom prst="line">
             <a:avLst/>
@@ -3689,22 +3453,29 @@
           <a:noFill/>
           <a:ln w="12700">
             <a:solidFill>
-              <a:srgbClr val="D5DAE1"/>
+              <a:srgbClr val="D3D7DE"/>
             </a:solidFill>
             <a:prstDash val="solid"/>
           </a:ln>
         </p:spPr>
-      </p:sp>
-      <p:sp>
-        <p:nvSpPr>
-          <p:cNvPr id="45" name="Text 42"/>
+        <p:txBody>
+          <a:bodyPr/>
+          <a:lstStyle/>
+          <a:p>
+            <a:endParaRPr lang="en-US"/>
+          </a:p>
+        </p:txBody>
+      </p:sp>
+      <p:sp>
+        <p:nvSpPr>
+          <p:cNvPr id="49" name="Text 46"/>
           <p:cNvSpPr txBox="1"/>
           <p:nvPr/>
         </p:nvSpPr>
         <p:spPr>
           <a:xfrm>
-            <a:off x="14152880" y="14657832"/>
-            <a:ext cx="914400" cy="365760"/>
+            <a:off x="14056360" y="15910560"/>
+            <a:ext cx="1097280" cy="411480"/>
           </a:xfrm>
           <a:prstGeom prst="rect">
             <a:avLst/>
@@ -3716,31 +3487,31 @@
           <a:bodyPr wrap="square" lIns="0" tIns="0" rIns="0" bIns="0" rtlCol="0" anchor="t"/>
           <a:lstStyle/>
           <a:p>
-            <a:pPr algn="ctr" indent="0" marL="0">
+            <a:pPr marL="0" indent="0" algn="ctr">
               <a:buNone/>
             </a:pPr>
             <a:r>
-              <a:rPr lang="en-US" sz="1800" dirty="0">
-                <a:solidFill>
-                  <a:schemeClr val="tx2"/>
-                </a:solidFill>
-              </a:rPr>
-              <a:t>-60</a:t>
-            </a:r>
-            <a:endParaRPr lang="en-US" sz="1800" dirty="0"/>
-          </a:p>
-        </p:txBody>
-      </p:sp>
-      <p:sp>
-        <p:nvSpPr>
-          <p:cNvPr id="46" name="Shape 43"/>
+              <a:rPr lang="en-US" sz="2200" dirty="0">
+                <a:solidFill>
+                  <a:schemeClr val="accent4"/>
+                </a:solidFill>
+              </a:rPr>
+              <a:t>−60</a:t>
+            </a:r>
+            <a:endParaRPr lang="en-US" sz="2200" dirty="0"/>
+          </a:p>
+        </p:txBody>
+      </p:sp>
+      <p:sp>
+        <p:nvSpPr>
+          <p:cNvPr id="50" name="Shape 47"/>
           <p:cNvSpPr/>
           <p:nvPr/>
         </p:nvSpPr>
         <p:spPr>
           <a:xfrm>
-            <a:off x="15504160" y="8732520"/>
-            <a:ext cx="0" cy="5852160"/>
+            <a:off x="15494000" y="11018520"/>
+            <a:ext cx="0" cy="4800600"/>
           </a:xfrm>
           <a:prstGeom prst="line">
             <a:avLst/>
@@ -3748,22 +3519,29 @@
           <a:noFill/>
           <a:ln w="12700">
             <a:solidFill>
-              <a:srgbClr val="D5DAE1"/>
+              <a:srgbClr val="D3D7DE"/>
             </a:solidFill>
             <a:prstDash val="solid"/>
           </a:ln>
         </p:spPr>
-      </p:sp>
-      <p:sp>
-        <p:nvSpPr>
-          <p:cNvPr id="47" name="Text 44"/>
+        <p:txBody>
+          <a:bodyPr/>
+          <a:lstStyle/>
+          <a:p>
+            <a:endParaRPr lang="en-US"/>
+          </a:p>
+        </p:txBody>
+      </p:sp>
+      <p:sp>
+        <p:nvSpPr>
+          <p:cNvPr id="51" name="Text 48"/>
           <p:cNvSpPr txBox="1"/>
           <p:nvPr/>
         </p:nvSpPr>
         <p:spPr>
           <a:xfrm>
-            <a:off x="15046960" y="14657832"/>
-            <a:ext cx="914400" cy="365760"/>
+            <a:off x="14945360" y="15910560"/>
+            <a:ext cx="1097280" cy="411480"/>
           </a:xfrm>
           <a:prstGeom prst="rect">
             <a:avLst/>
@@ -3775,31 +3553,31 @@
           <a:bodyPr wrap="square" lIns="0" tIns="0" rIns="0" bIns="0" rtlCol="0" anchor="t"/>
           <a:lstStyle/>
           <a:p>
-            <a:pPr algn="ctr" indent="0" marL="0">
+            <a:pPr marL="0" indent="0" algn="ctr">
               <a:buNone/>
             </a:pPr>
             <a:r>
-              <a:rPr lang="en-US" sz="1800" dirty="0">
-                <a:solidFill>
-                  <a:schemeClr val="tx2"/>
-                </a:solidFill>
-              </a:rPr>
-              <a:t>-50</a:t>
-            </a:r>
-            <a:endParaRPr lang="en-US" sz="1800" dirty="0"/>
-          </a:p>
-        </p:txBody>
-      </p:sp>
-      <p:sp>
-        <p:nvSpPr>
-          <p:cNvPr id="48" name="Shape 45"/>
+              <a:rPr lang="en-US" sz="2200" dirty="0">
+                <a:solidFill>
+                  <a:schemeClr val="accent4"/>
+                </a:solidFill>
+              </a:rPr>
+              <a:t>−50</a:t>
+            </a:r>
+            <a:endParaRPr lang="en-US" sz="2200" dirty="0"/>
+          </a:p>
+        </p:txBody>
+      </p:sp>
+      <p:sp>
+        <p:nvSpPr>
+          <p:cNvPr id="52" name="Shape 49"/>
           <p:cNvSpPr/>
           <p:nvPr/>
         </p:nvSpPr>
         <p:spPr>
           <a:xfrm>
-            <a:off x="16398240" y="8732520"/>
-            <a:ext cx="0" cy="5852160"/>
+            <a:off x="16383000" y="11018520"/>
+            <a:ext cx="0" cy="4800600"/>
           </a:xfrm>
           <a:prstGeom prst="line">
             <a:avLst/>
@@ -3807,22 +3585,29 @@
           <a:noFill/>
           <a:ln w="12700">
             <a:solidFill>
-              <a:srgbClr val="D5DAE1"/>
+              <a:srgbClr val="D3D7DE"/>
             </a:solidFill>
             <a:prstDash val="solid"/>
           </a:ln>
         </p:spPr>
-      </p:sp>
-      <p:sp>
-        <p:nvSpPr>
-          <p:cNvPr id="49" name="Text 46"/>
+        <p:txBody>
+          <a:bodyPr/>
+          <a:lstStyle/>
+          <a:p>
+            <a:endParaRPr lang="en-US"/>
+          </a:p>
+        </p:txBody>
+      </p:sp>
+      <p:sp>
+        <p:nvSpPr>
+          <p:cNvPr id="53" name="Text 50"/>
           <p:cNvSpPr txBox="1"/>
           <p:nvPr/>
         </p:nvSpPr>
         <p:spPr>
           <a:xfrm>
-            <a:off x="15941040" y="14657832"/>
-            <a:ext cx="914400" cy="365760"/>
+            <a:off x="15834360" y="15910560"/>
+            <a:ext cx="1097280" cy="411480"/>
           </a:xfrm>
           <a:prstGeom prst="rect">
             <a:avLst/>
@@ -3834,31 +3619,31 @@
           <a:bodyPr wrap="square" lIns="0" tIns="0" rIns="0" bIns="0" rtlCol="0" anchor="t"/>
           <a:lstStyle/>
           <a:p>
-            <a:pPr algn="ctr" indent="0" marL="0">
+            <a:pPr marL="0" indent="0" algn="ctr">
               <a:buNone/>
             </a:pPr>
             <a:r>
-              <a:rPr lang="en-US" sz="1800" dirty="0">
-                <a:solidFill>
-                  <a:schemeClr val="tx2"/>
-                </a:solidFill>
-              </a:rPr>
-              <a:t>-40</a:t>
-            </a:r>
-            <a:endParaRPr lang="en-US" sz="1800" dirty="0"/>
-          </a:p>
-        </p:txBody>
-      </p:sp>
-      <p:sp>
-        <p:nvSpPr>
-          <p:cNvPr id="50" name="Shape 47"/>
+              <a:rPr lang="en-US" sz="2200" dirty="0">
+                <a:solidFill>
+                  <a:schemeClr val="accent4"/>
+                </a:solidFill>
+              </a:rPr>
+              <a:t>−40</a:t>
+            </a:r>
+            <a:endParaRPr lang="en-US" sz="2200" dirty="0"/>
+          </a:p>
+        </p:txBody>
+      </p:sp>
+      <p:sp>
+        <p:nvSpPr>
+          <p:cNvPr id="54" name="Shape 51"/>
           <p:cNvSpPr/>
           <p:nvPr/>
         </p:nvSpPr>
         <p:spPr>
           <a:xfrm>
-            <a:off x="17292320" y="8732520"/>
-            <a:ext cx="0" cy="5852160"/>
+            <a:off x="17272000" y="11018520"/>
+            <a:ext cx="0" cy="4800600"/>
           </a:xfrm>
           <a:prstGeom prst="line">
             <a:avLst/>
@@ -3866,22 +3651,29 @@
           <a:noFill/>
           <a:ln w="12700">
             <a:solidFill>
-              <a:srgbClr val="D5DAE1"/>
+              <a:srgbClr val="D3D7DE"/>
             </a:solidFill>
             <a:prstDash val="solid"/>
           </a:ln>
         </p:spPr>
-      </p:sp>
-      <p:sp>
-        <p:nvSpPr>
-          <p:cNvPr id="51" name="Text 48"/>
+        <p:txBody>
+          <a:bodyPr/>
+          <a:lstStyle/>
+          <a:p>
+            <a:endParaRPr lang="en-US"/>
+          </a:p>
+        </p:txBody>
+      </p:sp>
+      <p:sp>
+        <p:nvSpPr>
+          <p:cNvPr id="55" name="Text 52"/>
           <p:cNvSpPr txBox="1"/>
           <p:nvPr/>
         </p:nvSpPr>
         <p:spPr>
           <a:xfrm>
-            <a:off x="16835120" y="14657832"/>
-            <a:ext cx="914400" cy="365760"/>
+            <a:off x="16723360" y="15910560"/>
+            <a:ext cx="1097280" cy="411480"/>
           </a:xfrm>
           <a:prstGeom prst="rect">
             <a:avLst/>
@@ -3893,31 +3685,31 @@
           <a:bodyPr wrap="square" lIns="0" tIns="0" rIns="0" bIns="0" rtlCol="0" anchor="t"/>
           <a:lstStyle/>
           <a:p>
-            <a:pPr algn="ctr" indent="0" marL="0">
+            <a:pPr marL="0" indent="0" algn="ctr">
               <a:buNone/>
             </a:pPr>
             <a:r>
-              <a:rPr lang="en-US" sz="1800" dirty="0">
-                <a:solidFill>
-                  <a:schemeClr val="tx2"/>
-                </a:solidFill>
-              </a:rPr>
-              <a:t>-30</a:t>
-            </a:r>
-            <a:endParaRPr lang="en-US" sz="1800" dirty="0"/>
-          </a:p>
-        </p:txBody>
-      </p:sp>
-      <p:sp>
-        <p:nvSpPr>
-          <p:cNvPr id="52" name="Shape 49"/>
+              <a:rPr lang="en-US" sz="2200" dirty="0">
+                <a:solidFill>
+                  <a:schemeClr val="accent4"/>
+                </a:solidFill>
+              </a:rPr>
+              <a:t>−30</a:t>
+            </a:r>
+            <a:endParaRPr lang="en-US" sz="2200" dirty="0"/>
+          </a:p>
+        </p:txBody>
+      </p:sp>
+      <p:sp>
+        <p:nvSpPr>
+          <p:cNvPr id="56" name="Shape 53"/>
           <p:cNvSpPr/>
           <p:nvPr/>
         </p:nvSpPr>
         <p:spPr>
           <a:xfrm>
-            <a:off x="18186400" y="8732520"/>
-            <a:ext cx="0" cy="5852160"/>
+            <a:off x="18161000" y="11018520"/>
+            <a:ext cx="0" cy="4800600"/>
           </a:xfrm>
           <a:prstGeom prst="line">
             <a:avLst/>
@@ -3925,22 +3717,29 @@
           <a:noFill/>
           <a:ln w="12700">
             <a:solidFill>
-              <a:srgbClr val="D5DAE1"/>
+              <a:srgbClr val="D3D7DE"/>
             </a:solidFill>
             <a:prstDash val="solid"/>
           </a:ln>
         </p:spPr>
-      </p:sp>
-      <p:sp>
-        <p:nvSpPr>
-          <p:cNvPr id="53" name="Text 50"/>
+        <p:txBody>
+          <a:bodyPr/>
+          <a:lstStyle/>
+          <a:p>
+            <a:endParaRPr lang="en-US"/>
+          </a:p>
+        </p:txBody>
+      </p:sp>
+      <p:sp>
+        <p:nvSpPr>
+          <p:cNvPr id="57" name="Text 54"/>
           <p:cNvSpPr txBox="1"/>
           <p:nvPr/>
         </p:nvSpPr>
         <p:spPr>
           <a:xfrm>
-            <a:off x="17729200" y="14657832"/>
-            <a:ext cx="914400" cy="365760"/>
+            <a:off x="17612360" y="15910560"/>
+            <a:ext cx="1097280" cy="411480"/>
           </a:xfrm>
           <a:prstGeom prst="rect">
             <a:avLst/>
@@ -3952,31 +3751,31 @@
           <a:bodyPr wrap="square" lIns="0" tIns="0" rIns="0" bIns="0" rtlCol="0" anchor="t"/>
           <a:lstStyle/>
           <a:p>
-            <a:pPr algn="ctr" indent="0" marL="0">
+            <a:pPr marL="0" indent="0" algn="ctr">
               <a:buNone/>
             </a:pPr>
             <a:r>
-              <a:rPr lang="en-US" sz="1800" dirty="0">
-                <a:solidFill>
-                  <a:schemeClr val="tx2"/>
-                </a:solidFill>
-              </a:rPr>
-              <a:t>-20</a:t>
-            </a:r>
-            <a:endParaRPr lang="en-US" sz="1800" dirty="0"/>
-          </a:p>
-        </p:txBody>
-      </p:sp>
-      <p:sp>
-        <p:nvSpPr>
-          <p:cNvPr id="54" name="Shape 51"/>
+              <a:rPr lang="en-US" sz="2200" dirty="0">
+                <a:solidFill>
+                  <a:schemeClr val="accent4"/>
+                </a:solidFill>
+              </a:rPr>
+              <a:t>−20</a:t>
+            </a:r>
+            <a:endParaRPr lang="en-US" sz="2200" dirty="0"/>
+          </a:p>
+        </p:txBody>
+      </p:sp>
+      <p:sp>
+        <p:nvSpPr>
+          <p:cNvPr id="58" name="Shape 55"/>
           <p:cNvSpPr/>
           <p:nvPr/>
         </p:nvSpPr>
         <p:spPr>
           <a:xfrm>
-            <a:off x="19080480" y="8732520"/>
-            <a:ext cx="0" cy="5852160"/>
+            <a:off x="19050000" y="11018520"/>
+            <a:ext cx="0" cy="4800600"/>
           </a:xfrm>
           <a:prstGeom prst="line">
             <a:avLst/>
@@ -3984,22 +3783,29 @@
           <a:noFill/>
           <a:ln w="12700">
             <a:solidFill>
-              <a:srgbClr val="D5DAE1"/>
+              <a:srgbClr val="D3D7DE"/>
             </a:solidFill>
             <a:prstDash val="solid"/>
           </a:ln>
         </p:spPr>
-      </p:sp>
-      <p:sp>
-        <p:nvSpPr>
-          <p:cNvPr id="55" name="Text 52"/>
+        <p:txBody>
+          <a:bodyPr/>
+          <a:lstStyle/>
+          <a:p>
+            <a:endParaRPr lang="en-US"/>
+          </a:p>
+        </p:txBody>
+      </p:sp>
+      <p:sp>
+        <p:nvSpPr>
+          <p:cNvPr id="59" name="Text 56"/>
           <p:cNvSpPr txBox="1"/>
           <p:nvPr/>
         </p:nvSpPr>
         <p:spPr>
           <a:xfrm>
-            <a:off x="18623280" y="14657832"/>
-            <a:ext cx="914400" cy="365760"/>
+            <a:off x="18501360" y="15910560"/>
+            <a:ext cx="1097280" cy="411480"/>
           </a:xfrm>
           <a:prstGeom prst="rect">
             <a:avLst/>
@@ -4011,54 +3817,61 @@
           <a:bodyPr wrap="square" lIns="0" tIns="0" rIns="0" bIns="0" rtlCol="0" anchor="t"/>
           <a:lstStyle/>
           <a:p>
-            <a:pPr algn="ctr" indent="0" marL="0">
+            <a:pPr marL="0" indent="0" algn="ctr">
               <a:buNone/>
             </a:pPr>
             <a:r>
-              <a:rPr lang="en-US" sz="1800" dirty="0">
-                <a:solidFill>
-                  <a:schemeClr val="tx2"/>
-                </a:solidFill>
-              </a:rPr>
-              <a:t>-10</a:t>
-            </a:r>
-            <a:endParaRPr lang="en-US" sz="1800" dirty="0"/>
-          </a:p>
-        </p:txBody>
-      </p:sp>
-      <p:sp>
-        <p:nvSpPr>
-          <p:cNvPr id="56" name="Shape 53"/>
+              <a:rPr lang="en-US" sz="2200" dirty="0">
+                <a:solidFill>
+                  <a:schemeClr val="accent4"/>
+                </a:solidFill>
+              </a:rPr>
+              <a:t>−10</a:t>
+            </a:r>
+            <a:endParaRPr lang="en-US" sz="2200" dirty="0"/>
+          </a:p>
+        </p:txBody>
+      </p:sp>
+      <p:sp>
+        <p:nvSpPr>
+          <p:cNvPr id="60" name="Shape 57"/>
           <p:cNvSpPr/>
           <p:nvPr/>
         </p:nvSpPr>
         <p:spPr>
           <a:xfrm>
-            <a:off x="19974560" y="8732520"/>
-            <a:ext cx="0" cy="5852160"/>
+            <a:off x="19939000" y="11018520"/>
+            <a:ext cx="0" cy="4800600"/>
           </a:xfrm>
           <a:prstGeom prst="line">
             <a:avLst/>
           </a:prstGeom>
           <a:noFill/>
-          <a:ln w="25400">
+          <a:ln w="31750">
             <a:solidFill>
-              <a:srgbClr val="1B2430"/>
+              <a:srgbClr val="262626"/>
             </a:solidFill>
             <a:prstDash val="solid"/>
           </a:ln>
         </p:spPr>
-      </p:sp>
-      <p:sp>
-        <p:nvSpPr>
-          <p:cNvPr id="57" name="Text 54"/>
+        <p:txBody>
+          <a:bodyPr/>
+          <a:lstStyle/>
+          <a:p>
+            <a:endParaRPr lang="en-US"/>
+          </a:p>
+        </p:txBody>
+      </p:sp>
+      <p:sp>
+        <p:nvSpPr>
+          <p:cNvPr id="61" name="Text 58"/>
           <p:cNvSpPr txBox="1"/>
           <p:nvPr/>
         </p:nvSpPr>
         <p:spPr>
           <a:xfrm>
-            <a:off x="19517360" y="14657832"/>
-            <a:ext cx="914400" cy="365760"/>
+            <a:off x="19390360" y="15910560"/>
+            <a:ext cx="1097280" cy="411480"/>
           </a:xfrm>
           <a:prstGeom prst="rect">
             <a:avLst/>
@@ -4070,31 +3883,31 @@
           <a:bodyPr wrap="square" lIns="0" tIns="0" rIns="0" bIns="0" rtlCol="0" anchor="t"/>
           <a:lstStyle/>
           <a:p>
-            <a:pPr algn="ctr" indent="0" marL="0">
+            <a:pPr marL="0" indent="0" algn="ctr">
               <a:buNone/>
             </a:pPr>
             <a:r>
-              <a:rPr lang="en-US" sz="1800" dirty="0">
-                <a:solidFill>
-                  <a:schemeClr val="tx2"/>
+              <a:rPr lang="en-US" sz="2200" dirty="0">
+                <a:solidFill>
+                  <a:schemeClr val="accent4"/>
                 </a:solidFill>
               </a:rPr>
               <a:t>0</a:t>
             </a:r>
-            <a:endParaRPr lang="en-US" sz="1800" dirty="0"/>
-          </a:p>
-        </p:txBody>
-      </p:sp>
-      <p:sp>
-        <p:nvSpPr>
-          <p:cNvPr id="58" name="Shape 55"/>
+            <a:endParaRPr lang="en-US" sz="2200" dirty="0"/>
+          </a:p>
+        </p:txBody>
+      </p:sp>
+      <p:sp>
+        <p:nvSpPr>
+          <p:cNvPr id="62" name="Shape 59"/>
           <p:cNvSpPr/>
           <p:nvPr/>
         </p:nvSpPr>
         <p:spPr>
           <a:xfrm>
-            <a:off x="20868640" y="8732520"/>
-            <a:ext cx="0" cy="5852160"/>
+            <a:off x="20828000" y="11018520"/>
+            <a:ext cx="0" cy="4800600"/>
           </a:xfrm>
           <a:prstGeom prst="line">
             <a:avLst/>
@@ -4102,22 +3915,29 @@
           <a:noFill/>
           <a:ln w="12700">
             <a:solidFill>
-              <a:srgbClr val="D5DAE1"/>
+              <a:srgbClr val="D3D7DE"/>
             </a:solidFill>
             <a:prstDash val="solid"/>
           </a:ln>
         </p:spPr>
-      </p:sp>
-      <p:sp>
-        <p:nvSpPr>
-          <p:cNvPr id="59" name="Text 56"/>
+        <p:txBody>
+          <a:bodyPr/>
+          <a:lstStyle/>
+          <a:p>
+            <a:endParaRPr lang="en-US"/>
+          </a:p>
+        </p:txBody>
+      </p:sp>
+      <p:sp>
+        <p:nvSpPr>
+          <p:cNvPr id="63" name="Text 60"/>
           <p:cNvSpPr txBox="1"/>
           <p:nvPr/>
         </p:nvSpPr>
         <p:spPr>
           <a:xfrm>
-            <a:off x="20411440" y="14657832"/>
-            <a:ext cx="914400" cy="365760"/>
+            <a:off x="20279360" y="15910560"/>
+            <a:ext cx="1097280" cy="411480"/>
           </a:xfrm>
           <a:prstGeom prst="rect">
             <a:avLst/>
@@ -4129,31 +3949,31 @@
           <a:bodyPr wrap="square" lIns="0" tIns="0" rIns="0" bIns="0" rtlCol="0" anchor="t"/>
           <a:lstStyle/>
           <a:p>
-            <a:pPr algn="ctr" indent="0" marL="0">
+            <a:pPr marL="0" indent="0" algn="ctr">
               <a:buNone/>
             </a:pPr>
             <a:r>
-              <a:rPr lang="en-US" sz="1800" dirty="0">
-                <a:solidFill>
-                  <a:schemeClr val="tx2"/>
+              <a:rPr lang="en-US" sz="2200" dirty="0">
+                <a:solidFill>
+                  <a:schemeClr val="accent4"/>
                 </a:solidFill>
               </a:rPr>
               <a:t>+10</a:t>
             </a:r>
-            <a:endParaRPr lang="en-US" sz="1800" dirty="0"/>
-          </a:p>
-        </p:txBody>
-      </p:sp>
-      <p:sp>
-        <p:nvSpPr>
-          <p:cNvPr id="60" name="Shape 57"/>
+            <a:endParaRPr lang="en-US" sz="2200" dirty="0"/>
+          </a:p>
+        </p:txBody>
+      </p:sp>
+      <p:sp>
+        <p:nvSpPr>
+          <p:cNvPr id="64" name="Shape 61"/>
           <p:cNvSpPr/>
           <p:nvPr/>
         </p:nvSpPr>
         <p:spPr>
           <a:xfrm>
-            <a:off x="21762720" y="8732520"/>
-            <a:ext cx="0" cy="5852160"/>
+            <a:off x="21717000" y="11018520"/>
+            <a:ext cx="0" cy="4800600"/>
           </a:xfrm>
           <a:prstGeom prst="line">
             <a:avLst/>
@@ -4161,22 +3981,29 @@
           <a:noFill/>
           <a:ln w="12700">
             <a:solidFill>
-              <a:srgbClr val="D5DAE1"/>
+              <a:srgbClr val="D3D7DE"/>
             </a:solidFill>
             <a:prstDash val="solid"/>
           </a:ln>
         </p:spPr>
-      </p:sp>
-      <p:sp>
-        <p:nvSpPr>
-          <p:cNvPr id="61" name="Text 58"/>
+        <p:txBody>
+          <a:bodyPr/>
+          <a:lstStyle/>
+          <a:p>
+            <a:endParaRPr lang="en-US"/>
+          </a:p>
+        </p:txBody>
+      </p:sp>
+      <p:sp>
+        <p:nvSpPr>
+          <p:cNvPr id="65" name="Text 62"/>
           <p:cNvSpPr txBox="1"/>
           <p:nvPr/>
         </p:nvSpPr>
         <p:spPr>
           <a:xfrm>
-            <a:off x="21305520" y="14657832"/>
-            <a:ext cx="914400" cy="365760"/>
+            <a:off x="21168360" y="15910560"/>
+            <a:ext cx="1097280" cy="411480"/>
           </a:xfrm>
           <a:prstGeom prst="rect">
             <a:avLst/>
@@ -4188,31 +4015,31 @@
           <a:bodyPr wrap="square" lIns="0" tIns="0" rIns="0" bIns="0" rtlCol="0" anchor="t"/>
           <a:lstStyle/>
           <a:p>
-            <a:pPr algn="ctr" indent="0" marL="0">
+            <a:pPr marL="0" indent="0" algn="ctr">
               <a:buNone/>
             </a:pPr>
             <a:r>
-              <a:rPr lang="en-US" sz="1800" dirty="0">
-                <a:solidFill>
-                  <a:schemeClr val="tx2"/>
-                </a:solidFill>
-              </a:rPr>
-              <a:t>+20</a:t>
-            </a:r>
-            <a:endParaRPr lang="en-US" sz="1800" dirty="0"/>
-          </a:p>
-        </p:txBody>
-      </p:sp>
-      <p:sp>
-        <p:nvSpPr>
-          <p:cNvPr id="62" name="Text 59"/>
+              <a:rPr lang="en-US" sz="2200" dirty="0">
+                <a:solidFill>
+                  <a:schemeClr val="accent4"/>
+                </a:solidFill>
+              </a:rPr>
+              <a:t>+20 pp</a:t>
+            </a:r>
+            <a:endParaRPr lang="en-US" sz="2200" dirty="0"/>
+          </a:p>
+        </p:txBody>
+      </p:sp>
+      <p:sp>
+        <p:nvSpPr>
+          <p:cNvPr id="66" name="Text 63"/>
           <p:cNvSpPr txBox="1"/>
           <p:nvPr/>
         </p:nvSpPr>
         <p:spPr>
           <a:xfrm>
-            <a:off x="13716000" y="15023592"/>
-            <a:ext cx="8046720" cy="365760"/>
+            <a:off x="10972800" y="11251692"/>
+            <a:ext cx="2697480" cy="502920"/>
           </a:xfrm>
           <a:prstGeom prst="rect">
             <a:avLst/>
@@ -4221,70 +4048,34 @@
           <a:ln/>
         </p:spPr>
         <p:txBody>
-          <a:bodyPr wrap="square" lIns="0" tIns="0" rIns="0" bIns="0" rtlCol="0" anchor="t"/>
-          <a:lstStyle/>
-          <a:p>
-            <a:pPr algn="ctr" indent="0" marL="0">
+          <a:bodyPr wrap="square" lIns="0" tIns="0" rIns="0" bIns="0" rtlCol="0" anchor="ctr"/>
+          <a:lstStyle/>
+          <a:p>
+            <a:pPr marL="0" indent="0">
               <a:buNone/>
             </a:pPr>
             <a:r>
-              <a:rPr lang="en-US" sz="1800" dirty="0">
-                <a:solidFill>
-                  <a:schemeClr val="tx2"/>
-                </a:solidFill>
-              </a:rPr>
-              <a:t>percentage points</a:t>
-            </a:r>
-            <a:endParaRPr lang="en-US" sz="1800" dirty="0"/>
-          </a:p>
-        </p:txBody>
-      </p:sp>
-      <p:sp>
-        <p:nvSpPr>
-          <p:cNvPr id="63" name="Text 60"/>
-          <p:cNvSpPr txBox="1"/>
-          <p:nvPr/>
-        </p:nvSpPr>
-        <p:spPr>
-          <a:xfrm>
-            <a:off x="10972800" y="9089136"/>
-            <a:ext cx="2651760" cy="457200"/>
-          </a:xfrm>
-          <a:prstGeom prst="rect">
-            <a:avLst/>
-          </a:prstGeom>
-          <a:noFill/>
-          <a:ln/>
-        </p:spPr>
-        <p:txBody>
-          <a:bodyPr wrap="square" lIns="0" tIns="0" rIns="0" bIns="0" rtlCol="0" anchor="ctr"/>
-          <a:lstStyle/>
-          <a:p>
-            <a:pPr indent="0" marL="0">
-              <a:buNone/>
-            </a:pPr>
-            <a:r>
-              <a:rPr lang="en-US" sz="2200" dirty="0">
+              <a:rPr lang="en-US" sz="2400" dirty="0">
                 <a:solidFill>
                   <a:schemeClr val="tx1"/>
                 </a:solidFill>
               </a:rPr>
               <a:t>Women vs men</a:t>
             </a:r>
-            <a:endParaRPr lang="en-US" sz="2200" dirty="0"/>
-          </a:p>
-        </p:txBody>
-      </p:sp>
-      <p:sp>
-        <p:nvSpPr>
-          <p:cNvPr id="64" name="Shape 61"/>
+            <a:endParaRPr lang="en-US" sz="2400" dirty="0"/>
+          </a:p>
+        </p:txBody>
+      </p:sp>
+      <p:sp>
+        <p:nvSpPr>
+          <p:cNvPr id="67" name="Shape 64"/>
           <p:cNvSpPr/>
           <p:nvPr/>
         </p:nvSpPr>
         <p:spPr>
           <a:xfrm>
-            <a:off x="19697395" y="9015984"/>
-            <a:ext cx="813613" cy="0"/>
+            <a:off x="19663410" y="11224260"/>
+            <a:ext cx="808990" cy="0"/>
           </a:xfrm>
           <a:prstGeom prst="line">
             <a:avLst/>
@@ -4292,28 +4083,35 @@
           <a:noFill/>
           <a:ln w="63500">
             <a:solidFill>
-              <a:srgbClr val="8C96A3"/>
+              <a:srgbClr val="666666"/>
             </a:solidFill>
             <a:prstDash val="solid"/>
           </a:ln>
         </p:spPr>
-      </p:sp>
-      <p:sp>
-        <p:nvSpPr>
-          <p:cNvPr id="65" name="Shape 62"/>
+        <p:txBody>
+          <a:bodyPr/>
+          <a:lstStyle/>
+          <a:p>
+            <a:endParaRPr lang="en-US"/>
+          </a:p>
+        </p:txBody>
+      </p:sp>
+      <p:sp>
+        <p:nvSpPr>
+          <p:cNvPr id="68" name="Shape 65"/>
           <p:cNvSpPr/>
           <p:nvPr/>
         </p:nvSpPr>
         <p:spPr>
           <a:xfrm>
-            <a:off x="19971715" y="8887968"/>
-            <a:ext cx="256032" cy="256032"/>
+            <a:off x="19926300" y="11087100"/>
+            <a:ext cx="274320" cy="274320"/>
           </a:xfrm>
           <a:prstGeom prst="ellipse">
             <a:avLst/>
           </a:prstGeom>
           <a:solidFill>
-            <a:srgbClr val="8C96A3"/>
+            <a:srgbClr val="666666"/>
           </a:solidFill>
           <a:ln w="19050">
             <a:solidFill>
@@ -4322,17 +4120,24 @@
             <a:prstDash val="solid"/>
           </a:ln>
         </p:spPr>
-      </p:sp>
-      <p:sp>
-        <p:nvSpPr>
-          <p:cNvPr id="66" name="Shape 63"/>
+        <p:txBody>
+          <a:bodyPr/>
+          <a:lstStyle/>
+          <a:p>
+            <a:endParaRPr lang="en-US"/>
+          </a:p>
+        </p:txBody>
+      </p:sp>
+      <p:sp>
+        <p:nvSpPr>
+          <p:cNvPr id="69" name="Shape 66"/>
           <p:cNvSpPr/>
           <p:nvPr/>
         </p:nvSpPr>
         <p:spPr>
           <a:xfrm>
-            <a:off x="20269606" y="9317736"/>
-            <a:ext cx="885139" cy="0"/>
+            <a:off x="20232370" y="11498580"/>
+            <a:ext cx="880110" cy="0"/>
           </a:xfrm>
           <a:prstGeom prst="line">
             <a:avLst/>
@@ -4340,28 +4145,35 @@
           <a:noFill/>
           <a:ln w="63500">
             <a:solidFill>
-              <a:srgbClr val="5B3FD1"/>
+              <a:srgbClr val="0577B1"/>
             </a:solidFill>
             <a:prstDash val="solid"/>
           </a:ln>
         </p:spPr>
-      </p:sp>
-      <p:sp>
-        <p:nvSpPr>
-          <p:cNvPr id="67" name="Shape 64"/>
+        <p:txBody>
+          <a:bodyPr/>
+          <a:lstStyle/>
+          <a:p>
+            <a:endParaRPr lang="en-US"/>
+          </a:p>
+        </p:txBody>
+      </p:sp>
+      <p:sp>
+        <p:nvSpPr>
+          <p:cNvPr id="70" name="Shape 67"/>
           <p:cNvSpPr/>
           <p:nvPr/>
         </p:nvSpPr>
         <p:spPr>
           <a:xfrm>
-            <a:off x="20561808" y="9189720"/>
-            <a:ext cx="256032" cy="256032"/>
+            <a:off x="20513040" y="11361420"/>
+            <a:ext cx="274320" cy="274320"/>
           </a:xfrm>
           <a:prstGeom prst="ellipse">
             <a:avLst/>
           </a:prstGeom>
           <a:solidFill>
-            <a:srgbClr val="5B3FD1"/>
+            <a:srgbClr val="0577B1"/>
           </a:solidFill>
           <a:ln w="19050">
             <a:solidFill>
@@ -4370,17 +4182,24 @@
             <a:prstDash val="solid"/>
           </a:ln>
         </p:spPr>
-      </p:sp>
-      <p:sp>
-        <p:nvSpPr>
-          <p:cNvPr id="68" name="Shape 65"/>
+        <p:txBody>
+          <a:bodyPr/>
+          <a:lstStyle/>
+          <a:p>
+            <a:endParaRPr lang="en-US"/>
+          </a:p>
+        </p:txBody>
+      </p:sp>
+      <p:sp>
+        <p:nvSpPr>
+          <p:cNvPr id="71" name="Shape 68"/>
           <p:cNvSpPr/>
           <p:nvPr/>
         </p:nvSpPr>
         <p:spPr>
           <a:xfrm>
-            <a:off x="20037146" y="9619488"/>
-            <a:ext cx="572211" cy="0"/>
+            <a:off x="20001230" y="11772900"/>
+            <a:ext cx="568960" cy="0"/>
           </a:xfrm>
           <a:prstGeom prst="line">
             <a:avLst/>
@@ -4388,28 +4207,35 @@
           <a:noFill/>
           <a:ln w="63500">
             <a:solidFill>
-              <a:srgbClr val="B9AEEF"/>
+              <a:srgbClr val="339898"/>
             </a:solidFill>
             <a:prstDash val="solid"/>
           </a:ln>
         </p:spPr>
-      </p:sp>
-      <p:sp>
-        <p:nvSpPr>
-          <p:cNvPr id="69" name="Shape 66"/>
+        <p:txBody>
+          <a:bodyPr/>
+          <a:lstStyle/>
+          <a:p>
+            <a:endParaRPr lang="en-US"/>
+          </a:p>
+        </p:txBody>
+      </p:sp>
+      <p:sp>
+        <p:nvSpPr>
+          <p:cNvPr id="72" name="Shape 69"/>
           <p:cNvSpPr/>
           <p:nvPr/>
         </p:nvSpPr>
         <p:spPr>
           <a:xfrm>
-            <a:off x="20195235" y="9491472"/>
-            <a:ext cx="256032" cy="256032"/>
+            <a:off x="20148550" y="11635740"/>
+            <a:ext cx="274320" cy="274320"/>
           </a:xfrm>
           <a:prstGeom prst="ellipse">
             <a:avLst/>
           </a:prstGeom>
           <a:solidFill>
-            <a:srgbClr val="B9AEEF"/>
+            <a:srgbClr val="339898"/>
           </a:solidFill>
           <a:ln w="19050">
             <a:solidFill>
@@ -4418,17 +4244,24 @@
             <a:prstDash val="solid"/>
           </a:ln>
         </p:spPr>
-      </p:sp>
-      <p:sp>
-        <p:nvSpPr>
-          <p:cNvPr id="70" name="Text 67"/>
+        <p:txBody>
+          <a:bodyPr/>
+          <a:lstStyle/>
+          <a:p>
+            <a:endParaRPr lang="en-US"/>
+          </a:p>
+        </p:txBody>
+      </p:sp>
+      <p:sp>
+        <p:nvSpPr>
+          <p:cNvPr id="73" name="Text 70"/>
           <p:cNvSpPr txBox="1"/>
           <p:nvPr/>
         </p:nvSpPr>
         <p:spPr>
           <a:xfrm>
-            <a:off x="10972800" y="10259568"/>
-            <a:ext cx="2651760" cy="457200"/>
+            <a:off x="10972800" y="12211812"/>
+            <a:ext cx="2697480" cy="502920"/>
           </a:xfrm>
           <a:prstGeom prst="rect">
             <a:avLst/>
@@ -4440,31 +4273,31 @@
           <a:bodyPr wrap="square" lIns="0" tIns="0" rIns="0" bIns="0" rtlCol="0" anchor="ctr"/>
           <a:lstStyle/>
           <a:p>
-            <a:pPr indent="0" marL="0">
+            <a:pPr marL="0" indent="0">
               <a:buNone/>
             </a:pPr>
             <a:r>
-              <a:rPr lang="en-US" sz="2200" dirty="0">
+              <a:rPr lang="en-US" sz="2400" dirty="0">
                 <a:solidFill>
                   <a:schemeClr val="tx1"/>
                 </a:solidFill>
               </a:rPr>
               <a:t>Black vs White</a:t>
             </a:r>
-            <a:endParaRPr lang="en-US" sz="2200" dirty="0"/>
-          </a:p>
-        </p:txBody>
-      </p:sp>
-      <p:sp>
-        <p:nvSpPr>
-          <p:cNvPr id="71" name="Shape 68"/>
+            <a:endParaRPr lang="en-US" sz="2400" dirty="0"/>
+          </a:p>
+        </p:txBody>
+      </p:sp>
+      <p:sp>
+        <p:nvSpPr>
+          <p:cNvPr id="74" name="Shape 71"/>
           <p:cNvSpPr/>
           <p:nvPr/>
         </p:nvSpPr>
         <p:spPr>
           <a:xfrm>
-            <a:off x="19178829" y="10186416"/>
-            <a:ext cx="1001370" cy="0"/>
+            <a:off x="19147790" y="12184380"/>
+            <a:ext cx="995680" cy="0"/>
           </a:xfrm>
           <a:prstGeom prst="line">
             <a:avLst/>
@@ -4472,28 +4305,35 @@
           <a:noFill/>
           <a:ln w="63500">
             <a:solidFill>
-              <a:srgbClr val="8C96A3"/>
+              <a:srgbClr val="666666"/>
             </a:solidFill>
             <a:prstDash val="solid"/>
           </a:ln>
         </p:spPr>
-      </p:sp>
-      <p:sp>
-        <p:nvSpPr>
-          <p:cNvPr id="72" name="Shape 69"/>
+        <p:txBody>
+          <a:bodyPr/>
+          <a:lstStyle/>
+          <a:p>
+            <a:endParaRPr lang="en-US"/>
+          </a:p>
+        </p:txBody>
+      </p:sp>
+      <p:sp>
+        <p:nvSpPr>
+          <p:cNvPr id="75" name="Shape 72"/>
           <p:cNvSpPr/>
           <p:nvPr/>
         </p:nvSpPr>
         <p:spPr>
           <a:xfrm>
-            <a:off x="19542557" y="10058400"/>
-            <a:ext cx="256032" cy="256032"/>
+            <a:off x="19499580" y="12047220"/>
+            <a:ext cx="274320" cy="274320"/>
           </a:xfrm>
           <a:prstGeom prst="ellipse">
             <a:avLst/>
           </a:prstGeom>
           <a:solidFill>
-            <a:srgbClr val="8C96A3"/>
+            <a:srgbClr val="666666"/>
           </a:solidFill>
           <a:ln w="19050">
             <a:solidFill>
@@ -4502,17 +4342,24 @@
             <a:prstDash val="solid"/>
           </a:ln>
         </p:spPr>
-      </p:sp>
-      <p:sp>
-        <p:nvSpPr>
-          <p:cNvPr id="73" name="Shape 70"/>
+        <p:txBody>
+          <a:bodyPr/>
+          <a:lstStyle/>
+          <a:p>
+            <a:endParaRPr lang="en-US"/>
+          </a:p>
+        </p:txBody>
+      </p:sp>
+      <p:sp>
+        <p:nvSpPr>
+          <p:cNvPr id="76" name="Shape 73"/>
           <p:cNvSpPr/>
           <p:nvPr/>
         </p:nvSpPr>
         <p:spPr>
           <a:xfrm>
-            <a:off x="19223533" y="10488168"/>
-            <a:ext cx="1314298" cy="0"/>
+            <a:off x="19192240" y="12458700"/>
+            <a:ext cx="1306830" cy="0"/>
           </a:xfrm>
           <a:prstGeom prst="line">
             <a:avLst/>
@@ -4520,28 +4367,35 @@
           <a:noFill/>
           <a:ln w="63500">
             <a:solidFill>
-              <a:srgbClr val="5B3FD1"/>
+              <a:srgbClr val="0577B1"/>
             </a:solidFill>
             <a:prstDash val="solid"/>
           </a:ln>
         </p:spPr>
-      </p:sp>
-      <p:sp>
-        <p:nvSpPr>
-          <p:cNvPr id="74" name="Shape 71"/>
+        <p:txBody>
+          <a:bodyPr/>
+          <a:lstStyle/>
+          <a:p>
+            <a:endParaRPr lang="en-US"/>
+          </a:p>
+        </p:txBody>
+      </p:sp>
+      <p:sp>
+        <p:nvSpPr>
+          <p:cNvPr id="77" name="Shape 74"/>
           <p:cNvSpPr/>
           <p:nvPr/>
         </p:nvSpPr>
         <p:spPr>
           <a:xfrm>
-            <a:off x="19748195" y="10360152"/>
-            <a:ext cx="256032" cy="256032"/>
+            <a:off x="19704050" y="12321540"/>
+            <a:ext cx="274320" cy="274320"/>
           </a:xfrm>
           <a:prstGeom prst="ellipse">
             <a:avLst/>
           </a:prstGeom>
           <a:solidFill>
-            <a:srgbClr val="5B3FD1"/>
+            <a:srgbClr val="0577B1"/>
           </a:solidFill>
           <a:ln w="19050">
             <a:solidFill>
@@ -4550,17 +4404,24 @@
             <a:prstDash val="solid"/>
           </a:ln>
         </p:spPr>
-      </p:sp>
-      <p:sp>
-        <p:nvSpPr>
-          <p:cNvPr id="75" name="Shape 72"/>
+        <p:txBody>
+          <a:bodyPr/>
+          <a:lstStyle/>
+          <a:p>
+            <a:endParaRPr lang="en-US"/>
+          </a:p>
+        </p:txBody>
+      </p:sp>
+      <p:sp>
+        <p:nvSpPr>
+          <p:cNvPr id="78" name="Shape 75"/>
           <p:cNvSpPr/>
           <p:nvPr/>
         </p:nvSpPr>
         <p:spPr>
           <a:xfrm>
-            <a:off x="19563283" y="10789920"/>
-            <a:ext cx="858317" cy="0"/>
+            <a:off x="19530060" y="12733020"/>
+            <a:ext cx="853440" cy="0"/>
           </a:xfrm>
           <a:prstGeom prst="line">
             <a:avLst/>
@@ -4568,28 +4429,35 @@
           <a:noFill/>
           <a:ln w="63500">
             <a:solidFill>
-              <a:srgbClr val="B9AEEF"/>
+              <a:srgbClr val="339898"/>
             </a:solidFill>
             <a:prstDash val="solid"/>
           </a:ln>
         </p:spPr>
-      </p:sp>
-      <p:sp>
-        <p:nvSpPr>
-          <p:cNvPr id="76" name="Shape 73"/>
+        <p:txBody>
+          <a:bodyPr/>
+          <a:lstStyle/>
+          <a:p>
+            <a:endParaRPr lang="en-US"/>
+          </a:p>
+        </p:txBody>
+      </p:sp>
+      <p:sp>
+        <p:nvSpPr>
+          <p:cNvPr id="79" name="Shape 76"/>
           <p:cNvSpPr/>
           <p:nvPr/>
         </p:nvSpPr>
         <p:spPr>
           <a:xfrm>
-            <a:off x="19864426" y="10661904"/>
-            <a:ext cx="256032" cy="256032"/>
+            <a:off x="19819620" y="12595860"/>
+            <a:ext cx="274320" cy="274320"/>
           </a:xfrm>
           <a:prstGeom prst="ellipse">
             <a:avLst/>
           </a:prstGeom>
           <a:solidFill>
-            <a:srgbClr val="B9AEEF"/>
+            <a:srgbClr val="339898"/>
           </a:solidFill>
           <a:ln w="19050">
             <a:solidFill>
@@ -4598,17 +4466,24 @@
             <a:prstDash val="solid"/>
           </a:ln>
         </p:spPr>
-      </p:sp>
-      <p:sp>
-        <p:nvSpPr>
-          <p:cNvPr id="77" name="Text 74"/>
+        <p:txBody>
+          <a:bodyPr/>
+          <a:lstStyle/>
+          <a:p>
+            <a:endParaRPr lang="en-US"/>
+          </a:p>
+        </p:txBody>
+      </p:sp>
+      <p:sp>
+        <p:nvSpPr>
+          <p:cNvPr id="80" name="Text 77"/>
           <p:cNvSpPr txBox="1"/>
           <p:nvPr/>
         </p:nvSpPr>
         <p:spPr>
           <a:xfrm>
-            <a:off x="10972800" y="11430000"/>
-            <a:ext cx="2651760" cy="457200"/>
+            <a:off x="10972800" y="13171932"/>
+            <a:ext cx="2697480" cy="502920"/>
           </a:xfrm>
           <a:prstGeom prst="rect">
             <a:avLst/>
@@ -4620,31 +4495,31 @@
           <a:bodyPr wrap="square" lIns="0" tIns="0" rIns="0" bIns="0" rtlCol="0" anchor="ctr"/>
           <a:lstStyle/>
           <a:p>
-            <a:pPr indent="0" marL="0">
+            <a:pPr marL="0" indent="0">
               <a:buNone/>
             </a:pPr>
             <a:r>
-              <a:rPr lang="en-US" sz="2200" dirty="0">
+              <a:rPr lang="en-US" sz="2400" dirty="0">
                 <a:solidFill>
                   <a:schemeClr val="tx1"/>
                 </a:solidFill>
               </a:rPr>
               <a:t>Other race vs White</a:t>
             </a:r>
-            <a:endParaRPr lang="en-US" sz="2200" dirty="0"/>
-          </a:p>
-        </p:txBody>
-      </p:sp>
-      <p:sp>
-        <p:nvSpPr>
-          <p:cNvPr id="78" name="Shape 75"/>
+            <a:endParaRPr lang="en-US" sz="2400" dirty="0"/>
+          </a:p>
+        </p:txBody>
+      </p:sp>
+      <p:sp>
+        <p:nvSpPr>
+          <p:cNvPr id="81" name="Shape 78"/>
           <p:cNvSpPr/>
           <p:nvPr/>
         </p:nvSpPr>
         <p:spPr>
           <a:xfrm>
-            <a:off x="19286118" y="11356848"/>
-            <a:ext cx="1072896" cy="0"/>
+            <a:off x="19254470" y="13144500"/>
+            <a:ext cx="1066800" cy="0"/>
           </a:xfrm>
           <a:prstGeom prst="line">
             <a:avLst/>
@@ -4652,28 +4527,35 @@
           <a:noFill/>
           <a:ln w="63500">
             <a:solidFill>
-              <a:srgbClr val="8C96A3"/>
+              <a:srgbClr val="666666"/>
             </a:solidFill>
             <a:prstDash val="solid"/>
           </a:ln>
         </p:spPr>
-      </p:sp>
-      <p:sp>
-        <p:nvSpPr>
-          <p:cNvPr id="79" name="Shape 76"/>
+        <p:txBody>
+          <a:bodyPr/>
+          <a:lstStyle/>
+          <a:p>
+            <a:endParaRPr lang="en-US"/>
+          </a:p>
+        </p:txBody>
+      </p:sp>
+      <p:sp>
+        <p:nvSpPr>
+          <p:cNvPr id="82" name="Shape 79"/>
           <p:cNvSpPr/>
           <p:nvPr/>
         </p:nvSpPr>
         <p:spPr>
           <a:xfrm>
-            <a:off x="19676669" y="11228832"/>
-            <a:ext cx="256032" cy="256032"/>
+            <a:off x="19632930" y="13007340"/>
+            <a:ext cx="274320" cy="274320"/>
           </a:xfrm>
           <a:prstGeom prst="ellipse">
             <a:avLst/>
           </a:prstGeom>
           <a:solidFill>
-            <a:srgbClr val="8C96A3"/>
+            <a:srgbClr val="666666"/>
           </a:solidFill>
           <a:ln w="19050">
             <a:solidFill>
@@ -4682,17 +4564,24 @@
             <a:prstDash val="solid"/>
           </a:ln>
         </p:spPr>
-      </p:sp>
-      <p:sp>
-        <p:nvSpPr>
-          <p:cNvPr id="80" name="Shape 77"/>
+        <p:txBody>
+          <a:bodyPr/>
+          <a:lstStyle/>
+          <a:p>
+            <a:endParaRPr lang="en-US"/>
+          </a:p>
+        </p:txBody>
+      </p:sp>
+      <p:sp>
+        <p:nvSpPr>
+          <p:cNvPr id="83" name="Shape 80"/>
           <p:cNvSpPr/>
           <p:nvPr/>
         </p:nvSpPr>
         <p:spPr>
           <a:xfrm>
-            <a:off x="18928486" y="11658600"/>
-            <a:ext cx="1189126" cy="0"/>
+            <a:off x="18898870" y="13418820"/>
+            <a:ext cx="1182370" cy="0"/>
           </a:xfrm>
           <a:prstGeom prst="line">
             <a:avLst/>
@@ -4700,28 +4589,35 @@
           <a:noFill/>
           <a:ln w="63500">
             <a:solidFill>
-              <a:srgbClr val="5B3FD1"/>
+              <a:srgbClr val="0577B1"/>
             </a:solidFill>
             <a:prstDash val="solid"/>
           </a:ln>
         </p:spPr>
-      </p:sp>
-      <p:sp>
-        <p:nvSpPr>
-          <p:cNvPr id="81" name="Shape 78"/>
+        <p:txBody>
+          <a:bodyPr/>
+          <a:lstStyle/>
+          <a:p>
+            <a:endParaRPr lang="en-US"/>
+          </a:p>
+        </p:txBody>
+      </p:sp>
+      <p:sp>
+        <p:nvSpPr>
+          <p:cNvPr id="84" name="Shape 81"/>
           <p:cNvSpPr/>
           <p:nvPr/>
         </p:nvSpPr>
         <p:spPr>
           <a:xfrm>
-            <a:off x="19390563" y="11530584"/>
-            <a:ext cx="256032" cy="256032"/>
+            <a:off x="19348450" y="13281660"/>
+            <a:ext cx="274320" cy="274320"/>
           </a:xfrm>
           <a:prstGeom prst="ellipse">
             <a:avLst/>
           </a:prstGeom>
           <a:solidFill>
-            <a:srgbClr val="5B3FD1"/>
+            <a:srgbClr val="0577B1"/>
           </a:solidFill>
           <a:ln w="19050">
             <a:solidFill>
@@ -4730,17 +4626,24 @@
             <a:prstDash val="solid"/>
           </a:ln>
         </p:spPr>
-      </p:sp>
-      <p:sp>
-        <p:nvSpPr>
-          <p:cNvPr id="82" name="Shape 79"/>
+        <p:txBody>
+          <a:bodyPr/>
+          <a:lstStyle/>
+          <a:p>
+            <a:endParaRPr lang="en-US"/>
+          </a:p>
+        </p:txBody>
+      </p:sp>
+      <p:sp>
+        <p:nvSpPr>
+          <p:cNvPr id="85" name="Shape 82"/>
           <p:cNvSpPr/>
           <p:nvPr/>
         </p:nvSpPr>
         <p:spPr>
           <a:xfrm>
-            <a:off x="19652691" y="11960352"/>
-            <a:ext cx="867258" cy="0"/>
+            <a:off x="19618960" y="13693140"/>
+            <a:ext cx="862330" cy="0"/>
           </a:xfrm>
           <a:prstGeom prst="line">
             <a:avLst/>
@@ -4748,28 +4651,35 @@
           <a:noFill/>
           <a:ln w="63500">
             <a:solidFill>
-              <a:srgbClr val="B9AEEF"/>
+              <a:srgbClr val="339898"/>
             </a:solidFill>
             <a:prstDash val="solid"/>
           </a:ln>
         </p:spPr>
-      </p:sp>
-      <p:sp>
-        <p:nvSpPr>
-          <p:cNvPr id="83" name="Shape 80"/>
+        <p:txBody>
+          <a:bodyPr/>
+          <a:lstStyle/>
+          <a:p>
+            <a:endParaRPr lang="en-US"/>
+          </a:p>
+        </p:txBody>
+      </p:sp>
+      <p:sp>
+        <p:nvSpPr>
+          <p:cNvPr id="86" name="Shape 83"/>
           <p:cNvSpPr/>
           <p:nvPr/>
         </p:nvSpPr>
         <p:spPr>
           <a:xfrm>
-            <a:off x="19935952" y="11832336"/>
-            <a:ext cx="256032" cy="256032"/>
+            <a:off x="19890740" y="13555980"/>
+            <a:ext cx="274320" cy="274320"/>
           </a:xfrm>
           <a:prstGeom prst="ellipse">
             <a:avLst/>
           </a:prstGeom>
           <a:solidFill>
-            <a:srgbClr val="B9AEEF"/>
+            <a:srgbClr val="339898"/>
           </a:solidFill>
           <a:ln w="19050">
             <a:solidFill>
@@ -4778,17 +4688,24 @@
             <a:prstDash val="solid"/>
           </a:ln>
         </p:spPr>
-      </p:sp>
-      <p:sp>
-        <p:nvSpPr>
-          <p:cNvPr id="84" name="Text 81"/>
+        <p:txBody>
+          <a:bodyPr/>
+          <a:lstStyle/>
+          <a:p>
+            <a:endParaRPr lang="en-US"/>
+          </a:p>
+        </p:txBody>
+      </p:sp>
+      <p:sp>
+        <p:nvSpPr>
+          <p:cNvPr id="87" name="Text 84"/>
           <p:cNvSpPr txBox="1"/>
           <p:nvPr/>
         </p:nvSpPr>
         <p:spPr>
           <a:xfrm>
-            <a:off x="10972800" y="12600432"/>
-            <a:ext cx="2651760" cy="457200"/>
+            <a:off x="10972800" y="14132052"/>
+            <a:ext cx="2697480" cy="502920"/>
           </a:xfrm>
           <a:prstGeom prst="rect">
             <a:avLst/>
@@ -4800,31 +4717,31 @@
           <a:bodyPr wrap="square" lIns="0" tIns="0" rIns="0" bIns="0" rtlCol="0" anchor="ctr"/>
           <a:lstStyle/>
           <a:p>
-            <a:pPr indent="0" marL="0">
+            <a:pPr marL="0" indent="0">
               <a:buNone/>
             </a:pPr>
             <a:r>
-              <a:rPr lang="en-US" sz="2200" dirty="0">
+              <a:rPr lang="en-US" sz="2400" dirty="0">
                 <a:solidFill>
                   <a:schemeClr val="tx1"/>
                 </a:solidFill>
               </a:rPr>
-              <a:t>Age 50+ vs 30–49</a:t>
-            </a:r>
-            <a:endParaRPr lang="en-US" sz="2200" dirty="0"/>
-          </a:p>
-        </p:txBody>
-      </p:sp>
-      <p:sp>
-        <p:nvSpPr>
-          <p:cNvPr id="85" name="Shape 82"/>
+              <a:t>50+ vs 30–49</a:t>
+            </a:r>
+            <a:endParaRPr lang="en-US" sz="2400" dirty="0"/>
+          </a:p>
+        </p:txBody>
+      </p:sp>
+      <p:sp>
+        <p:nvSpPr>
+          <p:cNvPr id="88" name="Shape 85"/>
           <p:cNvSpPr/>
           <p:nvPr/>
         </p:nvSpPr>
         <p:spPr>
           <a:xfrm>
-            <a:off x="19178829" y="12527280"/>
-            <a:ext cx="1081837" cy="0"/>
+            <a:off x="19147790" y="14104620"/>
+            <a:ext cx="1075690" cy="0"/>
           </a:xfrm>
           <a:prstGeom prst="line">
             <a:avLst/>
@@ -4832,28 +4749,35 @@
           <a:noFill/>
           <a:ln w="63500">
             <a:solidFill>
-              <a:srgbClr val="8C96A3"/>
+              <a:srgbClr val="666666"/>
             </a:solidFill>
             <a:prstDash val="solid"/>
           </a:ln>
         </p:spPr>
-      </p:sp>
-      <p:sp>
-        <p:nvSpPr>
-          <p:cNvPr id="86" name="Shape 83"/>
+        <p:txBody>
+          <a:bodyPr/>
+          <a:lstStyle/>
+          <a:p>
+            <a:endParaRPr lang="en-US"/>
+          </a:p>
+        </p:txBody>
+      </p:sp>
+      <p:sp>
+        <p:nvSpPr>
+          <p:cNvPr id="89" name="Shape 86"/>
           <p:cNvSpPr/>
           <p:nvPr/>
         </p:nvSpPr>
         <p:spPr>
           <a:xfrm>
-            <a:off x="19596202" y="12399264"/>
-            <a:ext cx="256032" cy="256032"/>
+            <a:off x="19552920" y="13967460"/>
+            <a:ext cx="274320" cy="274320"/>
           </a:xfrm>
           <a:prstGeom prst="ellipse">
             <a:avLst/>
           </a:prstGeom>
           <a:solidFill>
-            <a:srgbClr val="8C96A3"/>
+            <a:srgbClr val="666666"/>
           </a:solidFill>
           <a:ln w="19050">
             <a:solidFill>
@@ -4862,17 +4786,24 @@
             <a:prstDash val="solid"/>
           </a:ln>
         </p:spPr>
-      </p:sp>
-      <p:sp>
-        <p:nvSpPr>
-          <p:cNvPr id="87" name="Shape 84"/>
+        <p:txBody>
+          <a:bodyPr/>
+          <a:lstStyle/>
+          <a:p>
+            <a:endParaRPr lang="en-US"/>
+          </a:p>
+        </p:txBody>
+      </p:sp>
+      <p:sp>
+        <p:nvSpPr>
+          <p:cNvPr id="90" name="Shape 87"/>
           <p:cNvSpPr/>
           <p:nvPr/>
         </p:nvSpPr>
         <p:spPr>
           <a:xfrm>
-            <a:off x="20332192" y="12829032"/>
-            <a:ext cx="679501" cy="0"/>
+            <a:off x="20294600" y="14378940"/>
+            <a:ext cx="675640" cy="0"/>
           </a:xfrm>
           <a:prstGeom prst="line">
             <a:avLst/>
@@ -4880,28 +4811,35 @@
           <a:noFill/>
           <a:ln w="63500">
             <a:solidFill>
-              <a:srgbClr val="5B3FD1"/>
+              <a:srgbClr val="0577B1"/>
             </a:solidFill>
             <a:prstDash val="solid"/>
           </a:ln>
         </p:spPr>
-      </p:sp>
-      <p:sp>
-        <p:nvSpPr>
-          <p:cNvPr id="88" name="Shape 85"/>
+        <p:txBody>
+          <a:bodyPr/>
+          <a:lstStyle/>
+          <a:p>
+            <a:endParaRPr lang="en-US"/>
+          </a:p>
+        </p:txBody>
+      </p:sp>
+      <p:sp>
+        <p:nvSpPr>
+          <p:cNvPr id="91" name="Shape 88"/>
           <p:cNvSpPr/>
           <p:nvPr/>
         </p:nvSpPr>
         <p:spPr>
           <a:xfrm>
-            <a:off x="20543926" y="12701016"/>
-            <a:ext cx="256032" cy="256032"/>
+            <a:off x="20495260" y="14241780"/>
+            <a:ext cx="274320" cy="274320"/>
           </a:xfrm>
           <a:prstGeom prst="ellipse">
             <a:avLst/>
           </a:prstGeom>
           <a:solidFill>
-            <a:srgbClr val="5B3FD1"/>
+            <a:srgbClr val="0577B1"/>
           </a:solidFill>
           <a:ln w="19050">
             <a:solidFill>
@@ -4910,17 +4848,24 @@
             <a:prstDash val="solid"/>
           </a:ln>
         </p:spPr>
-      </p:sp>
-      <p:sp>
-        <p:nvSpPr>
-          <p:cNvPr id="89" name="Shape 86"/>
+        <p:txBody>
+          <a:bodyPr/>
+          <a:lstStyle/>
+          <a:p>
+            <a:endParaRPr lang="en-US"/>
+          </a:p>
+        </p:txBody>
+      </p:sp>
+      <p:sp>
+        <p:nvSpPr>
+          <p:cNvPr id="92" name="Shape 89"/>
           <p:cNvSpPr/>
           <p:nvPr/>
         </p:nvSpPr>
         <p:spPr>
           <a:xfrm>
-            <a:off x="19885152" y="13130784"/>
-            <a:ext cx="286106" cy="0"/>
+            <a:off x="19850100" y="14653260"/>
+            <a:ext cx="284480" cy="0"/>
           </a:xfrm>
           <a:prstGeom prst="line">
             <a:avLst/>
@@ -4928,28 +4873,35 @@
           <a:noFill/>
           <a:ln w="63500">
             <a:solidFill>
-              <a:srgbClr val="B9AEEF"/>
+              <a:srgbClr val="339898"/>
             </a:solidFill>
             <a:prstDash val="solid"/>
           </a:ln>
         </p:spPr>
-      </p:sp>
-      <p:sp>
-        <p:nvSpPr>
-          <p:cNvPr id="90" name="Shape 87"/>
+        <p:txBody>
+          <a:bodyPr/>
+          <a:lstStyle/>
+          <a:p>
+            <a:endParaRPr lang="en-US"/>
+          </a:p>
+        </p:txBody>
+      </p:sp>
+      <p:sp>
+        <p:nvSpPr>
+          <p:cNvPr id="93" name="Shape 90"/>
           <p:cNvSpPr/>
           <p:nvPr/>
         </p:nvSpPr>
         <p:spPr>
           <a:xfrm>
-            <a:off x="19891248" y="13002768"/>
-            <a:ext cx="256032" cy="256032"/>
+            <a:off x="19846290" y="14516100"/>
+            <a:ext cx="274320" cy="274320"/>
           </a:xfrm>
           <a:prstGeom prst="ellipse">
             <a:avLst/>
           </a:prstGeom>
           <a:solidFill>
-            <a:srgbClr val="B9AEEF"/>
+            <a:srgbClr val="339898"/>
           </a:solidFill>
           <a:ln w="19050">
             <a:solidFill>
@@ -4958,17 +4910,24 @@
             <a:prstDash val="solid"/>
           </a:ln>
         </p:spPr>
-      </p:sp>
-      <p:sp>
-        <p:nvSpPr>
-          <p:cNvPr id="91" name="Text 88"/>
+        <p:txBody>
+          <a:bodyPr/>
+          <a:lstStyle/>
+          <a:p>
+            <a:endParaRPr lang="en-US"/>
+          </a:p>
+        </p:txBody>
+      </p:sp>
+      <p:sp>
+        <p:nvSpPr>
+          <p:cNvPr id="94" name="Text 91"/>
           <p:cNvSpPr txBox="1"/>
           <p:nvPr/>
         </p:nvSpPr>
         <p:spPr>
           <a:xfrm>
-            <a:off x="10972800" y="13770864"/>
-            <a:ext cx="2651760" cy="457200"/>
+            <a:off x="10972800" y="15092172"/>
+            <a:ext cx="2697480" cy="502920"/>
           </a:xfrm>
           <a:prstGeom prst="rect">
             <a:avLst/>
@@ -4980,31 +4939,31 @@
           <a:bodyPr wrap="square" lIns="0" tIns="0" rIns="0" bIns="0" rtlCol="0" anchor="ctr"/>
           <a:lstStyle/>
           <a:p>
-            <a:pPr indent="0" marL="0">
+            <a:pPr marL="0" indent="0">
               <a:buNone/>
             </a:pPr>
             <a:r>
-              <a:rPr lang="en-US" sz="2200" b="1" dirty="0">
-                <a:solidFill>
-                  <a:schemeClr val="accent5"/>
+              <a:rPr lang="en-US" sz="2400" b="1" dirty="0">
+                <a:solidFill>
+                  <a:schemeClr val="accent2"/>
                 </a:solidFill>
               </a:rPr>
               <a:t>Under 30 vs 30–49</a:t>
             </a:r>
-            <a:endParaRPr lang="en-US" sz="2200" dirty="0"/>
-          </a:p>
-        </p:txBody>
-      </p:sp>
-      <p:sp>
-        <p:nvSpPr>
-          <p:cNvPr id="92" name="Shape 89"/>
+            <a:endParaRPr lang="en-US" sz="2400" dirty="0"/>
+          </a:p>
+        </p:txBody>
+      </p:sp>
+      <p:sp>
+        <p:nvSpPr>
+          <p:cNvPr id="95" name="Shape 92"/>
           <p:cNvSpPr/>
           <p:nvPr/>
         </p:nvSpPr>
         <p:spPr>
           <a:xfrm>
-            <a:off x="19134125" y="13697712"/>
-            <a:ext cx="616915" cy="0"/>
+            <a:off x="19103340" y="15064740"/>
+            <a:ext cx="613410" cy="0"/>
           </a:xfrm>
           <a:prstGeom prst="line">
             <a:avLst/>
@@ -5012,28 +4971,35 @@
           <a:noFill/>
           <a:ln w="63500">
             <a:solidFill>
-              <a:srgbClr val="8C96A3"/>
+              <a:srgbClr val="666666"/>
             </a:solidFill>
             <a:prstDash val="solid"/>
           </a:ln>
         </p:spPr>
-      </p:sp>
-      <p:sp>
-        <p:nvSpPr>
-          <p:cNvPr id="93" name="Shape 90"/>
+        <p:txBody>
+          <a:bodyPr/>
+          <a:lstStyle/>
+          <a:p>
+            <a:endParaRPr lang="en-US"/>
+          </a:p>
+        </p:txBody>
+      </p:sp>
+      <p:sp>
+        <p:nvSpPr>
+          <p:cNvPr id="96" name="Shape 93"/>
           <p:cNvSpPr/>
           <p:nvPr/>
         </p:nvSpPr>
         <p:spPr>
           <a:xfrm>
-            <a:off x="19310096" y="13569696"/>
-            <a:ext cx="256032" cy="256032"/>
+            <a:off x="19268440" y="14927580"/>
+            <a:ext cx="274320" cy="274320"/>
           </a:xfrm>
           <a:prstGeom prst="ellipse">
             <a:avLst/>
           </a:prstGeom>
           <a:solidFill>
-            <a:srgbClr val="8C96A3"/>
+            <a:srgbClr val="666666"/>
           </a:solidFill>
           <a:ln w="19050">
             <a:solidFill>
@@ -5042,17 +5008,24 @@
             <a:prstDash val="solid"/>
           </a:ln>
         </p:spPr>
-      </p:sp>
-      <p:sp>
-        <p:nvSpPr>
-          <p:cNvPr id="94" name="Shape 91"/>
+        <p:txBody>
+          <a:bodyPr/>
+          <a:lstStyle/>
+          <a:p>
+            <a:endParaRPr lang="en-US"/>
+          </a:p>
+        </p:txBody>
+      </p:sp>
+      <p:sp>
+        <p:nvSpPr>
+          <p:cNvPr id="97" name="Shape 94"/>
           <p:cNvSpPr/>
           <p:nvPr/>
         </p:nvSpPr>
         <p:spPr>
           <a:xfrm>
-            <a:off x="14207744" y="13999464"/>
-            <a:ext cx="3030931" cy="0"/>
+            <a:off x="14204950" y="15339060"/>
+            <a:ext cx="3013710" cy="0"/>
           </a:xfrm>
           <a:prstGeom prst="line">
             <a:avLst/>
@@ -5060,28 +5033,35 @@
           <a:noFill/>
           <a:ln w="63500">
             <a:solidFill>
-              <a:srgbClr val="5B3FD1"/>
+              <a:srgbClr val="0577B1"/>
             </a:solidFill>
             <a:prstDash val="solid"/>
           </a:ln>
         </p:spPr>
-      </p:sp>
-      <p:sp>
-        <p:nvSpPr>
-          <p:cNvPr id="95" name="Shape 92"/>
+        <p:txBody>
+          <a:bodyPr/>
+          <a:lstStyle/>
+          <a:p>
+            <a:endParaRPr lang="en-US"/>
+          </a:p>
+        </p:txBody>
+      </p:sp>
+      <p:sp>
+        <p:nvSpPr>
+          <p:cNvPr id="98" name="Shape 95"/>
           <p:cNvSpPr/>
           <p:nvPr/>
         </p:nvSpPr>
         <p:spPr>
           <a:xfrm>
-            <a:off x="15608605" y="13871448"/>
-            <a:ext cx="256032" cy="256032"/>
+            <a:off x="15587980" y="15201900"/>
+            <a:ext cx="274320" cy="274320"/>
           </a:xfrm>
           <a:prstGeom prst="ellipse">
             <a:avLst/>
           </a:prstGeom>
           <a:solidFill>
-            <a:srgbClr val="5B3FD1"/>
+            <a:srgbClr val="0577B1"/>
           </a:solidFill>
           <a:ln w="19050">
             <a:solidFill>
@@ -5090,17 +5070,24 @@
             <a:prstDash val="solid"/>
           </a:ln>
         </p:spPr>
-      </p:sp>
-      <p:sp>
-        <p:nvSpPr>
-          <p:cNvPr id="96" name="Shape 93"/>
+        <p:txBody>
+          <a:bodyPr/>
+          <a:lstStyle/>
+          <a:p>
+            <a:endParaRPr lang="en-US"/>
+          </a:p>
+        </p:txBody>
+      </p:sp>
+      <p:sp>
+        <p:nvSpPr>
+          <p:cNvPr id="99" name="Shape 96"/>
           <p:cNvSpPr/>
           <p:nvPr/>
         </p:nvSpPr>
         <p:spPr>
           <a:xfrm>
-            <a:off x="15790266" y="14301216"/>
-            <a:ext cx="1797101" cy="0"/>
+            <a:off x="15778480" y="15613380"/>
+            <a:ext cx="1786890" cy="0"/>
           </a:xfrm>
           <a:prstGeom prst="line">
             <a:avLst/>
@@ -5108,28 +5095,35 @@
           <a:noFill/>
           <a:ln w="63500">
             <a:solidFill>
-              <a:srgbClr val="B9AEEF"/>
+              <a:srgbClr val="339898"/>
             </a:solidFill>
             <a:prstDash val="solid"/>
           </a:ln>
         </p:spPr>
-      </p:sp>
-      <p:sp>
-        <p:nvSpPr>
-          <p:cNvPr id="97" name="Shape 94"/>
+        <p:txBody>
+          <a:bodyPr/>
+          <a:lstStyle/>
+          <a:p>
+            <a:endParaRPr lang="en-US"/>
+          </a:p>
+        </p:txBody>
+      </p:sp>
+      <p:sp>
+        <p:nvSpPr>
+          <p:cNvPr id="100" name="Shape 97"/>
           <p:cNvSpPr/>
           <p:nvPr/>
         </p:nvSpPr>
         <p:spPr>
           <a:xfrm>
-            <a:off x="16547389" y="14173200"/>
-            <a:ext cx="256032" cy="256032"/>
+            <a:off x="16521430" y="15476220"/>
+            <a:ext cx="274320" cy="274320"/>
           </a:xfrm>
           <a:prstGeom prst="ellipse">
             <a:avLst/>
           </a:prstGeom>
           <a:solidFill>
-            <a:srgbClr val="B9AEEF"/>
+            <a:srgbClr val="339898"/>
           </a:solidFill>
           <a:ln w="19050">
             <a:solidFill>
@@ -5138,42 +5132,108 @@
             <a:prstDash val="solid"/>
           </a:ln>
         </p:spPr>
-      </p:sp>
-      <p:sp>
-        <p:nvSpPr>
-          <p:cNvPr id="98" name="Shape 95"/>
+        <p:txBody>
+          <a:bodyPr/>
+          <a:lstStyle/>
+          <a:p>
+            <a:endParaRPr lang="en-US"/>
+          </a:p>
+        </p:txBody>
+      </p:sp>
+      <p:sp>
+        <p:nvSpPr>
+          <p:cNvPr id="101" name="Text 98"/>
+          <p:cNvSpPr txBox="1"/>
+          <p:nvPr/>
+        </p:nvSpPr>
+        <p:spPr>
+          <a:xfrm>
+            <a:off x="10972800" y="16733520"/>
+            <a:ext cx="10972800" cy="502920"/>
+          </a:xfrm>
+          <a:prstGeom prst="rect">
+            <a:avLst/>
+          </a:prstGeom>
+          <a:noFill/>
+          <a:ln/>
+        </p:spPr>
+        <p:txBody>
+          <a:bodyPr wrap="square" lIns="0" tIns="0" rIns="0" bIns="0" rtlCol="0" anchor="t"/>
+          <a:lstStyle/>
+          <a:p>
+            <a:pPr marL="0" indent="0">
+              <a:buNone/>
+            </a:pPr>
+            <a:r>
+              <a:rPr lang="en-US" sz="2400" b="1" dirty="0">
+                <a:solidFill>
+                  <a:schemeClr val="tx2"/>
+                </a:solidFill>
+              </a:rPr>
+              <a:t>More effort does not close the gap (2023)</a:t>
+            </a:r>
+            <a:endParaRPr lang="en-US" sz="2400" dirty="0"/>
+          </a:p>
+        </p:txBody>
+      </p:sp>
+      <p:graphicFrame>
+        <p:nvGraphicFramePr>
+          <p:cNvPr id="102" name="budget curves chart"/>
+          <p:cNvGraphicFramePr/>
+          <p:nvPr/>
+        </p:nvGraphicFramePr>
+        <p:xfrm>
+          <a:off x="10972800" y="17236440"/>
+          <a:ext cx="10972800" cy="3566160"/>
+        </p:xfrm>
+        <a:graphic>
+          <a:graphicData uri="http://schemas.openxmlformats.org/drawingml/2006/chart">
+            <c:chart xmlns:c="http://schemas.openxmlformats.org/drawingml/2006/chart" xmlns:r="http://schemas.openxmlformats.org/officeDocument/2006/relationships" r:id="rId4"/>
+          </a:graphicData>
+        </a:graphic>
+      </p:graphicFrame>
+      <p:sp>
+        <p:nvSpPr>
+          <p:cNvPr id="103" name="marker 3"/>
           <p:cNvSpPr/>
           <p:nvPr/>
         </p:nvSpPr>
         <p:spPr>
           <a:xfrm>
-            <a:off x="13716000" y="15526512"/>
-            <a:ext cx="256032" cy="256032"/>
+            <a:off x="22494240" y="4800600"/>
+            <a:ext cx="731520" cy="731520"/>
           </a:xfrm>
           <a:prstGeom prst="ellipse">
             <a:avLst/>
           </a:prstGeom>
           <a:solidFill>
-            <a:srgbClr val="8C96A3"/>
+            <a:schemeClr val="tx2"/>
           </a:solidFill>
           <a:ln w="12700">
             <a:solidFill>
-              <a:srgbClr val="8C96A3"/>
+              <a:schemeClr val="tx2"/>
             </a:solidFill>
             <a:prstDash val="solid"/>
           </a:ln>
         </p:spPr>
-      </p:sp>
-      <p:sp>
-        <p:nvSpPr>
-          <p:cNvPr id="99" name="Text 96"/>
+        <p:txBody>
+          <a:bodyPr/>
+          <a:lstStyle/>
+          <a:p>
+            <a:endParaRPr lang="en-US"/>
+          </a:p>
+        </p:txBody>
+      </p:sp>
+      <p:sp>
+        <p:nvSpPr>
+          <p:cNvPr id="104" name="Text 100"/>
           <p:cNvSpPr txBox="1"/>
           <p:nvPr/>
         </p:nvSpPr>
         <p:spPr>
           <a:xfrm>
-            <a:off x="14081760" y="15453360"/>
-            <a:ext cx="2377440" cy="411480"/>
+            <a:off x="22494240" y="4800600"/>
+            <a:ext cx="731520" cy="731520"/>
           </a:xfrm>
           <a:prstGeom prst="rect">
             <a:avLst/>
@@ -5185,56 +5245,306 @@
           <a:bodyPr wrap="square" lIns="0" tIns="0" rIns="0" bIns="0" rtlCol="0" anchor="ctr"/>
           <a:lstStyle/>
           <a:p>
-            <a:pPr indent="0" marL="0">
+            <a:pPr marL="0" indent="0" algn="ctr">
               <a:buNone/>
             </a:pPr>
             <a:r>
-              <a:rPr lang="en-US" sz="1800" dirty="0">
+              <a:rPr lang="en-US" sz="3000" b="1" dirty="0">
+                <a:solidFill>
+                  <a:schemeClr val="bg1"/>
+                </a:solidFill>
+              </a:rPr>
+              <a:t>4</a:t>
+            </a:r>
+            <a:endParaRPr lang="en-US" sz="3000" dirty="0"/>
+          </a:p>
+        </p:txBody>
+      </p:sp>
+      <p:sp>
+        <p:nvSpPr>
+          <p:cNvPr id="105" name="Text 101"/>
+          <p:cNvSpPr txBox="1"/>
+          <p:nvPr/>
+        </p:nvSpPr>
+        <p:spPr>
+          <a:xfrm>
+            <a:off x="23454360" y="4754880"/>
+            <a:ext cx="8732520" cy="1371600"/>
+          </a:xfrm>
+          <a:prstGeom prst="rect">
+            <a:avLst/>
+          </a:prstGeom>
+          <a:noFill/>
+          <a:ln/>
+        </p:spPr>
+        <p:txBody>
+          <a:bodyPr wrap="square" lIns="0" tIns="0" rIns="0" bIns="0" rtlCol="0" anchor="t"/>
+          <a:lstStyle/>
+          <a:p>
+            <a:pPr marL="0" indent="0">
+              <a:lnSpc>
+                <a:spcPct val="92000"/>
+              </a:lnSpc>
+              <a:buNone/>
+            </a:pPr>
+            <a:r>
+              <a:rPr lang="en-US" sz="3600" b="1" dirty="0">
                 <a:solidFill>
                   <a:schemeClr val="tx2"/>
                 </a:solidFill>
               </a:rPr>
-              <a:t>1994 (Adult)</a:t>
-            </a:r>
-            <a:endParaRPr lang="en-US" sz="1800" dirty="0"/>
-          </a:p>
-        </p:txBody>
-      </p:sp>
-      <p:sp>
-        <p:nvSpPr>
-          <p:cNvPr id="100" name="Shape 97"/>
+              <a:t>Off-the-shelf explanations mostly advise the impossible</a:t>
+            </a:r>
+            <a:endParaRPr lang="en-US" sz="3600" dirty="0"/>
+          </a:p>
+        </p:txBody>
+      </p:sp>
+      <p:sp>
+        <p:nvSpPr>
+          <p:cNvPr id="106" name="Text 102"/>
+          <p:cNvSpPr txBox="1"/>
+          <p:nvPr/>
+        </p:nvSpPr>
+        <p:spPr>
+          <a:xfrm>
+            <a:off x="22494240" y="6309360"/>
+            <a:ext cx="4663440" cy="1143000"/>
+          </a:xfrm>
+          <a:prstGeom prst="rect">
+            <a:avLst/>
+          </a:prstGeom>
+          <a:noFill/>
+          <a:ln/>
+        </p:spPr>
+        <p:txBody>
+          <a:bodyPr wrap="square" lIns="0" tIns="0" rIns="0" bIns="0" rtlCol="0" anchor="t"/>
+          <a:lstStyle/>
+          <a:p>
+            <a:pPr marL="0" indent="0">
+              <a:buNone/>
+            </a:pPr>
+            <a:r>
+              <a:rPr lang="en-US" sz="8000" b="1" dirty="0">
+                <a:solidFill>
+                  <a:schemeClr val="accent2"/>
+                </a:solidFill>
+              </a:rPr>
+              <a:t>77%</a:t>
+            </a:r>
+            <a:endParaRPr lang="en-US" sz="8000" dirty="0"/>
+          </a:p>
+        </p:txBody>
+      </p:sp>
+      <p:sp>
+        <p:nvSpPr>
+          <p:cNvPr id="107" name="Text 103"/>
+          <p:cNvSpPr txBox="1"/>
+          <p:nvPr/>
+        </p:nvSpPr>
+        <p:spPr>
+          <a:xfrm>
+            <a:off x="22494240" y="7498080"/>
+            <a:ext cx="4663440" cy="685800"/>
+          </a:xfrm>
+          <a:prstGeom prst="rect">
+            <a:avLst/>
+          </a:prstGeom>
+          <a:noFill/>
+          <a:ln/>
+        </p:spPr>
+        <p:txBody>
+          <a:bodyPr wrap="square" lIns="0" tIns="0" rIns="0" bIns="0" rtlCol="0" anchor="t"/>
+          <a:lstStyle/>
+          <a:p>
+            <a:pPr marL="0" indent="0">
+              <a:buNone/>
+            </a:pPr>
+            <a:r>
+              <a:rPr lang="en-US" sz="2200" dirty="0">
+                <a:solidFill>
+                  <a:schemeClr val="tx1"/>
+                </a:solidFill>
+              </a:rPr>
+              <a:t>of its advice breaks a rule (1994, capital gains fixed)</a:t>
+            </a:r>
+            <a:endParaRPr lang="en-US" sz="2200" dirty="0"/>
+          </a:p>
+        </p:txBody>
+      </p:sp>
+      <p:sp>
+        <p:nvSpPr>
+          <p:cNvPr id="108" name="Text 104"/>
+          <p:cNvSpPr txBox="1"/>
+          <p:nvPr/>
+        </p:nvSpPr>
+        <p:spPr>
+          <a:xfrm>
+            <a:off x="27340560" y="6309360"/>
+            <a:ext cx="4663440" cy="1143000"/>
+          </a:xfrm>
+          <a:prstGeom prst="rect">
+            <a:avLst/>
+          </a:prstGeom>
+          <a:noFill/>
+          <a:ln/>
+        </p:spPr>
+        <p:txBody>
+          <a:bodyPr wrap="square" lIns="0" tIns="0" rIns="0" bIns="0" rtlCol="0" anchor="t"/>
+          <a:lstStyle/>
+          <a:p>
+            <a:pPr marL="0" indent="0">
+              <a:buNone/>
+            </a:pPr>
+            <a:r>
+              <a:rPr lang="en-US" sz="8000" b="1" dirty="0">
+                <a:solidFill>
+                  <a:schemeClr val="accent2"/>
+                </a:solidFill>
+              </a:rPr>
+              <a:t>42%</a:t>
+            </a:r>
+            <a:endParaRPr lang="en-US" sz="8000" dirty="0"/>
+          </a:p>
+        </p:txBody>
+      </p:sp>
+      <p:sp>
+        <p:nvSpPr>
+          <p:cNvPr id="109" name="Text 105"/>
+          <p:cNvSpPr txBox="1"/>
+          <p:nvPr/>
+        </p:nvSpPr>
+        <p:spPr>
+          <a:xfrm>
+            <a:off x="27340560" y="7498080"/>
+            <a:ext cx="4663440" cy="457200"/>
+          </a:xfrm>
+          <a:prstGeom prst="rect">
+            <a:avLst/>
+          </a:prstGeom>
+          <a:noFill/>
+          <a:ln/>
+        </p:spPr>
+        <p:txBody>
+          <a:bodyPr wrap="square" lIns="0" tIns="0" rIns="0" bIns="0" rtlCol="0" anchor="t"/>
+          <a:lstStyle/>
+          <a:p>
+            <a:pPr marL="0" indent="0">
+              <a:buNone/>
+            </a:pPr>
+            <a:r>
+              <a:rPr lang="en-US" sz="2200" dirty="0">
+                <a:solidFill>
+                  <a:schemeClr val="tx1"/>
+                </a:solidFill>
+              </a:rPr>
+              <a:t>still in 2023</a:t>
+            </a:r>
+            <a:endParaRPr lang="en-US" sz="2200" dirty="0"/>
+          </a:p>
+        </p:txBody>
+      </p:sp>
+      <p:sp>
+        <p:nvSpPr>
+          <p:cNvPr id="110" name="Text 106"/>
+          <p:cNvSpPr txBox="1"/>
+          <p:nvPr/>
+        </p:nvSpPr>
+        <p:spPr>
+          <a:xfrm>
+            <a:off x="22494240" y="8412480"/>
+            <a:ext cx="9692640" cy="457200"/>
+          </a:xfrm>
+          <a:prstGeom prst="rect">
+            <a:avLst/>
+          </a:prstGeom>
+          <a:noFill/>
+          <a:ln/>
+        </p:spPr>
+        <p:txBody>
+          <a:bodyPr wrap="square" lIns="0" tIns="0" rIns="0" bIns="0" rtlCol="0" anchor="t"/>
+          <a:lstStyle/>
+          <a:p>
+            <a:pPr marL="0" indent="0">
+              <a:buNone/>
+            </a:pPr>
+            <a:r>
+              <a:rPr lang="en-US" sz="2400" b="1" dirty="0">
+                <a:solidFill>
+                  <a:schemeClr val="tx2"/>
+                </a:solidFill>
+              </a:rPr>
+              <a:t>What it tells people to change (1994, capital gains fixed)</a:t>
+            </a:r>
+            <a:endParaRPr lang="en-US" sz="2400" dirty="0"/>
+          </a:p>
+        </p:txBody>
+      </p:sp>
+      <p:graphicFrame>
+        <p:nvGraphicFramePr>
+          <p:cNvPr id="111" name="what it asks chart"/>
+          <p:cNvGraphicFramePr/>
+          <p:nvPr>
+            <p:extLst>
+              <p:ext uri="{D42A27DB-BD31-4B8C-83A1-F6EECF244321}">
+                <p14:modId xmlns:p14="http://schemas.microsoft.com/office/powerpoint/2010/main" val="1853051912"/>
+              </p:ext>
+            </p:extLst>
+          </p:nvPr>
+        </p:nvGraphicFramePr>
+        <p:xfrm>
+          <a:off x="22494240" y="8869680"/>
+          <a:ext cx="9692640" cy="1965960"/>
+        </p:xfrm>
+        <a:graphic>
+          <a:graphicData uri="http://schemas.openxmlformats.org/drawingml/2006/chart">
+            <c:chart xmlns:c="http://schemas.openxmlformats.org/drawingml/2006/chart" xmlns:r="http://schemas.openxmlformats.org/officeDocument/2006/relationships" r:id="rId5"/>
+          </a:graphicData>
+        </a:graphic>
+      </p:graphicFrame>
+      <p:sp>
+        <p:nvSpPr>
+          <p:cNvPr id="112" name="be older callout"/>
           <p:cNvSpPr/>
           <p:nvPr/>
         </p:nvSpPr>
         <p:spPr>
           <a:xfrm>
-            <a:off x="16459200" y="15526512"/>
-            <a:ext cx="256032" cy="256032"/>
-          </a:xfrm>
-          <a:prstGeom prst="ellipse">
-            <a:avLst/>
+            <a:off x="22494240" y="10972800"/>
+            <a:ext cx="9692640" cy="1188720"/>
+          </a:xfrm>
+          <a:prstGeom prst="roundRect">
+            <a:avLst>
+              <a:gd name="adj" fmla="val 11538"/>
+            </a:avLst>
           </a:prstGeom>
           <a:solidFill>
-            <a:srgbClr val="5B3FD1"/>
+            <a:schemeClr val="bg1"/>
           </a:solidFill>
           <a:ln w="12700">
             <a:solidFill>
-              <a:srgbClr val="5B3FD1"/>
+              <a:schemeClr val="bg1"/>
             </a:solidFill>
             <a:prstDash val="solid"/>
           </a:ln>
         </p:spPr>
-      </p:sp>
-      <p:sp>
-        <p:nvSpPr>
-          <p:cNvPr id="101" name="Text 98"/>
+        <p:txBody>
+          <a:bodyPr/>
+          <a:lstStyle/>
+          <a:p>
+            <a:endParaRPr lang="en-US"/>
+          </a:p>
+        </p:txBody>
+      </p:sp>
+      <p:sp>
+        <p:nvSpPr>
+          <p:cNvPr id="113" name="Text 108"/>
           <p:cNvSpPr txBox="1"/>
           <p:nvPr/>
         </p:nvSpPr>
         <p:spPr>
           <a:xfrm>
-            <a:off x="16824960" y="15453360"/>
-            <a:ext cx="2377440" cy="411480"/>
+            <a:off x="22768560" y="11064240"/>
+            <a:ext cx="9144000" cy="1005840"/>
           </a:xfrm>
           <a:prstGeom prst="rect">
             <a:avLst/>
@@ -5246,56 +5556,83 @@
           <a:bodyPr wrap="square" lIns="0" tIns="0" rIns="0" bIns="0" rtlCol="0" anchor="ctr"/>
           <a:lstStyle/>
           <a:p>
-            <a:pPr indent="0" marL="0">
+            <a:pPr marL="0" indent="0">
               <a:buNone/>
             </a:pPr>
             <a:r>
-              <a:rPr lang="en-US" sz="1800" dirty="0">
-                <a:solidFill>
-                  <a:schemeClr val="tx2"/>
-                </a:solidFill>
-              </a:rPr>
-              <a:t>2023, $103K bar</a:t>
-            </a:r>
-            <a:endParaRPr lang="en-US" sz="1800" dirty="0"/>
-          </a:p>
-        </p:txBody>
-      </p:sp>
-      <p:sp>
-        <p:nvSpPr>
-          <p:cNvPr id="102" name="Shape 99"/>
+              <a:rPr lang="en-US" sz="2600" b="1" dirty="0">
+                <a:solidFill>
+                  <a:schemeClr val="accent2"/>
+                </a:solidFill>
+              </a:rPr>
+              <a:t>93%</a:t>
+            </a:r>
+            <a:r>
+              <a:rPr lang="en-US" sz="2600" dirty="0">
+                <a:solidFill>
+                  <a:schemeClr val="tx1"/>
+                </a:solidFill>
+              </a:rPr>
+              <a:t> of its advice to denied under-30s in 2023</a:t>
+            </a:r>
+            <a:r>
+              <a:rPr lang="en-US" sz="2600" dirty="0"/>
+              <a:t> amounts to </a:t>
+            </a:r>
+            <a:r>
+              <a:rPr lang="en-US" sz="2600" dirty="0">
+                <a:solidFill>
+                  <a:schemeClr val="tx1"/>
+                </a:solidFill>
+              </a:rPr>
+              <a:t>“be older” (median: be 4</a:t>
+            </a:r>
+            <a:endParaRPr lang="en-US" sz="2600" dirty="0"/>
+          </a:p>
+        </p:txBody>
+      </p:sp>
+      <p:sp>
+        <p:nvSpPr>
+          <p:cNvPr id="114" name="marker 4"/>
           <p:cNvSpPr/>
           <p:nvPr/>
         </p:nvSpPr>
         <p:spPr>
           <a:xfrm>
-            <a:off x="19202400" y="15526512"/>
-            <a:ext cx="256032" cy="256032"/>
+            <a:off x="22494240" y="12573000"/>
+            <a:ext cx="731520" cy="731520"/>
           </a:xfrm>
           <a:prstGeom prst="ellipse">
             <a:avLst/>
           </a:prstGeom>
           <a:solidFill>
-            <a:srgbClr val="B9AEEF"/>
+            <a:schemeClr val="tx2"/>
           </a:solidFill>
           <a:ln w="12700">
             <a:solidFill>
-              <a:srgbClr val="B9AEEF"/>
+              <a:schemeClr val="tx2"/>
             </a:solidFill>
             <a:prstDash val="solid"/>
           </a:ln>
         </p:spPr>
-      </p:sp>
-      <p:sp>
-        <p:nvSpPr>
-          <p:cNvPr id="103" name="Text 100"/>
+        <p:txBody>
+          <a:bodyPr/>
+          <a:lstStyle/>
+          <a:p>
+            <a:endParaRPr lang="en-US"/>
+          </a:p>
+        </p:txBody>
+      </p:sp>
+      <p:sp>
+        <p:nvSpPr>
+          <p:cNvPr id="115" name="Text 110"/>
           <p:cNvSpPr txBox="1"/>
           <p:nvPr/>
         </p:nvSpPr>
         <p:spPr>
           <a:xfrm>
-            <a:off x="19568160" y="15453360"/>
-            <a:ext cx="2377440" cy="411480"/>
+            <a:off x="22494240" y="12573000"/>
+            <a:ext cx="731520" cy="731520"/>
           </a:xfrm>
           <a:prstGeom prst="rect">
             <a:avLst/>
@@ -5307,639 +5644,63 @@
           <a:bodyPr wrap="square" lIns="0" tIns="0" rIns="0" bIns="0" rtlCol="0" anchor="ctr"/>
           <a:lstStyle/>
           <a:p>
-            <a:pPr indent="0" marL="0">
+            <a:pPr marL="0" indent="0" algn="ctr">
               <a:buNone/>
             </a:pPr>
             <a:r>
-              <a:rPr lang="en-US" sz="1800" dirty="0">
+              <a:rPr lang="en-US" sz="3000" b="1" dirty="0">
+                <a:solidFill>
+                  <a:schemeClr val="bg1"/>
+                </a:solidFill>
+              </a:rPr>
+              <a:t>5</a:t>
+            </a:r>
+            <a:endParaRPr lang="en-US" sz="3000" dirty="0"/>
+          </a:p>
+        </p:txBody>
+      </p:sp>
+      <p:sp>
+        <p:nvSpPr>
+          <p:cNvPr id="116" name="Text 111"/>
+          <p:cNvSpPr txBox="1"/>
+          <p:nvPr/>
+        </p:nvSpPr>
+        <p:spPr>
+          <a:xfrm>
+            <a:off x="23454360" y="12527280"/>
+            <a:ext cx="8732520" cy="1371600"/>
+          </a:xfrm>
+          <a:prstGeom prst="rect">
+            <a:avLst/>
+          </a:prstGeom>
+          <a:noFill/>
+          <a:ln/>
+        </p:spPr>
+        <p:txBody>
+          <a:bodyPr wrap="square" lIns="0" tIns="0" rIns="0" bIns="0" rtlCol="0" anchor="t"/>
+          <a:lstStyle/>
+          <a:p>
+            <a:pPr marL="0" indent="0">
+              <a:lnSpc>
+                <a:spcPct val="92000"/>
+              </a:lnSpc>
+              <a:buNone/>
+            </a:pPr>
+            <a:r>
+              <a:rPr lang="en-US" sz="3600" b="1" dirty="0">
                 <a:solidFill>
                   <a:schemeClr val="tx2"/>
                 </a:solidFill>
               </a:rPr>
-              <a:t>2023, $50K bar</a:t>
-            </a:r>
-            <a:endParaRPr lang="en-US" sz="1800" dirty="0"/>
-          </a:p>
-        </p:txBody>
-      </p:sp>
-      <p:sp>
-        <p:nvSpPr>
-          <p:cNvPr id="104" name="Text 101"/>
-          <p:cNvSpPr txBox="1"/>
-          <p:nvPr/>
-        </p:nvSpPr>
-        <p:spPr>
-          <a:xfrm>
-            <a:off x="10972800" y="16184880"/>
-            <a:ext cx="10972800" cy="457200"/>
-          </a:xfrm>
-          <a:prstGeom prst="rect">
-            <a:avLst/>
-          </a:prstGeom>
-          <a:noFill/>
-          <a:ln/>
-        </p:spPr>
-        <p:txBody>
-          <a:bodyPr wrap="square" lIns="0" tIns="0" rIns="0" bIns="0" rtlCol="0" anchor="t"/>
-          <a:lstStyle/>
-          <a:p>
-            <a:pPr indent="0" marL="0">
-              <a:buNone/>
-            </a:pPr>
-            <a:r>
-              <a:rPr lang="en-US" sz="2200" b="1" dirty="0">
-                <a:solidFill>
-                  <a:schemeClr val="tx1"/>
-                </a:solidFill>
-              </a:rPr>
-              <a:t>More effort does not close the gap (2023)</a:t>
-            </a:r>
-            <a:endParaRPr lang="en-US" sz="2200" dirty="0"/>
+              <a:t>1994’s sex and race gaps came from where people start</a:t>
+            </a:r>
+            <a:endParaRPr lang="en-US" sz="3600" dirty="0"/>
           </a:p>
         </p:txBody>
       </p:sp>
       <p:graphicFrame>
         <p:nvGraphicFramePr>
-          <p:cNvPr id="105" name="budget curves chart" descr=""/>
-          <p:cNvGraphicFramePr/>
-          <p:nvPr/>
-        </p:nvGraphicFramePr>
-        <p:xfrm>
-          <a:off x="10972800" y="16642080"/>
-          <a:ext cx="10972800" cy="4023360"/>
-        </p:xfrm>
-        <a:graphic xmlns:a="http://schemas.openxmlformats.org/drawingml/2006/main">
-          <a:graphicData uri="http://schemas.openxmlformats.org/drawingml/2006/chart">
-            <c:chart xmlns:c="http://schemas.openxmlformats.org/drawingml/2006/chart" r:id="rId2"/>
-          </a:graphicData>
-        </a:graphic>
-      </p:graphicFrame>
-      <p:sp>
-        <p:nvSpPr>
-          <p:cNvPr id="106" name="marker 4"/>
-          <p:cNvSpPr/>
-          <p:nvPr/>
-        </p:nvSpPr>
-        <p:spPr>
-          <a:xfrm>
-            <a:off x="22494240" y="3931920"/>
-            <a:ext cx="713232" cy="713232"/>
-          </a:xfrm>
-          <a:prstGeom prst="ellipse">
-            <a:avLst/>
-          </a:prstGeom>
-          <a:solidFill>
-            <a:schemeClr val="tx1"/>
-          </a:solidFill>
-          <a:ln w="12700">
-            <a:solidFill>
-              <a:schemeClr val="tx1"/>
-            </a:solidFill>
-            <a:prstDash val="solid"/>
-          </a:ln>
-        </p:spPr>
-      </p:sp>
-      <p:sp>
-        <p:nvSpPr>
-          <p:cNvPr id="107" name="Text 103"/>
-          <p:cNvSpPr txBox="1"/>
-          <p:nvPr/>
-        </p:nvSpPr>
-        <p:spPr>
-          <a:xfrm>
-            <a:off x="22494240" y="3931920"/>
-            <a:ext cx="713232" cy="713232"/>
-          </a:xfrm>
-          <a:prstGeom prst="rect">
-            <a:avLst/>
-          </a:prstGeom>
-          <a:noFill/>
-          <a:ln/>
-        </p:spPr>
-        <p:txBody>
-          <a:bodyPr wrap="square" lIns="0" tIns="0" rIns="0" bIns="0" rtlCol="0" anchor="ctr"/>
-          <a:lstStyle/>
-          <a:p>
-            <a:pPr algn="ctr" indent="0" marL="0">
-              <a:buNone/>
-            </a:pPr>
-            <a:r>
-              <a:rPr lang="en-US" sz="3000" b="1" dirty="0">
-                <a:solidFill>
-                  <a:schemeClr val="bg1"/>
-                </a:solidFill>
-                <a:latin typeface="+mj-lt" pitchFamily="34" charset="0"/>
-                <a:ea typeface="+mj-lt" pitchFamily="34" charset="-122"/>
-                <a:cs typeface="+mj-lt" pitchFamily="34" charset="-120"/>
-              </a:rPr>
-              <a:t>4</a:t>
-            </a:r>
-            <a:endParaRPr lang="en-US" sz="3000" dirty="0"/>
-          </a:p>
-        </p:txBody>
-      </p:sp>
-      <p:sp>
-        <p:nvSpPr>
-          <p:cNvPr id="108" name="Text 104"/>
-          <p:cNvSpPr txBox="1"/>
-          <p:nvPr/>
-        </p:nvSpPr>
-        <p:spPr>
-          <a:xfrm>
-            <a:off x="23454360" y="3913632"/>
-            <a:ext cx="8732520" cy="1371600"/>
-          </a:xfrm>
-          <a:prstGeom prst="rect">
-            <a:avLst/>
-          </a:prstGeom>
-          <a:noFill/>
-          <a:ln/>
-        </p:spPr>
-        <p:txBody>
-          <a:bodyPr wrap="square" lIns="0" tIns="0" rIns="0" bIns="0" rtlCol="0" anchor="t"/>
-          <a:lstStyle/>
-          <a:p>
-            <a:pPr indent="0" marL="0">
-              <a:lnSpc>
-                <a:spcPct val="95000"/>
-              </a:lnSpc>
-              <a:buNone/>
-            </a:pPr>
-            <a:r>
-              <a:rPr lang="en-US" sz="3800" b="1" dirty="0">
-                <a:solidFill>
-                  <a:schemeClr val="tx1"/>
-                </a:solidFill>
-                <a:latin typeface="+mj-lt" pitchFamily="34" charset="0"/>
-                <a:ea typeface="+mj-lt" pitchFamily="34" charset="-122"/>
-                <a:cs typeface="+mj-lt" pitchFamily="34" charset="-120"/>
-              </a:rPr>
-              <a:t>Off-the-shelf advice is mostly impossible</a:t>
-            </a:r>
-            <a:endParaRPr lang="en-US" sz="3800" dirty="0"/>
-          </a:p>
-        </p:txBody>
-      </p:sp>
-      <p:sp>
-        <p:nvSpPr>
-          <p:cNvPr id="109" name="Text 105"/>
-          <p:cNvSpPr txBox="1"/>
-          <p:nvPr/>
-        </p:nvSpPr>
-        <p:spPr>
-          <a:xfrm>
-            <a:off x="22494240" y="5440680"/>
-            <a:ext cx="3093720" cy="1143000"/>
-          </a:xfrm>
-          <a:prstGeom prst="rect">
-            <a:avLst/>
-          </a:prstGeom>
-          <a:noFill/>
-          <a:ln/>
-        </p:spPr>
-        <p:txBody>
-          <a:bodyPr wrap="square" lIns="0" tIns="0" rIns="0" bIns="0" rtlCol="0" anchor="t"/>
-          <a:lstStyle/>
-          <a:p>
-            <a:pPr indent="0" marL="0">
-              <a:buNone/>
-            </a:pPr>
-            <a:r>
-              <a:rPr lang="en-US" sz="8000" b="1" dirty="0">
-                <a:solidFill>
-                  <a:schemeClr val="accent2"/>
-                </a:solidFill>
-                <a:latin typeface="+mj-lt" pitchFamily="34" charset="0"/>
-                <a:ea typeface="+mj-lt" pitchFamily="34" charset="-122"/>
-                <a:cs typeface="+mj-lt" pitchFamily="34" charset="-120"/>
-              </a:rPr>
-              <a:t>95%</a:t>
-            </a:r>
-            <a:endParaRPr lang="en-US" sz="8000" dirty="0"/>
-          </a:p>
-        </p:txBody>
-      </p:sp>
-      <p:sp>
-        <p:nvSpPr>
-          <p:cNvPr id="110" name="Text 106"/>
-          <p:cNvSpPr txBox="1"/>
-          <p:nvPr/>
-        </p:nvSpPr>
-        <p:spPr>
-          <a:xfrm>
-            <a:off x="22494240" y="6629400"/>
-            <a:ext cx="3093720" cy="914400"/>
-          </a:xfrm>
-          <a:prstGeom prst="rect">
-            <a:avLst/>
-          </a:prstGeom>
-          <a:noFill/>
-          <a:ln/>
-        </p:spPr>
-        <p:txBody>
-          <a:bodyPr wrap="square" lIns="0" tIns="0" rIns="0" bIns="0" rtlCol="0" anchor="t"/>
-          <a:lstStyle/>
-          <a:p>
-            <a:pPr indent="0" marL="0">
-              <a:buNone/>
-            </a:pPr>
-            <a:r>
-              <a:rPr lang="en-US" sz="2000" dirty="0">
-                <a:solidFill>
-                  <a:schemeClr val="tx2"/>
-                </a:solidFill>
-              </a:rPr>
-              <a:t>of its advice breaks a rule (1994)</a:t>
-            </a:r>
-            <a:endParaRPr lang="en-US" sz="2000" dirty="0"/>
-          </a:p>
-        </p:txBody>
-      </p:sp>
-      <p:sp>
-        <p:nvSpPr>
-          <p:cNvPr id="111" name="Text 107"/>
-          <p:cNvSpPr txBox="1"/>
-          <p:nvPr/>
-        </p:nvSpPr>
-        <p:spPr>
-          <a:xfrm>
-            <a:off x="25725120" y="5440680"/>
-            <a:ext cx="3093720" cy="1143000"/>
-          </a:xfrm>
-          <a:prstGeom prst="rect">
-            <a:avLst/>
-          </a:prstGeom>
-          <a:noFill/>
-          <a:ln/>
-        </p:spPr>
-        <p:txBody>
-          <a:bodyPr wrap="square" lIns="0" tIns="0" rIns="0" bIns="0" rtlCol="0" anchor="t"/>
-          <a:lstStyle/>
-          <a:p>
-            <a:pPr indent="0" marL="0">
-              <a:buNone/>
-            </a:pPr>
-            <a:r>
-              <a:rPr lang="en-US" sz="8000" b="1" dirty="0">
-                <a:solidFill>
-                  <a:schemeClr val="accent2"/>
-                </a:solidFill>
-                <a:latin typeface="+mj-lt" pitchFamily="34" charset="0"/>
-                <a:ea typeface="+mj-lt" pitchFamily="34" charset="-122"/>
-                <a:cs typeface="+mj-lt" pitchFamily="34" charset="-120"/>
-              </a:rPr>
-              <a:t>77%</a:t>
-            </a:r>
-            <a:endParaRPr lang="en-US" sz="8000" dirty="0"/>
-          </a:p>
-        </p:txBody>
-      </p:sp>
-      <p:sp>
-        <p:nvSpPr>
-          <p:cNvPr id="112" name="Text 108"/>
-          <p:cNvSpPr txBox="1"/>
-          <p:nvPr/>
-        </p:nvSpPr>
-        <p:spPr>
-          <a:xfrm>
-            <a:off x="25725120" y="6629400"/>
-            <a:ext cx="3093720" cy="914400"/>
-          </a:xfrm>
-          <a:prstGeom prst="rect">
-            <a:avLst/>
-          </a:prstGeom>
-          <a:noFill/>
-          <a:ln/>
-        </p:spPr>
-        <p:txBody>
-          <a:bodyPr wrap="square" lIns="0" tIns="0" rIns="0" bIns="0" rtlCol="0" anchor="t"/>
-          <a:lstStyle/>
-          <a:p>
-            <a:pPr indent="0" marL="0">
-              <a:buNone/>
-            </a:pPr>
-            <a:r>
-              <a:rPr lang="en-US" sz="2000" dirty="0">
-                <a:solidFill>
-                  <a:schemeClr val="tx2"/>
-                </a:solidFill>
-              </a:rPr>
-              <a:t>with capital gains held fixed</a:t>
-            </a:r>
-            <a:endParaRPr lang="en-US" sz="2000" dirty="0"/>
-          </a:p>
-        </p:txBody>
-      </p:sp>
-      <p:sp>
-        <p:nvSpPr>
-          <p:cNvPr id="113" name="Text 109"/>
-          <p:cNvSpPr txBox="1"/>
-          <p:nvPr/>
-        </p:nvSpPr>
-        <p:spPr>
-          <a:xfrm>
-            <a:off x="28956000" y="5440680"/>
-            <a:ext cx="3093720" cy="1143000"/>
-          </a:xfrm>
-          <a:prstGeom prst="rect">
-            <a:avLst/>
-          </a:prstGeom>
-          <a:noFill/>
-          <a:ln/>
-        </p:spPr>
-        <p:txBody>
-          <a:bodyPr wrap="square" lIns="0" tIns="0" rIns="0" bIns="0" rtlCol="0" anchor="t"/>
-          <a:lstStyle/>
-          <a:p>
-            <a:pPr indent="0" marL="0">
-              <a:buNone/>
-            </a:pPr>
-            <a:r>
-              <a:rPr lang="en-US" sz="8000" b="1" dirty="0">
-                <a:solidFill>
-                  <a:schemeClr val="accent2"/>
-                </a:solidFill>
-                <a:latin typeface="+mj-lt" pitchFamily="34" charset="0"/>
-                <a:ea typeface="+mj-lt" pitchFamily="34" charset="-122"/>
-                <a:cs typeface="+mj-lt" pitchFamily="34" charset="-120"/>
-              </a:rPr>
-              <a:t>42%</a:t>
-            </a:r>
-            <a:endParaRPr lang="en-US" sz="8000" dirty="0"/>
-          </a:p>
-        </p:txBody>
-      </p:sp>
-      <p:sp>
-        <p:nvSpPr>
-          <p:cNvPr id="114" name="Text 110"/>
-          <p:cNvSpPr txBox="1"/>
-          <p:nvPr/>
-        </p:nvSpPr>
-        <p:spPr>
-          <a:xfrm>
-            <a:off x="28956000" y="6629400"/>
-            <a:ext cx="3093720" cy="914400"/>
-          </a:xfrm>
-          <a:prstGeom prst="rect">
-            <a:avLst/>
-          </a:prstGeom>
-          <a:noFill/>
-          <a:ln/>
-        </p:spPr>
-        <p:txBody>
-          <a:bodyPr wrap="square" lIns="0" tIns="0" rIns="0" bIns="0" rtlCol="0" anchor="t"/>
-          <a:lstStyle/>
-          <a:p>
-            <a:pPr indent="0" marL="0">
-              <a:buNone/>
-            </a:pPr>
-            <a:r>
-              <a:rPr lang="en-US" sz="2000" dirty="0">
-                <a:solidFill>
-                  <a:schemeClr val="tx2"/>
-                </a:solidFill>
-              </a:rPr>
-              <a:t>in 2023 data</a:t>
-            </a:r>
-            <a:endParaRPr lang="en-US" sz="2000" dirty="0"/>
-          </a:p>
-        </p:txBody>
-      </p:sp>
-      <p:sp>
-        <p:nvSpPr>
-          <p:cNvPr id="115" name="Text 111"/>
-          <p:cNvSpPr txBox="1"/>
-          <p:nvPr/>
-        </p:nvSpPr>
-        <p:spPr>
-          <a:xfrm>
-            <a:off x="22494240" y="7818120"/>
-            <a:ext cx="9692640" cy="411480"/>
-          </a:xfrm>
-          <a:prstGeom prst="rect">
-            <a:avLst/>
-          </a:prstGeom>
-          <a:noFill/>
-          <a:ln/>
-        </p:spPr>
-        <p:txBody>
-          <a:bodyPr wrap="square" lIns="0" tIns="0" rIns="0" bIns="0" rtlCol="0" anchor="t"/>
-          <a:lstStyle/>
-          <a:p>
-            <a:pPr indent="0" marL="0">
-              <a:buNone/>
-            </a:pPr>
-            <a:r>
-              <a:rPr lang="en-US" sz="2000" b="1" dirty="0">
-                <a:solidFill>
-                  <a:schemeClr val="tx1"/>
-                </a:solidFill>
-              </a:rPr>
-              <a:t>What it tells people to change (1994, capital gains fixed)</a:t>
-            </a:r>
-            <a:endParaRPr lang="en-US" sz="2000" dirty="0"/>
-          </a:p>
-        </p:txBody>
-      </p:sp>
-      <p:graphicFrame>
-        <p:nvGraphicFramePr>
-          <p:cNvPr id="116" name="what it asks chart" descr=""/>
-          <p:cNvGraphicFramePr/>
-          <p:nvPr/>
-        </p:nvGraphicFramePr>
-        <p:xfrm>
-          <a:off x="22494240" y="8229600"/>
-          <a:ext cx="9692640" cy="2514600"/>
-        </p:xfrm>
-        <a:graphic xmlns:a="http://schemas.openxmlformats.org/drawingml/2006/main">
-          <a:graphicData uri="http://schemas.openxmlformats.org/drawingml/2006/chart">
-            <c:chart xmlns:c="http://schemas.openxmlformats.org/drawingml/2006/chart" r:id="rId3"/>
-          </a:graphicData>
-        </a:graphic>
-      </p:graphicFrame>
-      <p:sp>
-        <p:nvSpPr>
-          <p:cNvPr id="117" name="be older callout"/>
-          <p:cNvSpPr/>
-          <p:nvPr/>
-        </p:nvSpPr>
-        <p:spPr>
-          <a:xfrm>
-            <a:off x="22494240" y="10881360"/>
-            <a:ext cx="9692640" cy="1097280"/>
-          </a:xfrm>
-          <a:prstGeom prst="roundRect">
-            <a:avLst>
-              <a:gd name="adj" fmla="val 12500"/>
-            </a:avLst>
-          </a:prstGeom>
-          <a:solidFill>
-            <a:schemeClr val="bg2"/>
-          </a:solidFill>
-          <a:ln w="12700">
-            <a:solidFill>
-              <a:schemeClr val="bg2"/>
-            </a:solidFill>
-            <a:prstDash val="solid"/>
-          </a:ln>
-        </p:spPr>
-      </p:sp>
-      <p:sp>
-        <p:nvSpPr>
-          <p:cNvPr id="118" name="Text 113"/>
-          <p:cNvSpPr txBox="1"/>
-          <p:nvPr/>
-        </p:nvSpPr>
-        <p:spPr>
-          <a:xfrm>
-            <a:off x="22768560" y="10927080"/>
-            <a:ext cx="9144000" cy="1005840"/>
-          </a:xfrm>
-          <a:prstGeom prst="rect">
-            <a:avLst/>
-          </a:prstGeom>
-          <a:noFill/>
-          <a:ln/>
-        </p:spPr>
-        <p:txBody>
-          <a:bodyPr wrap="square" lIns="0" tIns="0" rIns="0" bIns="0" rtlCol="0" anchor="ctr"/>
-          <a:lstStyle/>
-          <a:p>
-            <a:pPr indent="0" marL="0">
-              <a:buNone/>
-            </a:pPr>
-            <a:r>
-              <a:rPr lang="en-US" sz="2200" b="1" dirty="0">
-                <a:solidFill>
-                  <a:schemeClr val="accent5"/>
-                </a:solidFill>
-              </a:rPr>
-              <a:t>93%</a:t>
-            </a:r>
-            <a:pPr indent="0" marL="0">
-              <a:buNone/>
-            </a:pPr>
-            <a:r>
-              <a:rPr lang="en-US" sz="2200" dirty="0">
-                <a:solidFill>
-                  <a:schemeClr val="tx1"/>
-                </a:solidFill>
-              </a:rPr>
-              <a:t> of its advice to denied under-30s in 2023 amounts to “be older” (median: be 48).</a:t>
-            </a:r>
-            <a:endParaRPr lang="en-US" sz="2200" dirty="0"/>
-          </a:p>
-        </p:txBody>
-      </p:sp>
-      <p:sp>
-        <p:nvSpPr>
-          <p:cNvPr id="119" name="marker 5"/>
-          <p:cNvSpPr/>
-          <p:nvPr/>
-        </p:nvSpPr>
-        <p:spPr>
-          <a:xfrm>
-            <a:off x="22494240" y="12344400"/>
-            <a:ext cx="713232" cy="713232"/>
-          </a:xfrm>
-          <a:prstGeom prst="ellipse">
-            <a:avLst/>
-          </a:prstGeom>
-          <a:solidFill>
-            <a:schemeClr val="tx1"/>
-          </a:solidFill>
-          <a:ln w="12700">
-            <a:solidFill>
-              <a:schemeClr val="tx1"/>
-            </a:solidFill>
-            <a:prstDash val="solid"/>
-          </a:ln>
-        </p:spPr>
-      </p:sp>
-      <p:sp>
-        <p:nvSpPr>
-          <p:cNvPr id="120" name="Text 115"/>
-          <p:cNvSpPr txBox="1"/>
-          <p:nvPr/>
-        </p:nvSpPr>
-        <p:spPr>
-          <a:xfrm>
-            <a:off x="22494240" y="12344400"/>
-            <a:ext cx="713232" cy="713232"/>
-          </a:xfrm>
-          <a:prstGeom prst="rect">
-            <a:avLst/>
-          </a:prstGeom>
-          <a:noFill/>
-          <a:ln/>
-        </p:spPr>
-        <p:txBody>
-          <a:bodyPr wrap="square" lIns="0" tIns="0" rIns="0" bIns="0" rtlCol="0" anchor="ctr"/>
-          <a:lstStyle/>
-          <a:p>
-            <a:pPr algn="ctr" indent="0" marL="0">
-              <a:buNone/>
-            </a:pPr>
-            <a:r>
-              <a:rPr lang="en-US" sz="3000" b="1" dirty="0">
-                <a:solidFill>
-                  <a:schemeClr val="bg1"/>
-                </a:solidFill>
-                <a:latin typeface="+mj-lt" pitchFamily="34" charset="0"/>
-                <a:ea typeface="+mj-lt" pitchFamily="34" charset="-122"/>
-                <a:cs typeface="+mj-lt" pitchFamily="34" charset="-120"/>
-              </a:rPr>
-              <a:t>5</a:t>
-            </a:r>
-            <a:endParaRPr lang="en-US" sz="3000" dirty="0"/>
-          </a:p>
-        </p:txBody>
-      </p:sp>
-      <p:sp>
-        <p:nvSpPr>
-          <p:cNvPr id="121" name="Text 116"/>
-          <p:cNvSpPr txBox="1"/>
-          <p:nvPr/>
-        </p:nvSpPr>
-        <p:spPr>
-          <a:xfrm>
-            <a:off x="23454360" y="12326112"/>
-            <a:ext cx="8732520" cy="1371600"/>
-          </a:xfrm>
-          <a:prstGeom prst="rect">
-            <a:avLst/>
-          </a:prstGeom>
-          <a:noFill/>
-          <a:ln/>
-        </p:spPr>
-        <p:txBody>
-          <a:bodyPr wrap="square" lIns="0" tIns="0" rIns="0" bIns="0" rtlCol="0" anchor="t"/>
-          <a:lstStyle/>
-          <a:p>
-            <a:pPr indent="0" marL="0">
-              <a:lnSpc>
-                <a:spcPct val="95000"/>
-              </a:lnSpc>
-              <a:buNone/>
-            </a:pPr>
-            <a:r>
-              <a:rPr lang="en-US" sz="3800" b="1" dirty="0">
-                <a:solidFill>
-                  <a:schemeClr val="tx1"/>
-                </a:solidFill>
-                <a:latin typeface="+mj-lt" pitchFamily="34" charset="0"/>
-                <a:ea typeface="+mj-lt" pitchFamily="34" charset="-122"/>
-                <a:cs typeface="+mj-lt" pitchFamily="34" charset="-120"/>
-              </a:rPr>
-              <a:t>1994’s sex and race gaps came from where people start</a:t>
-            </a:r>
-            <a:endParaRPr lang="en-US" sz="3800" dirty="0"/>
-          </a:p>
-        </p:txBody>
-      </p:sp>
-      <p:graphicFrame>
-        <p:nvGraphicFramePr>
-          <p:cNvPr id="2" name="1994 gaps table"/>
+          <p:cNvPr id="117" name="1994 gaps table"/>
           <p:cNvGraphicFramePr>
             <a:graphicFrameLocks noGrp="1"/>
           </p:cNvGraphicFramePr>
@@ -5952,31 +5713,49 @@
           </p:nvPr>
         </p:nvGraphicFramePr>
         <p:xfrm>
-          <a:off x="22494240" y="13853160"/>
-          <a:ext cx="9692640" cy="914400"/>
+          <a:off x="22494240" y="14081760"/>
+          <a:ext cx="8778240" cy="1508760"/>
         </p:xfrm>
         <a:graphic>
           <a:graphicData uri="http://schemas.openxmlformats.org/drawingml/2006/table">
             <a:tbl>
               <a:tblPr/>
               <a:tblGrid>
-                <a:gridCol w="3291840"/>
-                <a:gridCol w="2377440"/>
-                <a:gridCol w="4023360"/>
+                <a:gridCol w="3657600">
+                  <a:extLst>
+                    <a:ext uri="{9D8B030D-6E8A-4147-A177-3AD203B41FA5}">
+                      <a16:colId xmlns:a16="http://schemas.microsoft.com/office/drawing/2014/main" val="20000"/>
+                    </a:ext>
+                  </a:extLst>
+                </a:gridCol>
+                <a:gridCol w="2331720">
+                  <a:extLst>
+                    <a:ext uri="{9D8B030D-6E8A-4147-A177-3AD203B41FA5}">
+                      <a16:colId xmlns:a16="http://schemas.microsoft.com/office/drawing/2014/main" val="20001"/>
+                    </a:ext>
+                  </a:extLst>
+                </a:gridCol>
+                <a:gridCol w="2788920">
+                  <a:extLst>
+                    <a:ext uri="{9D8B030D-6E8A-4147-A177-3AD203B41FA5}">
+                      <a16:colId xmlns:a16="http://schemas.microsoft.com/office/drawing/2014/main" val="20002"/>
+                    </a:ext>
+                  </a:extLst>
+                </a:gridCol>
               </a:tblGrid>
-              <a:tr h="457200">
+              <a:tr h="502920">
                 <a:tc>
                   <a:txBody>
                     <a:bodyPr/>
                     <a:lstStyle/>
                     <a:p>
-                      <a:pPr indent="0" marL="0">
+                      <a:pPr marL="0" indent="0">
                         <a:buNone/>
                       </a:pPr>
                       <a:r>
-                        <a:rPr lang="en-US" sz="2200" b="1" dirty="0">
+                        <a:rPr lang="en-US" sz="2400" b="1" dirty="0">
                           <a:solidFill>
-                            <a:srgbClr val="5A6472"/>
+                            <a:srgbClr val="666666"/>
                           </a:solidFill>
                           <a:latin typeface="Calibri" pitchFamily="34" charset="0"/>
                           <a:ea typeface="Calibri" pitchFamily="34" charset="-122"/>
@@ -5984,17 +5763,17 @@
                         </a:rPr>
                         <a:t>1994</a:t>
                       </a:r>
-                      <a:endParaRPr lang="en-US" sz="2200" dirty="0">
+                      <a:endParaRPr lang="en-US" sz="2400" dirty="0">
                         <a:latin typeface="Calibri" charset="0"/>
                         <a:ea typeface="Calibri" charset="0"/>
                         <a:cs typeface="Calibri" charset="0"/>
                       </a:endParaRPr>
                     </a:p>
                   </a:txBody>
-                  <a:tcPr marL="91440" marR="91440" marT="45720" marB="45720">
+                  <a:tcPr marL="109728" marR="109728">
                     <a:lnL w="12700" cap="flat" cmpd="sng" algn="ctr">
                       <a:solidFill>
-                        <a:srgbClr val="D5DAE1"/>
+                        <a:srgbClr val="D3D7DE"/>
                       </a:solidFill>
                       <a:prstDash val="solid"/>
                       <a:round/>
@@ -6003,7 +5782,7 @@
                     </a:lnL>
                     <a:lnR w="12700" cap="flat" cmpd="sng" algn="ctr">
                       <a:solidFill>
-                        <a:srgbClr val="D5DAE1"/>
+                        <a:srgbClr val="D3D7DE"/>
                       </a:solidFill>
                       <a:prstDash val="solid"/>
                       <a:round/>
@@ -6012,7 +5791,7 @@
                     </a:lnR>
                     <a:lnT w="12700" cap="flat" cmpd="sng" algn="ctr">
                       <a:solidFill>
-                        <a:srgbClr val="D5DAE1"/>
+                        <a:srgbClr val="D3D7DE"/>
                       </a:solidFill>
                       <a:prstDash val="solid"/>
                       <a:round/>
@@ -6021,13 +5800,16 @@
                     </a:lnT>
                     <a:lnB w="12700" cap="flat" cmpd="sng" algn="ctr">
                       <a:solidFill>
-                        <a:srgbClr val="D5DAE1"/>
+                        <a:srgbClr val="D3D7DE"/>
                       </a:solidFill>
                       <a:prstDash val="solid"/>
                       <a:round/>
                       <a:headEnd type="none" w="med" len="med"/>
                       <a:tailEnd type="none" w="med" len="med"/>
                     </a:lnB>
+                    <a:solidFill>
+                      <a:srgbClr val="FFFFFF"/>
+                    </a:solidFill>
                   </a:tcPr>
                 </a:tc>
                 <a:tc>
@@ -6035,13 +5817,13 @@
                     <a:bodyPr/>
                     <a:lstStyle/>
                     <a:p>
-                      <a:pPr algn="r" indent="0" marL="0">
+                      <a:pPr marL="0" indent="0" algn="r">
                         <a:buNone/>
                       </a:pPr>
                       <a:r>
-                        <a:rPr lang="en-US" sz="2200" b="1" dirty="0">
+                        <a:rPr lang="en-US" sz="2400" b="1" dirty="0">
                           <a:solidFill>
-                            <a:srgbClr val="5A6472"/>
+                            <a:srgbClr val="666666"/>
                           </a:solidFill>
                           <a:latin typeface="Calibri" pitchFamily="34" charset="0"/>
                           <a:ea typeface="Calibri" pitchFamily="34" charset="-122"/>
@@ -6049,17 +5831,17 @@
                         </a:rPr>
                         <a:t>Raw gap</a:t>
                       </a:r>
-                      <a:endParaRPr lang="en-US" sz="2200" dirty="0">
+                      <a:endParaRPr lang="en-US" sz="2400" dirty="0">
                         <a:latin typeface="Calibri" charset="0"/>
                         <a:ea typeface="Calibri" charset="0"/>
                         <a:cs typeface="Calibri" charset="0"/>
                       </a:endParaRPr>
                     </a:p>
                   </a:txBody>
-                  <a:tcPr marL="91440" marR="91440" marT="45720" marB="45720">
+                  <a:tcPr marL="109728" marR="109728">
                     <a:lnL w="12700" cap="flat" cmpd="sng" algn="ctr">
                       <a:solidFill>
-                        <a:srgbClr val="D5DAE1"/>
+                        <a:srgbClr val="D3D7DE"/>
                       </a:solidFill>
                       <a:prstDash val="solid"/>
                       <a:round/>
@@ -6068,7 +5850,7 @@
                     </a:lnL>
                     <a:lnR w="12700" cap="flat" cmpd="sng" algn="ctr">
                       <a:solidFill>
-                        <a:srgbClr val="D5DAE1"/>
+                        <a:srgbClr val="D3D7DE"/>
                       </a:solidFill>
                       <a:prstDash val="solid"/>
                       <a:round/>
@@ -6077,7 +5859,7 @@
                     </a:lnR>
                     <a:lnT w="12700" cap="flat" cmpd="sng" algn="ctr">
                       <a:solidFill>
-                        <a:srgbClr val="D5DAE1"/>
+                        <a:srgbClr val="D3D7DE"/>
                       </a:solidFill>
                       <a:prstDash val="solid"/>
                       <a:round/>
@@ -6086,13 +5868,16 @@
                     </a:lnT>
                     <a:lnB w="12700" cap="flat" cmpd="sng" algn="ctr">
                       <a:solidFill>
-                        <a:srgbClr val="D5DAE1"/>
+                        <a:srgbClr val="D3D7DE"/>
                       </a:solidFill>
                       <a:prstDash val="solid"/>
                       <a:round/>
                       <a:headEnd type="none" w="med" len="med"/>
                       <a:tailEnd type="none" w="med" len="med"/>
                     </a:lnB>
+                    <a:solidFill>
+                      <a:srgbClr val="FFFFFF"/>
+                    </a:solidFill>
                   </a:tcPr>
                 </a:tc>
                 <a:tc>
@@ -6100,31 +5885,31 @@
                     <a:bodyPr/>
                     <a:lstStyle/>
                     <a:p>
-                      <a:pPr algn="r" indent="0" marL="0">
+                      <a:pPr marL="0" indent="0" algn="r">
                         <a:buNone/>
                       </a:pPr>
                       <a:r>
-                        <a:rPr lang="en-US" sz="2200" b="1" dirty="0">
+                        <a:rPr lang="en-US" sz="2400" b="1" dirty="0">
                           <a:solidFill>
-                            <a:srgbClr val="5A6472"/>
+                            <a:srgbClr val="666666"/>
                           </a:solidFill>
                           <a:latin typeface="Calibri" pitchFamily="34" charset="0"/>
                           <a:ea typeface="Calibri" pitchFamily="34" charset="-122"/>
                           <a:cs typeface="Calibri" pitchFamily="34" charset="-120"/>
                         </a:rPr>
-                        <a:t>Same starting distance</a:t>
+                        <a:t>Same start</a:t>
                       </a:r>
-                      <a:endParaRPr lang="en-US" sz="2200" dirty="0">
+                      <a:endParaRPr lang="en-US" sz="2400" dirty="0">
                         <a:latin typeface="Calibri" charset="0"/>
                         <a:ea typeface="Calibri" charset="0"/>
                         <a:cs typeface="Calibri" charset="0"/>
                       </a:endParaRPr>
                     </a:p>
                   </a:txBody>
-                  <a:tcPr marL="91440" marR="91440" marT="45720" marB="45720">
+                  <a:tcPr marL="109728" marR="109728">
                     <a:lnL w="12700" cap="flat" cmpd="sng" algn="ctr">
                       <a:solidFill>
-                        <a:srgbClr val="D5DAE1"/>
+                        <a:srgbClr val="D3D7DE"/>
                       </a:solidFill>
                       <a:prstDash val="solid"/>
                       <a:round/>
@@ -6133,7 +5918,7 @@
                     </a:lnL>
                     <a:lnR w="12700" cap="flat" cmpd="sng" algn="ctr">
                       <a:solidFill>
-                        <a:srgbClr val="D5DAE1"/>
+                        <a:srgbClr val="D3D7DE"/>
                       </a:solidFill>
                       <a:prstDash val="solid"/>
                       <a:round/>
@@ -6142,7 +5927,7 @@
                     </a:lnR>
                     <a:lnT w="12700" cap="flat" cmpd="sng" algn="ctr">
                       <a:solidFill>
-                        <a:srgbClr val="D5DAE1"/>
+                        <a:srgbClr val="D3D7DE"/>
                       </a:solidFill>
                       <a:prstDash val="solid"/>
                       <a:round/>
@@ -6151,29 +5936,37 @@
                     </a:lnT>
                     <a:lnB w="12700" cap="flat" cmpd="sng" algn="ctr">
                       <a:solidFill>
-                        <a:srgbClr val="D5DAE1"/>
+                        <a:srgbClr val="D3D7DE"/>
                       </a:solidFill>
                       <a:prstDash val="solid"/>
                       <a:round/>
                       <a:headEnd type="none" w="med" len="med"/>
                       <a:tailEnd type="none" w="med" len="med"/>
                     </a:lnB>
+                    <a:solidFill>
+                      <a:srgbClr val="FFFFFF"/>
+                    </a:solidFill>
                   </a:tcPr>
                 </a:tc>
+                <a:extLst>
+                  <a:ext uri="{0D108BD9-81ED-4DB2-BD59-A6C34878D82A}">
+                    <a16:rowId xmlns:a16="http://schemas.microsoft.com/office/drawing/2014/main" val="10000"/>
+                  </a:ext>
+                </a:extLst>
               </a:tr>
-              <a:tr h="457200">
+              <a:tr h="502920">
                 <a:tc>
                   <a:txBody>
                     <a:bodyPr/>
                     <a:lstStyle/>
                     <a:p>
-                      <a:pPr indent="0" marL="0">
+                      <a:pPr marL="0" indent="0">
                         <a:buNone/>
                       </a:pPr>
                       <a:r>
-                        <a:rPr lang="en-US" sz="2200" dirty="0">
+                        <a:rPr lang="en-US" sz="2400" dirty="0">
                           <a:solidFill>
-                            <a:srgbClr val="1B2430"/>
+                            <a:srgbClr val="262626"/>
                           </a:solidFill>
                           <a:latin typeface="Calibri" pitchFamily="34" charset="0"/>
                           <a:ea typeface="Calibri" pitchFamily="34" charset="-122"/>
@@ -6181,17 +5974,17 @@
                         </a:rPr>
                         <a:t>Women vs men</a:t>
                       </a:r>
-                      <a:endParaRPr lang="en-US" sz="2200" dirty="0">
+                      <a:endParaRPr lang="en-US" sz="2400" dirty="0">
                         <a:latin typeface="Calibri" charset="0"/>
                         <a:ea typeface="Calibri" charset="0"/>
                         <a:cs typeface="Calibri" charset="0"/>
                       </a:endParaRPr>
                     </a:p>
                   </a:txBody>
-                  <a:tcPr marL="91440" marR="91440" marT="45720" marB="45720">
+                  <a:tcPr marL="109728" marR="109728">
                     <a:lnL w="12700" cap="flat" cmpd="sng" algn="ctr">
                       <a:solidFill>
-                        <a:srgbClr val="D5DAE1"/>
+                        <a:srgbClr val="D3D7DE"/>
                       </a:solidFill>
                       <a:prstDash val="solid"/>
                       <a:round/>
@@ -6200,7 +5993,7 @@
                     </a:lnL>
                     <a:lnR w="12700" cap="flat" cmpd="sng" algn="ctr">
                       <a:solidFill>
-                        <a:srgbClr val="D5DAE1"/>
+                        <a:srgbClr val="D3D7DE"/>
                       </a:solidFill>
                       <a:prstDash val="solid"/>
                       <a:round/>
@@ -6209,7 +6002,7 @@
                     </a:lnR>
                     <a:lnT w="12700" cap="flat" cmpd="sng" algn="ctr">
                       <a:solidFill>
-                        <a:srgbClr val="D5DAE1"/>
+                        <a:srgbClr val="D3D7DE"/>
                       </a:solidFill>
                       <a:prstDash val="solid"/>
                       <a:round/>
@@ -6218,13 +6011,16 @@
                     </a:lnT>
                     <a:lnB w="12700" cap="flat" cmpd="sng" algn="ctr">
                       <a:solidFill>
-                        <a:srgbClr val="D5DAE1"/>
+                        <a:srgbClr val="D3D7DE"/>
                       </a:solidFill>
                       <a:prstDash val="solid"/>
                       <a:round/>
                       <a:headEnd type="none" w="med" len="med"/>
                       <a:tailEnd type="none" w="med" len="med"/>
                     </a:lnB>
+                    <a:solidFill>
+                      <a:srgbClr val="FFFFFF"/>
+                    </a:solidFill>
                   </a:tcPr>
                 </a:tc>
                 <a:tc>
@@ -6232,13 +6028,13 @@
                     <a:bodyPr/>
                     <a:lstStyle/>
                     <a:p>
-                      <a:pPr algn="r" indent="0" marL="0">
+                      <a:pPr marL="0" indent="0" algn="r">
                         <a:buNone/>
                       </a:pPr>
                       <a:r>
-                        <a:rPr lang="en-US" sz="2200" dirty="0">
+                        <a:rPr lang="en-US" sz="2400" b="1" dirty="0">
                           <a:solidFill>
-                            <a:srgbClr val="1B2430"/>
+                            <a:srgbClr val="262626"/>
                           </a:solidFill>
                           <a:latin typeface="Calibri" pitchFamily="34" charset="0"/>
                           <a:ea typeface="Calibri" pitchFamily="34" charset="-122"/>
@@ -6246,17 +6042,17 @@
                         </a:rPr>
                         <a:t>−19 pp*</a:t>
                       </a:r>
-                      <a:endParaRPr lang="en-US" sz="2200" dirty="0">
+                      <a:endParaRPr lang="en-US" sz="2400" dirty="0">
                         <a:latin typeface="Calibri" charset="0"/>
                         <a:ea typeface="Calibri" charset="0"/>
                         <a:cs typeface="Calibri" charset="0"/>
                       </a:endParaRPr>
                     </a:p>
                   </a:txBody>
-                  <a:tcPr marL="91440" marR="91440" marT="45720" marB="45720">
+                  <a:tcPr marL="109728" marR="109728">
                     <a:lnL w="12700" cap="flat" cmpd="sng" algn="ctr">
                       <a:solidFill>
-                        <a:srgbClr val="D5DAE1"/>
+                        <a:srgbClr val="D3D7DE"/>
                       </a:solidFill>
                       <a:prstDash val="solid"/>
                       <a:round/>
@@ -6265,7 +6061,7 @@
                     </a:lnL>
                     <a:lnR w="12700" cap="flat" cmpd="sng" algn="ctr">
                       <a:solidFill>
-                        <a:srgbClr val="D5DAE1"/>
+                        <a:srgbClr val="D3D7DE"/>
                       </a:solidFill>
                       <a:prstDash val="solid"/>
                       <a:round/>
@@ -6274,7 +6070,7 @@
                     </a:lnR>
                     <a:lnT w="12700" cap="flat" cmpd="sng" algn="ctr">
                       <a:solidFill>
-                        <a:srgbClr val="D5DAE1"/>
+                        <a:srgbClr val="D3D7DE"/>
                       </a:solidFill>
                       <a:prstDash val="solid"/>
                       <a:round/>
@@ -6283,13 +6079,16 @@
                     </a:lnT>
                     <a:lnB w="12700" cap="flat" cmpd="sng" algn="ctr">
                       <a:solidFill>
-                        <a:srgbClr val="D5DAE1"/>
+                        <a:srgbClr val="D3D7DE"/>
                       </a:solidFill>
                       <a:prstDash val="solid"/>
                       <a:round/>
                       <a:headEnd type="none" w="med" len="med"/>
                       <a:tailEnd type="none" w="med" len="med"/>
                     </a:lnB>
+                    <a:solidFill>
+                      <a:srgbClr val="FFFFFF"/>
+                    </a:solidFill>
                   </a:tcPr>
                 </a:tc>
                 <a:tc>
@@ -6297,13 +6096,13 @@
                     <a:bodyPr/>
                     <a:lstStyle/>
                     <a:p>
-                      <a:pPr algn="r" indent="0" marL="0">
+                      <a:pPr marL="0" indent="0" algn="r">
                         <a:buNone/>
                       </a:pPr>
                       <a:r>
-                        <a:rPr lang="en-US" sz="2200" dirty="0">
+                        <a:rPr lang="en-US" sz="2400" dirty="0">
                           <a:solidFill>
-                            <a:srgbClr val="1B2430"/>
+                            <a:srgbClr val="262626"/>
                           </a:solidFill>
                           <a:latin typeface="Calibri" pitchFamily="34" charset="0"/>
                           <a:ea typeface="Calibri" pitchFamily="34" charset="-122"/>
@@ -6311,17 +6110,17 @@
                         </a:rPr>
                         <a:t>+1 pp</a:t>
                       </a:r>
-                      <a:endParaRPr lang="en-US" sz="2200" dirty="0">
+                      <a:endParaRPr lang="en-US" sz="2400" dirty="0">
                         <a:latin typeface="Calibri" charset="0"/>
                         <a:ea typeface="Calibri" charset="0"/>
                         <a:cs typeface="Calibri" charset="0"/>
                       </a:endParaRPr>
                     </a:p>
                   </a:txBody>
-                  <a:tcPr marL="91440" marR="91440" marT="45720" marB="45720">
+                  <a:tcPr marL="109728" marR="109728">
                     <a:lnL w="12700" cap="flat" cmpd="sng" algn="ctr">
                       <a:solidFill>
-                        <a:srgbClr val="D5DAE1"/>
+                        <a:srgbClr val="D3D7DE"/>
                       </a:solidFill>
                       <a:prstDash val="solid"/>
                       <a:round/>
@@ -6330,7 +6129,7 @@
                     </a:lnL>
                     <a:lnR w="12700" cap="flat" cmpd="sng" algn="ctr">
                       <a:solidFill>
-                        <a:srgbClr val="D5DAE1"/>
+                        <a:srgbClr val="D3D7DE"/>
                       </a:solidFill>
                       <a:prstDash val="solid"/>
                       <a:round/>
@@ -6339,7 +6138,7 @@
                     </a:lnR>
                     <a:lnT w="12700" cap="flat" cmpd="sng" algn="ctr">
                       <a:solidFill>
-                        <a:srgbClr val="D5DAE1"/>
+                        <a:srgbClr val="D3D7DE"/>
                       </a:solidFill>
                       <a:prstDash val="solid"/>
                       <a:round/>
@@ -6348,29 +6147,37 @@
                     </a:lnT>
                     <a:lnB w="12700" cap="flat" cmpd="sng" algn="ctr">
                       <a:solidFill>
-                        <a:srgbClr val="D5DAE1"/>
+                        <a:srgbClr val="D3D7DE"/>
                       </a:solidFill>
                       <a:prstDash val="solid"/>
                       <a:round/>
                       <a:headEnd type="none" w="med" len="med"/>
                       <a:tailEnd type="none" w="med" len="med"/>
                     </a:lnB>
+                    <a:solidFill>
+                      <a:srgbClr val="FFFFFF"/>
+                    </a:solidFill>
                   </a:tcPr>
                 </a:tc>
+                <a:extLst>
+                  <a:ext uri="{0D108BD9-81ED-4DB2-BD59-A6C34878D82A}">
+                    <a16:rowId xmlns:a16="http://schemas.microsoft.com/office/drawing/2014/main" val="10001"/>
+                  </a:ext>
+                </a:extLst>
               </a:tr>
-              <a:tr h="457200">
+              <a:tr h="502920">
                 <a:tc>
                   <a:txBody>
                     <a:bodyPr/>
                     <a:lstStyle/>
                     <a:p>
-                      <a:pPr indent="0" marL="0">
+                      <a:pPr marL="0" indent="0">
                         <a:buNone/>
                       </a:pPr>
                       <a:r>
-                        <a:rPr lang="en-US" sz="2200" dirty="0">
+                        <a:rPr lang="en-US" sz="2400" dirty="0">
                           <a:solidFill>
-                            <a:srgbClr val="1B2430"/>
+                            <a:srgbClr val="262626"/>
                           </a:solidFill>
                           <a:latin typeface="Calibri" pitchFamily="34" charset="0"/>
                           <a:ea typeface="Calibri" pitchFamily="34" charset="-122"/>
@@ -6378,17 +6185,17 @@
                         </a:rPr>
                         <a:t>Black vs White</a:t>
                       </a:r>
-                      <a:endParaRPr lang="en-US" sz="2200" dirty="0">
+                      <a:endParaRPr lang="en-US" sz="2400" dirty="0">
                         <a:latin typeface="Calibri" charset="0"/>
                         <a:ea typeface="Calibri" charset="0"/>
                         <a:cs typeface="Calibri" charset="0"/>
                       </a:endParaRPr>
                     </a:p>
                   </a:txBody>
-                  <a:tcPr marL="91440" marR="91440" marT="45720" marB="45720">
+                  <a:tcPr marL="109728" marR="109728">
                     <a:lnL w="12700" cap="flat" cmpd="sng" algn="ctr">
                       <a:solidFill>
-                        <a:srgbClr val="D5DAE1"/>
+                        <a:srgbClr val="D3D7DE"/>
                       </a:solidFill>
                       <a:prstDash val="solid"/>
                       <a:round/>
@@ -6397,7 +6204,7 @@
                     </a:lnL>
                     <a:lnR w="12700" cap="flat" cmpd="sng" algn="ctr">
                       <a:solidFill>
-                        <a:srgbClr val="D5DAE1"/>
+                        <a:srgbClr val="D3D7DE"/>
                       </a:solidFill>
                       <a:prstDash val="solid"/>
                       <a:round/>
@@ -6406,7 +6213,7 @@
                     </a:lnR>
                     <a:lnT w="12700" cap="flat" cmpd="sng" algn="ctr">
                       <a:solidFill>
-                        <a:srgbClr val="D5DAE1"/>
+                        <a:srgbClr val="D3D7DE"/>
                       </a:solidFill>
                       <a:prstDash val="solid"/>
                       <a:round/>
@@ -6415,13 +6222,16 @@
                     </a:lnT>
                     <a:lnB w="12700" cap="flat" cmpd="sng" algn="ctr">
                       <a:solidFill>
-                        <a:srgbClr val="D5DAE1"/>
+                        <a:srgbClr val="D3D7DE"/>
                       </a:solidFill>
                       <a:prstDash val="solid"/>
                       <a:round/>
                       <a:headEnd type="none" w="med" len="med"/>
                       <a:tailEnd type="none" w="med" len="med"/>
                     </a:lnB>
+                    <a:solidFill>
+                      <a:srgbClr val="FFFFFF"/>
+                    </a:solidFill>
                   </a:tcPr>
                 </a:tc>
                 <a:tc>
@@ -6429,13 +6239,13 @@
                     <a:bodyPr/>
                     <a:lstStyle/>
                     <a:p>
-                      <a:pPr algn="r" indent="0" marL="0">
+                      <a:pPr marL="0" indent="0" algn="r">
                         <a:buNone/>
                       </a:pPr>
                       <a:r>
-                        <a:rPr lang="en-US" sz="2200" dirty="0">
+                        <a:rPr lang="en-US" sz="2400" b="1" dirty="0">
                           <a:solidFill>
-                            <a:srgbClr val="1B2430"/>
+                            <a:srgbClr val="262626"/>
                           </a:solidFill>
                           <a:latin typeface="Calibri" pitchFamily="34" charset="0"/>
                           <a:ea typeface="Calibri" pitchFamily="34" charset="-122"/>
@@ -6443,17 +6253,17 @@
                         </a:rPr>
                         <a:t>−21 pp*</a:t>
                       </a:r>
-                      <a:endParaRPr lang="en-US" sz="2200" dirty="0">
+                      <a:endParaRPr lang="en-US" sz="2400" dirty="0">
                         <a:latin typeface="Calibri" charset="0"/>
                         <a:ea typeface="Calibri" charset="0"/>
                         <a:cs typeface="Calibri" charset="0"/>
                       </a:endParaRPr>
                     </a:p>
                   </a:txBody>
-                  <a:tcPr marL="91440" marR="91440" marT="45720" marB="45720">
+                  <a:tcPr marL="109728" marR="109728">
                     <a:lnL w="12700" cap="flat" cmpd="sng" algn="ctr">
                       <a:solidFill>
-                        <a:srgbClr val="D5DAE1"/>
+                        <a:srgbClr val="D3D7DE"/>
                       </a:solidFill>
                       <a:prstDash val="solid"/>
                       <a:round/>
@@ -6462,7 +6272,7 @@
                     </a:lnL>
                     <a:lnR w="12700" cap="flat" cmpd="sng" algn="ctr">
                       <a:solidFill>
-                        <a:srgbClr val="D5DAE1"/>
+                        <a:srgbClr val="D3D7DE"/>
                       </a:solidFill>
                       <a:prstDash val="solid"/>
                       <a:round/>
@@ -6471,7 +6281,7 @@
                     </a:lnR>
                     <a:lnT w="12700" cap="flat" cmpd="sng" algn="ctr">
                       <a:solidFill>
-                        <a:srgbClr val="D5DAE1"/>
+                        <a:srgbClr val="D3D7DE"/>
                       </a:solidFill>
                       <a:prstDash val="solid"/>
                       <a:round/>
@@ -6480,13 +6290,16 @@
                     </a:lnT>
                     <a:lnB w="12700" cap="flat" cmpd="sng" algn="ctr">
                       <a:solidFill>
-                        <a:srgbClr val="D5DAE1"/>
+                        <a:srgbClr val="D3D7DE"/>
                       </a:solidFill>
                       <a:prstDash val="solid"/>
                       <a:round/>
                       <a:headEnd type="none" w="med" len="med"/>
                       <a:tailEnd type="none" w="med" len="med"/>
                     </a:lnB>
+                    <a:solidFill>
+                      <a:srgbClr val="FFFFFF"/>
+                    </a:solidFill>
                   </a:tcPr>
                 </a:tc>
                 <a:tc>
@@ -6494,13 +6307,13 @@
                     <a:bodyPr/>
                     <a:lstStyle/>
                     <a:p>
-                      <a:pPr algn="r" indent="0" marL="0">
+                      <a:pPr marL="0" indent="0" algn="r">
                         <a:buNone/>
                       </a:pPr>
                       <a:r>
-                        <a:rPr lang="en-US" sz="2200" dirty="0">
+                        <a:rPr lang="en-US" sz="2400" dirty="0">
                           <a:solidFill>
-                            <a:srgbClr val="1B2430"/>
+                            <a:srgbClr val="262626"/>
                           </a:solidFill>
                           <a:latin typeface="Calibri" pitchFamily="34" charset="0"/>
                           <a:ea typeface="Calibri" pitchFamily="34" charset="-122"/>
@@ -6508,17 +6321,17 @@
                         </a:rPr>
                         <a:t>−3 pp</a:t>
                       </a:r>
-                      <a:endParaRPr lang="en-US" sz="2200" dirty="0">
+                      <a:endParaRPr lang="en-US" sz="2400" dirty="0">
                         <a:latin typeface="Calibri" charset="0"/>
                         <a:ea typeface="Calibri" charset="0"/>
                         <a:cs typeface="Calibri" charset="0"/>
                       </a:endParaRPr>
                     </a:p>
                   </a:txBody>
-                  <a:tcPr marL="91440" marR="91440" marT="45720" marB="45720">
+                  <a:tcPr marL="109728" marR="109728">
                     <a:lnL w="12700" cap="flat" cmpd="sng" algn="ctr">
                       <a:solidFill>
-                        <a:srgbClr val="D5DAE1"/>
+                        <a:srgbClr val="D3D7DE"/>
                       </a:solidFill>
                       <a:prstDash val="solid"/>
                       <a:round/>
@@ -6527,7 +6340,7 @@
                     </a:lnL>
                     <a:lnR w="12700" cap="flat" cmpd="sng" algn="ctr">
                       <a:solidFill>
-                        <a:srgbClr val="D5DAE1"/>
+                        <a:srgbClr val="D3D7DE"/>
                       </a:solidFill>
                       <a:prstDash val="solid"/>
                       <a:round/>
@@ -6536,7 +6349,7 @@
                     </a:lnR>
                     <a:lnT w="12700" cap="flat" cmpd="sng" algn="ctr">
                       <a:solidFill>
-                        <a:srgbClr val="D5DAE1"/>
+                        <a:srgbClr val="D3D7DE"/>
                       </a:solidFill>
                       <a:prstDash val="solid"/>
                       <a:round/>
@@ -6545,15 +6358,23 @@
                     </a:lnT>
                     <a:lnB w="12700" cap="flat" cmpd="sng" algn="ctr">
                       <a:solidFill>
-                        <a:srgbClr val="D5DAE1"/>
+                        <a:srgbClr val="D3D7DE"/>
                       </a:solidFill>
                       <a:prstDash val="solid"/>
                       <a:round/>
                       <a:headEnd type="none" w="med" len="med"/>
                       <a:tailEnd type="none" w="med" len="med"/>
                     </a:lnB>
+                    <a:solidFill>
+                      <a:srgbClr val="FFFFFF"/>
+                    </a:solidFill>
                   </a:tcPr>
                 </a:tc>
+                <a:extLst>
+                  <a:ext uri="{0D108BD9-81ED-4DB2-BD59-A6C34878D82A}">
+                    <a16:rowId xmlns:a16="http://schemas.microsoft.com/office/drawing/2014/main" val="10002"/>
+                  </a:ext>
+                </a:extLst>
               </a:tr>
             </a:tbl>
           </a:graphicData>
@@ -6561,14 +6382,14 @@
       </p:graphicFrame>
       <p:sp>
         <p:nvSpPr>
-          <p:cNvPr id="123" name="Text 117"/>
+          <p:cNvPr id="118" name="Text 112"/>
           <p:cNvSpPr txBox="1"/>
           <p:nvPr/>
         </p:nvSpPr>
         <p:spPr>
           <a:xfrm>
-            <a:off x="22494240" y="15361920"/>
-            <a:ext cx="9692640" cy="1188720"/>
+            <a:off x="22494240" y="15727680"/>
+            <a:ext cx="9692640" cy="731520"/>
           </a:xfrm>
           <a:prstGeom prst="rect">
             <a:avLst/>
@@ -6580,56 +6401,63 @@
           <a:bodyPr wrap="square" lIns="0" tIns="0" rIns="0" bIns="0" rtlCol="0" anchor="t"/>
           <a:lstStyle/>
           <a:p>
-            <a:pPr indent="0" marL="0">
+            <a:pPr marL="0" indent="0">
               <a:buNone/>
             </a:pPr>
             <a:r>
-              <a:rPr lang="en-US" sz="2000" dirty="0">
-                <a:solidFill>
-                  <a:schemeClr val="tx2"/>
-                </a:solidFill>
-              </a:rPr>
-              <a:t>Denied further from the line, but treated alike at the same distance. In 2023, women have more recourse than men (+8 pp) and the race gap is not significant.  * 95% CI excludes 0</a:t>
-            </a:r>
-            <a:endParaRPr lang="en-US" sz="2000" dirty="0"/>
-          </a:p>
-        </p:txBody>
-      </p:sp>
-      <p:sp>
-        <p:nvSpPr>
-          <p:cNvPr id="124" name="marker 6"/>
+              <a:rPr lang="en-US" sz="2200" dirty="0">
+                <a:solidFill>
+                  <a:schemeClr val="tx1"/>
+                </a:solidFill>
+              </a:rPr>
+              <a:t>Treated alike at the same distance from approval.  * 95% CI excludes 0</a:t>
+            </a:r>
+            <a:endParaRPr lang="en-US" sz="2200" dirty="0"/>
+          </a:p>
+        </p:txBody>
+      </p:sp>
+      <p:sp>
+        <p:nvSpPr>
+          <p:cNvPr id="119" name="marker 5"/>
           <p:cNvSpPr/>
           <p:nvPr/>
         </p:nvSpPr>
         <p:spPr>
           <a:xfrm>
-            <a:off x="22494240" y="16687800"/>
-            <a:ext cx="713232" cy="713232"/>
+            <a:off x="22494240" y="16596360"/>
+            <a:ext cx="731520" cy="731520"/>
           </a:xfrm>
           <a:prstGeom prst="ellipse">
             <a:avLst/>
           </a:prstGeom>
           <a:solidFill>
-            <a:schemeClr val="tx1"/>
+            <a:schemeClr val="tx2"/>
           </a:solidFill>
           <a:ln w="12700">
             <a:solidFill>
-              <a:schemeClr val="tx1"/>
+              <a:schemeClr val="tx2"/>
             </a:solidFill>
             <a:prstDash val="solid"/>
           </a:ln>
         </p:spPr>
-      </p:sp>
-      <p:sp>
-        <p:nvSpPr>
-          <p:cNvPr id="125" name="Text 119"/>
+        <p:txBody>
+          <a:bodyPr/>
+          <a:lstStyle/>
+          <a:p>
+            <a:endParaRPr lang="en-US"/>
+          </a:p>
+        </p:txBody>
+      </p:sp>
+      <p:sp>
+        <p:nvSpPr>
+          <p:cNvPr id="120" name="Text 114"/>
           <p:cNvSpPr txBox="1"/>
           <p:nvPr/>
         </p:nvSpPr>
         <p:spPr>
           <a:xfrm>
-            <a:off x="22494240" y="16687800"/>
-            <a:ext cx="713232" cy="713232"/>
+            <a:off x="22494240" y="16596360"/>
+            <a:ext cx="731520" cy="731520"/>
           </a:xfrm>
           <a:prstGeom prst="rect">
             <a:avLst/>
@@ -6641,19 +6469,580 @@
           <a:bodyPr wrap="square" lIns="0" tIns="0" rIns="0" bIns="0" rtlCol="0" anchor="ctr"/>
           <a:lstStyle/>
           <a:p>
-            <a:pPr algn="ctr" indent="0" marL="0">
+            <a:pPr marL="0" indent="0" algn="ctr">
               <a:buNone/>
             </a:pPr>
             <a:r>
               <a:rPr lang="en-US" sz="3000" b="1" dirty="0">
                 <a:solidFill>
                   <a:schemeClr val="bg1"/>
+                </a:solidFill>
+              </a:rPr>
+              <a:t>6</a:t>
+            </a:r>
+            <a:endParaRPr lang="en-US" sz="3000" dirty="0"/>
+          </a:p>
+        </p:txBody>
+      </p:sp>
+      <p:sp>
+        <p:nvSpPr>
+          <p:cNvPr id="121" name="Text 115"/>
+          <p:cNvSpPr txBox="1"/>
+          <p:nvPr/>
+        </p:nvSpPr>
+        <p:spPr>
+          <a:xfrm>
+            <a:off x="23454360" y="16550640"/>
+            <a:ext cx="8732520" cy="822960"/>
+          </a:xfrm>
+          <a:prstGeom prst="rect">
+            <a:avLst/>
+          </a:prstGeom>
+          <a:noFill/>
+          <a:ln/>
+        </p:spPr>
+        <p:txBody>
+          <a:bodyPr wrap="square" lIns="0" tIns="0" rIns="0" bIns="0" rtlCol="0" anchor="ctr"/>
+          <a:lstStyle/>
+          <a:p>
+            <a:pPr marL="0" indent="0">
+              <a:lnSpc>
+                <a:spcPct val="92000"/>
+              </a:lnSpc>
+              <a:buNone/>
+            </a:pPr>
+            <a:r>
+              <a:rPr lang="en-US" sz="3600" b="1" dirty="0">
+                <a:solidFill>
+                  <a:schemeClr val="tx2"/>
+                </a:solidFill>
+              </a:rPr>
+              <a:t>Audit explanations, not just accuracy</a:t>
+            </a:r>
+            <a:endParaRPr lang="en-US" sz="3600" dirty="0"/>
+          </a:p>
+        </p:txBody>
+      </p:sp>
+      <p:sp>
+        <p:nvSpPr>
+          <p:cNvPr id="122" name="Text 116"/>
+          <p:cNvSpPr txBox="1"/>
+          <p:nvPr/>
+        </p:nvSpPr>
+        <p:spPr>
+          <a:xfrm>
+            <a:off x="22494240" y="17647920"/>
+            <a:ext cx="9692640" cy="1783080"/>
+          </a:xfrm>
+          <a:prstGeom prst="rect">
+            <a:avLst/>
+          </a:prstGeom>
+          <a:noFill/>
+          <a:ln/>
+        </p:spPr>
+        <p:txBody>
+          <a:bodyPr wrap="square" lIns="0" tIns="0" rIns="0" bIns="0" rtlCol="0" anchor="t"/>
+          <a:lstStyle/>
+          <a:p>
+            <a:pPr marL="342900" indent="-342900">
+              <a:spcAft>
+                <a:spcPts val="800"/>
+              </a:spcAft>
+              <a:buSzPct val="100000"/>
+              <a:buChar char="•"/>
+            </a:pPr>
+            <a:r>
+              <a:rPr lang="en-US" sz="2400" dirty="0">
+                <a:solidFill>
+                  <a:schemeClr val="tx1"/>
+                </a:solidFill>
+              </a:rPr>
+              <a:t>Error rates show under-30s are wrongly denied; recourse shows they can’t do anything about it, once denied.</a:t>
+            </a:r>
+            <a:endParaRPr lang="en-US" sz="2400" dirty="0"/>
+          </a:p>
+          <a:p>
+            <a:pPr marL="342900" indent="-342900">
+              <a:spcAft>
+                <a:spcPts val="800"/>
+              </a:spcAft>
+              <a:buSzPct val="100000"/>
+              <a:buChar char="•"/>
+            </a:pPr>
+            <a:r>
+              <a:rPr lang="en-US" sz="2400" dirty="0">
+                <a:solidFill>
+                  <a:schemeClr val="tx1"/>
+                </a:solidFill>
+              </a:rPr>
+              <a:t>Generic explanation tools mislead most where real recourse is scarcest.</a:t>
+            </a:r>
+            <a:endParaRPr lang="en-US" sz="2400" dirty="0"/>
+          </a:p>
+          <a:p>
+            <a:pPr marL="342900" indent="-342900">
+              <a:spcAft>
+                <a:spcPts val="800"/>
+              </a:spcAft>
+              <a:buSzPct val="100000"/>
+              <a:buChar char="•"/>
+            </a:pPr>
+            <a:r>
+              <a:rPr lang="en-US" sz="2400" dirty="0">
+                <a:solidFill>
+                  <a:schemeClr val="tx1"/>
+                </a:solidFill>
+              </a:rPr>
+              <a:t>Re-audit on current data: 1994 understated the age gap.</a:t>
+            </a:r>
+            <a:endParaRPr lang="en-US" sz="2400" dirty="0"/>
+          </a:p>
+        </p:txBody>
+      </p:sp>
+      <p:sp>
+        <p:nvSpPr>
+          <p:cNvPr id="123" name="Text 117"/>
+          <p:cNvSpPr txBox="1"/>
+          <p:nvPr/>
+        </p:nvSpPr>
+        <p:spPr>
+          <a:xfrm>
+            <a:off x="731520" y="21351240"/>
+            <a:ext cx="31455360" cy="411480"/>
+          </a:xfrm>
+          <a:prstGeom prst="rect">
+            <a:avLst/>
+          </a:prstGeom>
+          <a:noFill/>
+          <a:ln/>
+        </p:spPr>
+        <p:txBody>
+          <a:bodyPr wrap="square" lIns="0" tIns="0" rIns="0" bIns="0" rtlCol="0" anchor="t"/>
+          <a:lstStyle/>
+          <a:p>
+            <a:pPr marL="0" indent="0">
+              <a:buNone/>
+            </a:pPr>
+            <a:r>
+              <a:rPr lang="en-US" sz="1800" b="1" dirty="0">
+                <a:solidFill>
+                  <a:schemeClr val="accent4"/>
+                </a:solidFill>
+              </a:rPr>
+              <a:t>References: </a:t>
+            </a:r>
+            <a:r>
+              <a:rPr lang="en-US" sz="1800" dirty="0">
+                <a:solidFill>
+                  <a:schemeClr val="accent4"/>
+                </a:solidFill>
+              </a:rPr>
+              <a:t>Wachter et al. 2017; Ustun et al. 2019; Gupta et al. 2019; Mothilal et al. 2020; Ding et al. 2021; Karimi et al. 2022 (full list in REPORT.md). Research audit on public survey data, not an eligibility system.</a:t>
+            </a:r>
+            <a:endParaRPr lang="en-US" sz="1800" dirty="0"/>
+          </a:p>
+        </p:txBody>
+      </p:sp>
+      <p:sp>
+        <p:nvSpPr>
+          <p:cNvPr id="125" name="marker 2">
+            <a:extLst>
+              <a:ext uri="{FF2B5EF4-FFF2-40B4-BE49-F238E27FC236}">
+                <a16:creationId xmlns:a16="http://schemas.microsoft.com/office/drawing/2014/main" id="{9C34855D-6F81-9EA3-A7CD-93AC840763D5}"/>
+              </a:ext>
+            </a:extLst>
+          </p:cNvPr>
+          <p:cNvSpPr/>
+          <p:nvPr/>
+        </p:nvSpPr>
+        <p:spPr>
+          <a:xfrm>
+            <a:off x="731520" y="10309860"/>
+            <a:ext cx="731520" cy="731520"/>
+          </a:xfrm>
+          <a:prstGeom prst="ellipse">
+            <a:avLst/>
+          </a:prstGeom>
+          <a:solidFill>
+            <a:schemeClr val="tx2"/>
+          </a:solidFill>
+          <a:ln w="12700">
+            <a:solidFill>
+              <a:schemeClr val="tx2"/>
+            </a:solidFill>
+            <a:prstDash val="solid"/>
+          </a:ln>
+        </p:spPr>
+        <p:txBody>
+          <a:bodyPr/>
+          <a:lstStyle/>
+          <a:p>
+            <a:endParaRPr lang="en-US"/>
+          </a:p>
+        </p:txBody>
+      </p:sp>
+      <p:sp>
+        <p:nvSpPr>
+          <p:cNvPr id="126" name="Text 26">
+            <a:extLst>
+              <a:ext uri="{FF2B5EF4-FFF2-40B4-BE49-F238E27FC236}">
+                <a16:creationId xmlns:a16="http://schemas.microsoft.com/office/drawing/2014/main" id="{4A1C945D-692A-02A5-87B3-E285221517AB}"/>
+              </a:ext>
+            </a:extLst>
+          </p:cNvPr>
+          <p:cNvSpPr txBox="1"/>
+          <p:nvPr/>
+        </p:nvSpPr>
+        <p:spPr>
+          <a:xfrm>
+            <a:off x="731520" y="10309860"/>
+            <a:ext cx="731520" cy="731520"/>
+          </a:xfrm>
+          <a:prstGeom prst="rect">
+            <a:avLst/>
+          </a:prstGeom>
+          <a:noFill/>
+          <a:ln/>
+        </p:spPr>
+        <p:txBody>
+          <a:bodyPr wrap="square" lIns="0" tIns="0" rIns="0" bIns="0" rtlCol="0" anchor="ctr"/>
+          <a:lstStyle/>
+          <a:p>
+            <a:pPr marL="0" indent="0" algn="ctr">
+              <a:buNone/>
+            </a:pPr>
+            <a:r>
+              <a:rPr lang="en-US" sz="3000" b="1" dirty="0">
+                <a:solidFill>
+                  <a:schemeClr val="bg1"/>
+                </a:solidFill>
+              </a:rPr>
+              <a:t>2</a:t>
+            </a:r>
+            <a:endParaRPr lang="en-US" sz="3000" dirty="0"/>
+          </a:p>
+        </p:txBody>
+      </p:sp>
+      <p:sp>
+        <p:nvSpPr>
+          <p:cNvPr id="128" name="Text 16">
+            <a:extLst>
+              <a:ext uri="{FF2B5EF4-FFF2-40B4-BE49-F238E27FC236}">
+                <a16:creationId xmlns:a16="http://schemas.microsoft.com/office/drawing/2014/main" id="{3AB05CB9-7EA7-7695-C730-F0EA91DF4FDD}"/>
+              </a:ext>
+            </a:extLst>
+          </p:cNvPr>
+          <p:cNvSpPr txBox="1"/>
+          <p:nvPr/>
+        </p:nvSpPr>
+        <p:spPr>
+          <a:xfrm>
+            <a:off x="1691640" y="10264140"/>
+            <a:ext cx="8732520" cy="822960"/>
+          </a:xfrm>
+          <a:prstGeom prst="rect">
+            <a:avLst/>
+          </a:prstGeom>
+          <a:noFill/>
+          <a:ln/>
+        </p:spPr>
+        <p:txBody>
+          <a:bodyPr wrap="square" lIns="0" tIns="0" rIns="0" bIns="0" rtlCol="0" anchor="ctr"/>
+          <a:lstStyle/>
+          <a:p>
+            <a:pPr marL="0" indent="0">
+              <a:lnSpc>
+                <a:spcPct val="92000"/>
+              </a:lnSpc>
+              <a:buNone/>
+            </a:pPr>
+            <a:r>
+              <a:rPr lang="en-US" sz="3600" b="1" dirty="0">
+                <a:solidFill>
+                  <a:schemeClr val="tx2"/>
+                </a:solidFill>
+              </a:rPr>
+              <a:t>The question</a:t>
+            </a:r>
+            <a:endParaRPr lang="en-US" sz="3600" dirty="0"/>
+          </a:p>
+        </p:txBody>
+      </p:sp>
+      <p:sp>
+        <p:nvSpPr>
+          <p:cNvPr id="129" name="question card">
+            <a:extLst>
+              <a:ext uri="{FF2B5EF4-FFF2-40B4-BE49-F238E27FC236}">
+                <a16:creationId xmlns:a16="http://schemas.microsoft.com/office/drawing/2014/main" id="{A554A0E1-B3AD-EC66-3006-09F1FCBC62AD}"/>
+              </a:ext>
+            </a:extLst>
+          </p:cNvPr>
+          <p:cNvSpPr/>
+          <p:nvPr/>
+        </p:nvSpPr>
+        <p:spPr>
+          <a:xfrm>
+            <a:off x="546100" y="11224260"/>
+            <a:ext cx="9143577" cy="1828800"/>
+          </a:xfrm>
+          <a:prstGeom prst="roundRect">
+            <a:avLst>
+              <a:gd name="adj" fmla="val 7500"/>
+            </a:avLst>
+          </a:prstGeom>
+          <a:solidFill>
+            <a:schemeClr val="bg2"/>
+          </a:solidFill>
+          <a:ln w="12700">
+            <a:solidFill>
+              <a:schemeClr val="bg2"/>
+            </a:solidFill>
+            <a:prstDash val="solid"/>
+          </a:ln>
+        </p:spPr>
+        <p:txBody>
+          <a:bodyPr/>
+          <a:lstStyle/>
+          <a:p>
+            <a:endParaRPr lang="en-US" dirty="0"/>
+          </a:p>
+        </p:txBody>
+      </p:sp>
+      <p:sp>
+        <p:nvSpPr>
+          <p:cNvPr id="130" name="Text 18">
+            <a:extLst>
+              <a:ext uri="{FF2B5EF4-FFF2-40B4-BE49-F238E27FC236}">
+                <a16:creationId xmlns:a16="http://schemas.microsoft.com/office/drawing/2014/main" id="{49E90DFD-71B1-D871-15B4-971573D002B1}"/>
+              </a:ext>
+            </a:extLst>
+          </p:cNvPr>
+          <p:cNvSpPr txBox="1"/>
+          <p:nvPr/>
+        </p:nvSpPr>
+        <p:spPr>
+          <a:xfrm>
+            <a:off x="866140" y="11452860"/>
+            <a:ext cx="8539756" cy="1828800"/>
+          </a:xfrm>
+          <a:prstGeom prst="rect">
+            <a:avLst/>
+          </a:prstGeom>
+          <a:noFill/>
+          <a:ln/>
+        </p:spPr>
+        <p:txBody>
+          <a:bodyPr wrap="square" lIns="0" tIns="0" rIns="0" bIns="0" rtlCol="0" anchor="t"/>
+          <a:lstStyle/>
+          <a:p>
+            <a:pPr marL="0" indent="0">
+              <a:buNone/>
+            </a:pPr>
+            <a:r>
+              <a:rPr lang="en-US" sz="2600" i="1" dirty="0">
+                <a:solidFill>
+                  <a:schemeClr val="tx1"/>
                 </a:solidFill>
                 <a:latin typeface="+mj-lt" pitchFamily="34" charset="0"/>
                 <a:ea typeface="+mj-lt" pitchFamily="34" charset="-122"/>
                 <a:cs typeface="+mj-lt" pitchFamily="34" charset="-120"/>
               </a:rPr>
-              <a:t>6</a:t>
+              <a:t>When tools suggest how to reverse an automated denial, is the path realistic, and equally open to every group? Do findings from the 1994 benchmark still hold in 2023?</a:t>
+            </a:r>
+            <a:endParaRPr lang="en-US" sz="2600" dirty="0"/>
+          </a:p>
+        </p:txBody>
+      </p:sp>
+      <p:sp>
+        <p:nvSpPr>
+          <p:cNvPr id="131" name="Text 30">
+            <a:extLst>
+              <a:ext uri="{FF2B5EF4-FFF2-40B4-BE49-F238E27FC236}">
+                <a16:creationId xmlns:a16="http://schemas.microsoft.com/office/drawing/2014/main" id="{329DEA71-7647-06B2-126E-B5203285A705}"/>
+              </a:ext>
+            </a:extLst>
+          </p:cNvPr>
+          <p:cNvSpPr txBox="1"/>
+          <p:nvPr/>
+        </p:nvSpPr>
+        <p:spPr>
+          <a:xfrm>
+            <a:off x="610870" y="16464501"/>
+            <a:ext cx="2148840" cy="1143000"/>
+          </a:xfrm>
+          <a:prstGeom prst="rect">
+            <a:avLst/>
+          </a:prstGeom>
+          <a:noFill/>
+          <a:ln/>
+        </p:spPr>
+        <p:txBody>
+          <a:bodyPr wrap="square" lIns="0" tIns="0" rIns="0" bIns="0" rtlCol="0" anchor="t"/>
+          <a:lstStyle/>
+          <a:p>
+            <a:pPr marL="0" indent="0">
+              <a:buNone/>
+            </a:pPr>
+            <a:r>
+              <a:rPr lang="en-US" sz="2400" b="1" dirty="0">
+                <a:solidFill>
+                  <a:schemeClr val="tx2"/>
+                </a:solidFill>
+              </a:rPr>
+              <a:t>Models</a:t>
+            </a:r>
+            <a:endParaRPr lang="en-US" sz="2400" dirty="0"/>
+          </a:p>
+        </p:txBody>
+      </p:sp>
+      <p:sp>
+        <p:nvSpPr>
+          <p:cNvPr id="132" name="Text 31">
+            <a:extLst>
+              <a:ext uri="{FF2B5EF4-FFF2-40B4-BE49-F238E27FC236}">
+                <a16:creationId xmlns:a16="http://schemas.microsoft.com/office/drawing/2014/main" id="{962F83A8-20F7-CE9F-7DB5-18B726A3A734}"/>
+              </a:ext>
+            </a:extLst>
+          </p:cNvPr>
+          <p:cNvSpPr txBox="1"/>
+          <p:nvPr/>
+        </p:nvSpPr>
+        <p:spPr>
+          <a:xfrm>
+            <a:off x="2851150" y="16464501"/>
+            <a:ext cx="7452360" cy="1143000"/>
+          </a:xfrm>
+          <a:prstGeom prst="rect">
+            <a:avLst/>
+          </a:prstGeom>
+          <a:noFill/>
+          <a:ln/>
+        </p:spPr>
+        <p:txBody>
+          <a:bodyPr wrap="square" lIns="0" tIns="0" rIns="0" bIns="0" rtlCol="0" anchor="t"/>
+          <a:lstStyle/>
+          <a:p>
+            <a:pPr marL="0" indent="0">
+              <a:buNone/>
+            </a:pPr>
+            <a:r>
+              <a:rPr lang="en-US" sz="2400" dirty="0"/>
+              <a:t>Gradient boosting and logistic regression. Sex and race are not model inputs</a:t>
+            </a:r>
+          </a:p>
+        </p:txBody>
+      </p:sp>
+      <p:sp>
+        <p:nvSpPr>
+          <p:cNvPr id="133" name="Text 36">
+            <a:extLst>
+              <a:ext uri="{FF2B5EF4-FFF2-40B4-BE49-F238E27FC236}">
+                <a16:creationId xmlns:a16="http://schemas.microsoft.com/office/drawing/2014/main" id="{B32DEABB-5159-8791-1ABD-2838CEBA4A59}"/>
+              </a:ext>
+            </a:extLst>
+          </p:cNvPr>
+          <p:cNvSpPr txBox="1"/>
+          <p:nvPr/>
+        </p:nvSpPr>
+        <p:spPr>
+          <a:xfrm>
+            <a:off x="10949940" y="6457951"/>
+            <a:ext cx="10789920" cy="1417320"/>
+          </a:xfrm>
+          <a:prstGeom prst="rect">
+            <a:avLst/>
+          </a:prstGeom>
+          <a:noFill/>
+          <a:ln/>
+        </p:spPr>
+        <p:txBody>
+          <a:bodyPr wrap="square" lIns="0" tIns="0" rIns="0" bIns="0" rtlCol="0" anchor="t"/>
+          <a:lstStyle/>
+          <a:p>
+            <a:r>
+              <a:rPr lang="en-US" sz="3200" b="1" dirty="0">
+                <a:solidFill>
+                  <a:schemeClr val="accent2"/>
+                </a:solidFill>
+              </a:rPr>
+              <a:t>They were 6 percentage points less likely than 30–49-year-olds to have one in 1994, and 47 points less likely in 2023.</a:t>
+            </a:r>
+          </a:p>
+          <a:p>
+            <a:br>
+              <a:rPr lang="en-US" sz="5000" b="1" dirty="0">
+                <a:solidFill>
+                  <a:schemeClr val="accent2"/>
+                </a:solidFill>
+              </a:rPr>
+            </a:br>
+            <a:endParaRPr lang="en-US" sz="5000" dirty="0"/>
+          </a:p>
+        </p:txBody>
+      </p:sp>
+      <p:sp>
+        <p:nvSpPr>
+          <p:cNvPr id="134" name="marker 7"/>
+          <p:cNvSpPr/>
+          <p:nvPr/>
+        </p:nvSpPr>
+        <p:spPr>
+          <a:xfrm>
+            <a:off x="22494240" y="19568160"/>
+            <a:ext cx="731520" cy="731520"/>
+          </a:xfrm>
+          <a:prstGeom prst="ellipse">
+            <a:avLst/>
+          </a:prstGeom>
+          <a:solidFill>
+            <a:schemeClr val="tx2"/>
+          </a:solidFill>
+          <a:ln w="12700">
+            <a:solidFill>
+              <a:schemeClr val="tx2"/>
+            </a:solidFill>
+            <a:prstDash val="solid"/>
+          </a:ln>
+        </p:spPr>
+        <p:txBody>
+          <a:bodyPr/>
+          <a:lstStyle/>
+          <a:p>
+            <a:endParaRPr lang="en-US"/>
+          </a:p>
+        </p:txBody>
+      </p:sp>
+      <p:sp>
+        <p:nvSpPr>
+          <p:cNvPr id="135" name="Text 114"/>
+          <p:cNvSpPr txBox="1"/>
+          <p:nvPr/>
+        </p:nvSpPr>
+        <p:spPr>
+          <a:xfrm>
+            <a:off x="22494240" y="19568160"/>
+            <a:ext cx="731520" cy="731520"/>
+          </a:xfrm>
+          <a:prstGeom prst="rect">
+            <a:avLst/>
+          </a:prstGeom>
+          <a:noFill/>
+          <a:ln/>
+        </p:spPr>
+        <p:txBody>
+          <a:bodyPr wrap="square" lIns="0" tIns="0" rIns="0" bIns="0" rtlCol="0" anchor="ctr"/>
+          <a:lstStyle/>
+          <a:p>
+            <a:pPr marL="0" indent="0" algn="ctr">
+              <a:buNone/>
+            </a:pPr>
+            <a:r>
+              <a:rPr lang="en-US" sz="3000" b="1" dirty="0">
+                <a:solidFill>
+                  <a:schemeClr val="bg1"/>
+                </a:solidFill>
+              </a:rPr>
+              <a:t>7</a:t>
             </a:r>
             <a:endParaRPr lang="en-US" sz="3000" dirty="0"/>
           </a:p>
@@ -6661,14 +7050,14 @@
       </p:sp>
       <p:sp>
         <p:nvSpPr>
-          <p:cNvPr id="126" name="Text 120"/>
+          <p:cNvPr id="136" name="Text 115"/>
           <p:cNvSpPr txBox="1"/>
           <p:nvPr/>
         </p:nvSpPr>
         <p:spPr>
           <a:xfrm>
-            <a:off x="23454360" y="16669512"/>
-            <a:ext cx="8732520" cy="749808"/>
+            <a:off x="23454360" y="19522439"/>
+            <a:ext cx="8732520" cy="822960"/>
           </a:xfrm>
           <a:prstGeom prst="rect">
             <a:avLst/>
@@ -6680,37 +7069,34 @@
           <a:bodyPr wrap="square" lIns="0" tIns="0" rIns="0" bIns="0" rtlCol="0" anchor="ctr"/>
           <a:lstStyle/>
           <a:p>
-            <a:pPr indent="0" marL="0">
+            <a:pPr marL="0" indent="0">
               <a:lnSpc>
-                <a:spcPct val="95000"/>
+                <a:spcPct val="92000"/>
               </a:lnSpc>
               <a:buNone/>
             </a:pPr>
             <a:r>
-              <a:rPr lang="en-US" sz="3800" b="1" dirty="0">
-                <a:solidFill>
-                  <a:schemeClr val="tx1"/>
-                </a:solidFill>
-                <a:latin typeface="+mj-lt" pitchFamily="34" charset="0"/>
-                <a:ea typeface="+mj-lt" pitchFamily="34" charset="-122"/>
-                <a:cs typeface="+mj-lt" pitchFamily="34" charset="-120"/>
-              </a:rPr>
-              <a:t>Why it matters</a:t>
-            </a:r>
-            <a:endParaRPr lang="en-US" sz="3800" dirty="0"/>
-          </a:p>
-        </p:txBody>
-      </p:sp>
-      <p:sp>
-        <p:nvSpPr>
-          <p:cNvPr id="127" name="Text 121"/>
+              <a:rPr lang="en-US" sz="3600" b="1" dirty="0">
+                <a:solidFill>
+                  <a:schemeClr val="tx2"/>
+                </a:solidFill>
+              </a:rPr>
+              <a:t>Limitations</a:t>
+            </a:r>
+            <a:endParaRPr lang="en-US" sz="3600" dirty="0"/>
+          </a:p>
+        </p:txBody>
+      </p:sp>
+      <p:sp>
+        <p:nvSpPr>
+          <p:cNvPr id="137" name="Text 116"/>
           <p:cNvSpPr txBox="1"/>
           <p:nvPr/>
         </p:nvSpPr>
         <p:spPr>
           <a:xfrm>
-            <a:off x="22494240" y="17556480"/>
-            <a:ext cx="9692640" cy="2194560"/>
+            <a:off x="22494240" y="20482560"/>
+            <a:ext cx="9692640" cy="868680"/>
           </a:xfrm>
           <a:prstGeom prst="rect">
             <a:avLst/>
@@ -6724,139 +7110,38 @@
           <a:p>
             <a:pPr marL="342900" indent="-342900">
               <a:spcAft>
-                <a:spcPts val="600"/>
+                <a:spcPts val="800"/>
               </a:spcAft>
               <a:buSzPct val="100000"/>
               <a:buChar char="•"/>
             </a:pPr>
             <a:r>
-              <a:rPr lang="en-US" sz="2100" dirty="0">
+              <a:rPr lang="en-US" sz="2400" dirty="0">
                 <a:solidFill>
                   <a:schemeClr val="tx1"/>
                 </a:solidFill>
               </a:rPr>
-              <a:t>Error rates flag age (98% of qualified under-30s are wrongly denied); recourse shows that, once denied, almost none can do anything about it.</a:t>
-            </a:r>
-            <a:endParaRPr lang="en-US" sz="2100" dirty="0"/>
+              <a:t>Income is a proxy label: in real benefit programs, lower income qualifies.</a:t>
+            </a:r>
+            <a:endParaRPr lang="en-US" sz="2400" dirty="0"/>
           </a:p>
           <a:p>
             <a:pPr marL="342900" indent="-342900">
               <a:spcAft>
-                <a:spcPts val="600"/>
+                <a:spcPts val="800"/>
               </a:spcAft>
               <a:buSzPct val="100000"/>
               <a:buChar char="•"/>
             </a:pPr>
             <a:r>
-              <a:rPr lang="en-US" sz="2100" dirty="0">
+              <a:rPr lang="en-US" sz="2400" dirty="0">
                 <a:solidFill>
                   <a:schemeClr val="tx1"/>
                 </a:solidFill>
               </a:rPr>
-              <a:t>Unconstrained explanations mislead most where real recourse is scarcest.</a:t>
-            </a:r>
-            <a:endParaRPr lang="en-US" sz="2100" dirty="0"/>
-          </a:p>
-          <a:p>
-            <a:pPr marL="342900" indent="-342900">
-              <a:spcAft>
-                <a:spcPts val="600"/>
-              </a:spcAft>
-              <a:buSzPct val="100000"/>
-              <a:buChar char="•"/>
-            </a:pPr>
-            <a:r>
-              <a:rPr lang="en-US" sz="2100" dirty="0">
-                <a:solidFill>
-                  <a:schemeClr val="tx1"/>
-                </a:solidFill>
-              </a:rPr>
-              <a:t>Re-audit on current data: the 1994 benchmark understated the age gap.</a:t>
-            </a:r>
-            <a:endParaRPr lang="en-US" sz="2100" dirty="0"/>
-          </a:p>
-        </p:txBody>
-      </p:sp>
-      <p:sp>
-        <p:nvSpPr>
-          <p:cNvPr id="128" name="Text 122"/>
-          <p:cNvSpPr txBox="1"/>
-          <p:nvPr/>
-        </p:nvSpPr>
-        <p:spPr>
-          <a:xfrm>
-            <a:off x="22494240" y="19842480"/>
-            <a:ext cx="9692640" cy="868680"/>
-          </a:xfrm>
-          <a:prstGeom prst="rect">
-            <a:avLst/>
-          </a:prstGeom>
-          <a:noFill/>
-          <a:ln/>
-        </p:spPr>
-        <p:txBody>
-          <a:bodyPr wrap="square" lIns="0" tIns="0" rIns="0" bIns="0" rtlCol="0" anchor="t"/>
-          <a:lstStyle/>
-          <a:p>
-            <a:pPr indent="0" marL="0">
-              <a:buNone/>
-            </a:pPr>
-            <a:r>
-              <a:rPr lang="en-US" sz="1800" b="1" dirty="0">
-                <a:solidFill>
-                  <a:schemeClr val="tx2"/>
-                </a:solidFill>
-              </a:rPr>
-              <a:t>Limits: </a:t>
-            </a:r>
-            <a:pPr indent="0" marL="0">
-              <a:buNone/>
-            </a:pPr>
-            <a:r>
-              <a:rPr lang="en-US" sz="1800" dirty="0">
-                <a:solidFill>
-                  <a:schemeClr val="tx2"/>
-                </a:solidFill>
-              </a:rPr>
-              <a:t>income is a proxy label (in benefits, lower income qualifies); costs and immutability are explicit judgments; heuristic search; one state.</a:t>
-            </a:r>
-            <a:endParaRPr lang="en-US" sz="1800" dirty="0"/>
-          </a:p>
-        </p:txBody>
-      </p:sp>
-      <p:sp>
-        <p:nvSpPr>
-          <p:cNvPr id="129" name="Text 123"/>
-          <p:cNvSpPr txBox="1"/>
-          <p:nvPr/>
-        </p:nvSpPr>
-        <p:spPr>
-          <a:xfrm>
-            <a:off x="731520" y="21122640"/>
-            <a:ext cx="31455360" cy="411480"/>
-          </a:xfrm>
-          <a:prstGeom prst="rect">
-            <a:avLst/>
-          </a:prstGeom>
-          <a:noFill/>
-          <a:ln/>
-        </p:spPr>
-        <p:txBody>
-          <a:bodyPr wrap="square" lIns="0" tIns="0" rIns="0" bIns="0" rtlCol="0" anchor="t"/>
-          <a:lstStyle/>
-          <a:p>
-            <a:pPr indent="0" marL="0">
-              <a:buNone/>
-            </a:pPr>
-            <a:r>
-              <a:rPr lang="en-US" sz="1600" dirty="0">
-                <a:solidFill>
-                  <a:schemeClr val="tx2"/>
-                </a:solidFill>
-              </a:rPr>
-              <a:t>References: Wachter et al. 2017 · Ustun et al. 2019 · Gupta et al. 2019 · Mothilal et al. 2020 (DiCE) · Ding et al. 2021 (Retiring Adult) · Karimi et al. 2022 · full list in REPORT.md.   Research audit on public survey data, not an eligibility system.</a:t>
-            </a:r>
-            <a:endParaRPr lang="en-US" sz="1600" dirty="0"/>
+              <a:t>Costs and what counts as “immutable” are judgment calls.</a:t>
+            </a:r>
+            <a:endParaRPr lang="en-US" sz="2400" dirty="0"/>
           </a:p>
         </p:txBody>
       </p:sp>
@@ -6869,49 +7154,49 @@
 </file>
 
 <file path=ppt/theme/theme1.xml><?xml version="1.0" encoding="utf-8"?>
-<a:theme xmlns:a="http://schemas.openxmlformats.org/drawingml/2006/main" name="Recourse Audit">
+<a:theme xmlns:a="http://schemas.openxmlformats.org/drawingml/2006/main" name="Duke Recourse Audit">
   <a:themeElements>
-    <a:clrScheme name="Recourse Audit">
+    <a:clrScheme name="Duke Recourse Audit">
       <a:dk1>
-        <a:srgbClr val="1B2430"/>
+        <a:srgbClr val="262626"/>
       </a:dk1>
       <a:lt1>
         <a:srgbClr val="FFFFFF"/>
       </a:lt1>
       <a:dk2>
-        <a:srgbClr val="5A6472"/>
+        <a:srgbClr val="012169"/>
       </a:dk2>
       <a:lt2>
-        <a:srgbClr val="F2F4F7"/>
+        <a:srgbClr val="F3F2F1"/>
       </a:lt2>
       <a:accent1>
-        <a:srgbClr val="2A78D6"/>
+        <a:srgbClr val="0577B1"/>
       </a:accent1>
       <a:accent2>
-        <a:srgbClr val="EB6834"/>
+        <a:srgbClr val="C84E00"/>
       </a:accent2>
       <a:accent3>
-        <a:srgbClr val="5B3FD1"/>
+        <a:srgbClr val="339898"/>
       </a:accent3>
       <a:accent4>
-        <a:srgbClr val="8C96A3"/>
+        <a:srgbClr val="666666"/>
       </a:accent4>
       <a:accent5>
-        <a:srgbClr val="D1495B"/>
+        <a:srgbClr val="FFD960"/>
       </a:accent5>
       <a:accent6>
-        <a:srgbClr val="B9AEEF"/>
+        <a:srgbClr val="B5B5B5"/>
       </a:accent6>
       <a:hlink>
-        <a:srgbClr val="2A78D6"/>
+        <a:srgbClr val="0577B1"/>
       </a:hlink>
       <a:folHlink>
-        <a:srgbClr val="5B3FD1"/>
+        <a:srgbClr val="012169"/>
       </a:folHlink>
     </a:clrScheme>
-    <a:fontScheme name="Recourse Audit">
+    <a:fontScheme name="Duke Recourse Audit">
       <a:majorFont>
-        <a:latin typeface="Cambria"/>
+        <a:latin typeface="Calibri"/>
         <a:ea typeface=""/>
         <a:cs typeface=""/>
         <a:font script="Jpan" typeface="游ゴシック Light"/>
@@ -7161,4 +7446,319 @@
     </a:ext>
   </a:extLst>
 </a:theme>
+</file>
+
+<file path=ppt/theme/theme2.xml><?xml version="1.0" encoding="utf-8"?>
+<a:theme xmlns:a="http://schemas.openxmlformats.org/drawingml/2006/main" name="Office Theme">
+  <a:themeElements>
+    <a:clrScheme name="Office">
+      <a:dk1>
+        <a:sysClr val="windowText" lastClr="000000"/>
+      </a:dk1>
+      <a:lt1>
+        <a:sysClr val="window" lastClr="FFFFFF"/>
+      </a:lt1>
+      <a:dk2>
+        <a:srgbClr val="0E2841"/>
+      </a:dk2>
+      <a:lt2>
+        <a:srgbClr val="E8E8E8"/>
+      </a:lt2>
+      <a:accent1>
+        <a:srgbClr val="156082"/>
+      </a:accent1>
+      <a:accent2>
+        <a:srgbClr val="E97132"/>
+      </a:accent2>
+      <a:accent3>
+        <a:srgbClr val="196B24"/>
+      </a:accent3>
+      <a:accent4>
+        <a:srgbClr val="0F9ED5"/>
+      </a:accent4>
+      <a:accent5>
+        <a:srgbClr val="A02B93"/>
+      </a:accent5>
+      <a:accent6>
+        <a:srgbClr val="4EA72E"/>
+      </a:accent6>
+      <a:hlink>
+        <a:srgbClr val="467886"/>
+      </a:hlink>
+      <a:folHlink>
+        <a:srgbClr val="96607D"/>
+      </a:folHlink>
+    </a:clrScheme>
+    <a:fontScheme name="Office">
+      <a:majorFont>
+        <a:latin typeface="Aptos Display" panose="02110004020202020204"/>
+        <a:ea typeface=""/>
+        <a:cs typeface=""/>
+        <a:font script="Jpan" typeface="游ゴシック Light"/>
+        <a:font script="Hang" typeface="맑은 고딕"/>
+        <a:font script="Hans" typeface="等线 Light"/>
+        <a:font script="Hant" typeface="新細明體"/>
+        <a:font script="Arab" typeface="Times New Roman"/>
+        <a:font script="Hebr" typeface="Times New Roman"/>
+        <a:font script="Thai" typeface="Angsana New"/>
+        <a:font script="Ethi" typeface="Nyala"/>
+        <a:font script="Beng" typeface="Vrinda"/>
+        <a:font script="Gujr" typeface="Shruti"/>
+        <a:font script="Khmr" typeface="MoolBoran"/>
+        <a:font script="Knda" typeface="Tunga"/>
+        <a:font script="Guru" typeface="Raavi"/>
+        <a:font script="Cans" typeface="Euphemia"/>
+        <a:font script="Cher" typeface="Plantagenet Cherokee"/>
+        <a:font script="Yiii" typeface="Microsoft Yi Baiti"/>
+        <a:font script="Tibt" typeface="Microsoft Himalaya"/>
+        <a:font script="Thaa" typeface="MV Boli"/>
+        <a:font script="Deva" typeface="Mangal"/>
+        <a:font script="Telu" typeface="Gautami"/>
+        <a:font script="Taml" typeface="Latha"/>
+        <a:font script="Syrc" typeface="Estrangelo Edessa"/>
+        <a:font script="Orya" typeface="Kalinga"/>
+        <a:font script="Mlym" typeface="Kartika"/>
+        <a:font script="Laoo" typeface="DokChampa"/>
+        <a:font script="Sinh" typeface="Iskoola Pota"/>
+        <a:font script="Mong" typeface="Mongolian Baiti"/>
+        <a:font script="Viet" typeface="Times New Roman"/>
+        <a:font script="Uigh" typeface="Microsoft Uighur"/>
+        <a:font script="Geor" typeface="Sylfaen"/>
+        <a:font script="Armn" typeface="Arial"/>
+        <a:font script="Bugi" typeface="Leelawadee UI"/>
+        <a:font script="Bopo" typeface="Microsoft JhengHei"/>
+        <a:font script="Java" typeface="Javanese Text"/>
+        <a:font script="Lisu" typeface="Segoe UI"/>
+        <a:font script="Mymr" typeface="Myanmar Text"/>
+        <a:font script="Nkoo" typeface="Ebrima"/>
+        <a:font script="Olck" typeface="Nirmala UI"/>
+        <a:font script="Osma" typeface="Ebrima"/>
+        <a:font script="Phag" typeface="Phagspa"/>
+        <a:font script="Syrn" typeface="Estrangelo Edessa"/>
+        <a:font script="Syrj" typeface="Estrangelo Edessa"/>
+        <a:font script="Syre" typeface="Estrangelo Edessa"/>
+        <a:font script="Sora" typeface="Nirmala UI"/>
+        <a:font script="Tale" typeface="Microsoft Tai Le"/>
+        <a:font script="Talu" typeface="Microsoft New Tai Lue"/>
+        <a:font script="Tfng" typeface="Ebrima"/>
+      </a:majorFont>
+      <a:minorFont>
+        <a:latin typeface="Aptos" panose="02110004020202020204"/>
+        <a:ea typeface=""/>
+        <a:cs typeface=""/>
+        <a:font script="Jpan" typeface="游ゴシック"/>
+        <a:font script="Hang" typeface="맑은 고딕"/>
+        <a:font script="Hans" typeface="等线"/>
+        <a:font script="Hant" typeface="新細明體"/>
+        <a:font script="Arab" typeface="Arial"/>
+        <a:font script="Hebr" typeface="Arial"/>
+        <a:font script="Thai" typeface="Cordia New"/>
+        <a:font script="Ethi" typeface="Nyala"/>
+        <a:font script="Beng" typeface="Vrinda"/>
+        <a:font script="Gujr" typeface="Shruti"/>
+        <a:font script="Khmr" typeface="DaunPenh"/>
+        <a:font script="Knda" typeface="Tunga"/>
+        <a:font script="Guru" typeface="Raavi"/>
+        <a:font script="Cans" typeface="Euphemia"/>
+        <a:font script="Cher" typeface="Plantagenet Cherokee"/>
+        <a:font script="Yiii" typeface="Microsoft Yi Baiti"/>
+        <a:font script="Tibt" typeface="Microsoft Himalaya"/>
+        <a:font script="Thaa" typeface="MV Boli"/>
+        <a:font script="Deva" typeface="Mangal"/>
+        <a:font script="Telu" typeface="Gautami"/>
+        <a:font script="Taml" typeface="Latha"/>
+        <a:font script="Syrc" typeface="Estrangelo Edessa"/>
+        <a:font script="Orya" typeface="Kalinga"/>
+        <a:font script="Mlym" typeface="Kartika"/>
+        <a:font script="Laoo" typeface="DokChampa"/>
+        <a:font script="Sinh" typeface="Iskoola Pota"/>
+        <a:font script="Mong" typeface="Mongolian Baiti"/>
+        <a:font script="Viet" typeface="Arial"/>
+        <a:font script="Uigh" typeface="Microsoft Uighur"/>
+        <a:font script="Geor" typeface="Sylfaen"/>
+        <a:font script="Armn" typeface="Arial"/>
+        <a:font script="Bugi" typeface="Leelawadee UI"/>
+        <a:font script="Bopo" typeface="Microsoft JhengHei"/>
+        <a:font script="Java" typeface="Javanese Text"/>
+        <a:font script="Lisu" typeface="Segoe UI"/>
+        <a:font script="Mymr" typeface="Myanmar Text"/>
+        <a:font script="Nkoo" typeface="Ebrima"/>
+        <a:font script="Olck" typeface="Nirmala UI"/>
+        <a:font script="Osma" typeface="Ebrima"/>
+        <a:font script="Phag" typeface="Phagspa"/>
+        <a:font script="Syrn" typeface="Estrangelo Edessa"/>
+        <a:font script="Syrj" typeface="Estrangelo Edessa"/>
+        <a:font script="Syre" typeface="Estrangelo Edessa"/>
+        <a:font script="Sora" typeface="Nirmala UI"/>
+        <a:font script="Tale" typeface="Microsoft Tai Le"/>
+        <a:font script="Talu" typeface="Microsoft New Tai Lue"/>
+        <a:font script="Tfng" typeface="Ebrima"/>
+      </a:minorFont>
+    </a:fontScheme>
+    <a:fmtScheme name="Office">
+      <a:fillStyleLst>
+        <a:solidFill>
+          <a:schemeClr val="phClr"/>
+        </a:solidFill>
+        <a:gradFill rotWithShape="1">
+          <a:gsLst>
+            <a:gs pos="0">
+              <a:schemeClr val="phClr">
+                <a:lumMod val="110000"/>
+                <a:satMod val="105000"/>
+                <a:tint val="67000"/>
+              </a:schemeClr>
+            </a:gs>
+            <a:gs pos="50000">
+              <a:schemeClr val="phClr">
+                <a:lumMod val="105000"/>
+                <a:satMod val="103000"/>
+                <a:tint val="73000"/>
+              </a:schemeClr>
+            </a:gs>
+            <a:gs pos="100000">
+              <a:schemeClr val="phClr">
+                <a:lumMod val="105000"/>
+                <a:satMod val="109000"/>
+                <a:tint val="81000"/>
+              </a:schemeClr>
+            </a:gs>
+          </a:gsLst>
+          <a:lin ang="5400000" scaled="0"/>
+        </a:gradFill>
+        <a:gradFill rotWithShape="1">
+          <a:gsLst>
+            <a:gs pos="0">
+              <a:schemeClr val="phClr">
+                <a:satMod val="103000"/>
+                <a:lumMod val="102000"/>
+                <a:tint val="94000"/>
+              </a:schemeClr>
+            </a:gs>
+            <a:gs pos="50000">
+              <a:schemeClr val="phClr">
+                <a:satMod val="110000"/>
+                <a:lumMod val="100000"/>
+                <a:shade val="100000"/>
+              </a:schemeClr>
+            </a:gs>
+            <a:gs pos="100000">
+              <a:schemeClr val="phClr">
+                <a:lumMod val="99000"/>
+                <a:satMod val="120000"/>
+                <a:shade val="78000"/>
+              </a:schemeClr>
+            </a:gs>
+          </a:gsLst>
+          <a:lin ang="5400000" scaled="0"/>
+        </a:gradFill>
+      </a:fillStyleLst>
+      <a:lnStyleLst>
+        <a:ln w="12700" cap="flat" cmpd="sng" algn="ctr">
+          <a:solidFill>
+            <a:schemeClr val="phClr"/>
+          </a:solidFill>
+          <a:prstDash val="solid"/>
+          <a:miter lim="800000"/>
+        </a:ln>
+        <a:ln w="19050" cap="flat" cmpd="sng" algn="ctr">
+          <a:solidFill>
+            <a:schemeClr val="phClr"/>
+          </a:solidFill>
+          <a:prstDash val="solid"/>
+          <a:miter lim="800000"/>
+        </a:ln>
+        <a:ln w="25400" cap="flat" cmpd="sng" algn="ctr">
+          <a:solidFill>
+            <a:schemeClr val="phClr"/>
+          </a:solidFill>
+          <a:prstDash val="solid"/>
+          <a:miter lim="800000"/>
+        </a:ln>
+      </a:lnStyleLst>
+      <a:effectStyleLst>
+        <a:effectStyle>
+          <a:effectLst/>
+        </a:effectStyle>
+        <a:effectStyle>
+          <a:effectLst/>
+        </a:effectStyle>
+        <a:effectStyle>
+          <a:effectLst>
+            <a:outerShdw blurRad="57150" dist="19050" dir="5400000" algn="ctr" rotWithShape="0">
+              <a:srgbClr val="000000">
+                <a:alpha val="63000"/>
+              </a:srgbClr>
+            </a:outerShdw>
+          </a:effectLst>
+        </a:effectStyle>
+      </a:effectStyleLst>
+      <a:bgFillStyleLst>
+        <a:solidFill>
+          <a:schemeClr val="phClr"/>
+        </a:solidFill>
+        <a:solidFill>
+          <a:schemeClr val="phClr">
+            <a:tint val="95000"/>
+            <a:satMod val="170000"/>
+          </a:schemeClr>
+        </a:solidFill>
+        <a:gradFill rotWithShape="1">
+          <a:gsLst>
+            <a:gs pos="0">
+              <a:schemeClr val="phClr">
+                <a:tint val="93000"/>
+                <a:satMod val="150000"/>
+                <a:shade val="98000"/>
+                <a:lumMod val="102000"/>
+              </a:schemeClr>
+            </a:gs>
+            <a:gs pos="50000">
+              <a:schemeClr val="phClr">
+                <a:tint val="98000"/>
+                <a:satMod val="130000"/>
+                <a:shade val="90000"/>
+                <a:lumMod val="103000"/>
+              </a:schemeClr>
+            </a:gs>
+            <a:gs pos="100000">
+              <a:schemeClr val="phClr">
+                <a:shade val="63000"/>
+                <a:satMod val="120000"/>
+              </a:schemeClr>
+            </a:gs>
+          </a:gsLst>
+          <a:lin ang="5400000" scaled="0"/>
+        </a:gradFill>
+      </a:bgFillStyleLst>
+    </a:fmtScheme>
+  </a:themeElements>
+  <a:objectDefaults>
+    <a:lnDef>
+      <a:spPr/>
+      <a:bodyPr/>
+      <a:lstStyle/>
+      <a:style>
+        <a:lnRef idx="2">
+          <a:schemeClr val="accent1"/>
+        </a:lnRef>
+        <a:fillRef idx="0">
+          <a:schemeClr val="accent1"/>
+        </a:fillRef>
+        <a:effectRef idx="1">
+          <a:schemeClr val="accent1"/>
+        </a:effectRef>
+        <a:fontRef idx="minor">
+          <a:schemeClr val="tx1"/>
+        </a:fontRef>
+      </a:style>
+    </a:lnDef>
+  </a:objectDefaults>
+  <a:extraClrSchemeLst/>
+  <a:extLst>
+    <a:ext uri="{05A4C25C-085E-4340-85A3-A5531E510DB2}">
+      <thm15:themeFamily xmlns:thm15="http://schemas.microsoft.com/office/thememl/2012/main" name="Office Theme" id="{2E142A2C-CD16-42D6-873A-C26D2A0506FA}" vid="{1BDDFF52-6CD6-40A5-AB3C-68EB2F1E4D0A}"/>
+    </a:ext>
+  </a:extLst>
+</a:theme>
 </file>
--- a/poster/recourse_audit_poster.pptx
+++ b/poster/recourse_audit_poster.pptx
@@ -5307,7 +5307,7 @@
         </p:nvSpPr>
         <p:spPr>
           <a:xfrm>
-            <a:off x="22494240" y="6309360"/>
+            <a:off x="22652992" y="5852160"/>
             <a:ext cx="4663440" cy="1143000"/>
           </a:xfrm>
           <a:prstGeom prst="rect">
@@ -5343,7 +5343,7 @@
         </p:nvSpPr>
         <p:spPr>
           <a:xfrm>
-            <a:off x="22494240" y="7498080"/>
+            <a:off x="22606000" y="7086600"/>
             <a:ext cx="4663440" cy="685800"/>
           </a:xfrm>
           <a:prstGeom prst="rect">
@@ -5379,7 +5379,7 @@
         </p:nvSpPr>
         <p:spPr>
           <a:xfrm>
-            <a:off x="27340560" y="6309360"/>
+            <a:off x="27499312" y="5852160"/>
             <a:ext cx="4663440" cy="1143000"/>
           </a:xfrm>
           <a:prstGeom prst="rect">
@@ -5415,7 +5415,7 @@
         </p:nvSpPr>
         <p:spPr>
           <a:xfrm>
-            <a:off x="27340560" y="7498080"/>
+            <a:off x="27452320" y="7086600"/>
             <a:ext cx="4663440" cy="457200"/>
           </a:xfrm>
           <a:prstGeom prst="rect">
@@ -5451,7 +5451,7 @@
         </p:nvSpPr>
         <p:spPr>
           <a:xfrm>
-            <a:off x="22494240" y="8412480"/>
+            <a:off x="22606000" y="8001000"/>
             <a:ext cx="9692640" cy="457200"/>
           </a:xfrm>
           <a:prstGeom prst="rect">
@@ -5486,13 +5486,13 @@
           <p:nvPr>
             <p:extLst>
               <p:ext uri="{D42A27DB-BD31-4B8C-83A1-F6EECF244321}">
-                <p14:modId xmlns:p14="http://schemas.microsoft.com/office/powerpoint/2010/main" val="1853051912"/>
+                <p14:modId xmlns:p14="http://schemas.microsoft.com/office/powerpoint/2010/main" val="2155017314"/>
               </p:ext>
             </p:extLst>
           </p:nvPr>
         </p:nvGraphicFramePr>
         <p:xfrm>
-          <a:off x="22494240" y="8869680"/>
+          <a:off x="22390100" y="8412480"/>
           <a:ext cx="9692640" cy="1965960"/>
         </p:xfrm>
         <a:graphic>
@@ -5503,47 +5503,13 @@
       </p:graphicFrame>
       <p:sp>
         <p:nvSpPr>
-          <p:cNvPr id="112" name="be older callout"/>
-          <p:cNvSpPr/>
-          <p:nvPr/>
-        </p:nvSpPr>
-        <p:spPr>
-          <a:xfrm>
-            <a:off x="22494240" y="10972800"/>
-            <a:ext cx="9692640" cy="1188720"/>
-          </a:xfrm>
-          <a:prstGeom prst="roundRect">
-            <a:avLst>
-              <a:gd name="adj" fmla="val 11538"/>
-            </a:avLst>
-          </a:prstGeom>
-          <a:solidFill>
-            <a:schemeClr val="bg1"/>
-          </a:solidFill>
-          <a:ln w="12700">
-            <a:solidFill>
-              <a:schemeClr val="bg1"/>
-            </a:solidFill>
-            <a:prstDash val="solid"/>
-          </a:ln>
-        </p:spPr>
-        <p:txBody>
-          <a:bodyPr/>
-          <a:lstStyle/>
-          <a:p>
-            <a:endParaRPr lang="en-US"/>
-          </a:p>
-        </p:txBody>
-      </p:sp>
-      <p:sp>
-        <p:nvSpPr>
           <p:cNvPr id="113" name="Text 108"/>
           <p:cNvSpPr txBox="1"/>
           <p:nvPr/>
         </p:nvSpPr>
         <p:spPr>
           <a:xfrm>
-            <a:off x="22768560" y="11064240"/>
+            <a:off x="22766020" y="10584180"/>
             <a:ext cx="9144000" cy="1005840"/>
           </a:xfrm>
           <a:prstGeom prst="rect">
@@ -5599,7 +5565,7 @@
         </p:nvSpPr>
         <p:spPr>
           <a:xfrm>
-            <a:off x="22494240" y="12573000"/>
+            <a:off x="22630130" y="11983212"/>
             <a:ext cx="731520" cy="731520"/>
           </a:xfrm>
           <a:prstGeom prst="ellipse">
@@ -5619,7 +5585,7 @@
           <a:bodyPr/>
           <a:lstStyle/>
           <a:p>
-            <a:endParaRPr lang="en-US"/>
+            <a:endParaRPr lang="en-US" dirty="0"/>
           </a:p>
         </p:txBody>
       </p:sp>
@@ -5631,7 +5597,7 @@
         </p:nvSpPr>
         <p:spPr>
           <a:xfrm>
-            <a:off x="22494240" y="12573000"/>
+            <a:off x="22630130" y="11983212"/>
             <a:ext cx="731520" cy="731520"/>
           </a:xfrm>
           <a:prstGeom prst="rect">
@@ -5667,7 +5633,7 @@
         </p:nvSpPr>
         <p:spPr>
           <a:xfrm>
-            <a:off x="23454360" y="12527280"/>
+            <a:off x="23590250" y="11937492"/>
             <a:ext cx="8732520" cy="1371600"/>
           </a:xfrm>
           <a:prstGeom prst="rect">
@@ -5707,13 +5673,13 @@
           <p:nvPr>
             <p:extLst>
               <p:ext uri="{D42A27DB-BD31-4B8C-83A1-F6EECF244321}">
-                <p14:modId xmlns:p14="http://schemas.microsoft.com/office/powerpoint/2010/main" val="1579011935"/>
+                <p14:modId xmlns:p14="http://schemas.microsoft.com/office/powerpoint/2010/main" val="1753832704"/>
               </p:ext>
             </p:extLst>
           </p:nvPr>
         </p:nvGraphicFramePr>
         <p:xfrm>
-          <a:off x="22494240" y="14081760"/>
+          <a:off x="22630130" y="13491972"/>
           <a:ext cx="8778240" cy="1508760"/>
         </p:xfrm>
         <a:graphic>
@@ -6388,7 +6354,7 @@
         </p:nvSpPr>
         <p:spPr>
           <a:xfrm>
-            <a:off x="22494240" y="15727680"/>
+            <a:off x="22630130" y="15137892"/>
             <a:ext cx="9692640" cy="731520"/>
           </a:xfrm>
           <a:prstGeom prst="rect">
@@ -6424,7 +6390,7 @@
         </p:nvSpPr>
         <p:spPr>
           <a:xfrm>
-            <a:off x="22494240" y="16596360"/>
+            <a:off x="22632734" y="15941509"/>
             <a:ext cx="731520" cy="731520"/>
           </a:xfrm>
           <a:prstGeom prst="ellipse">
@@ -6456,7 +6422,7 @@
         </p:nvSpPr>
         <p:spPr>
           <a:xfrm>
-            <a:off x="22494240" y="16596360"/>
+            <a:off x="22632734" y="15941509"/>
             <a:ext cx="731520" cy="731520"/>
           </a:xfrm>
           <a:prstGeom prst="rect">
@@ -6492,7 +6458,7 @@
         </p:nvSpPr>
         <p:spPr>
           <a:xfrm>
-            <a:off x="23454360" y="16550640"/>
+            <a:off x="23592854" y="15895789"/>
             <a:ext cx="8732520" cy="822960"/>
           </a:xfrm>
           <a:prstGeom prst="rect">
@@ -6531,7 +6497,7 @@
         </p:nvSpPr>
         <p:spPr>
           <a:xfrm>
-            <a:off x="22494240" y="17647920"/>
+            <a:off x="22632734" y="16993069"/>
             <a:ext cx="9692640" cy="1783080"/>
           </a:xfrm>
           <a:prstGeom prst="rect">
@@ -6988,7 +6954,7 @@
         </p:nvSpPr>
         <p:spPr>
           <a:xfrm>
-            <a:off x="22494240" y="19568160"/>
+            <a:off x="22632734" y="19042381"/>
             <a:ext cx="731520" cy="731520"/>
           </a:xfrm>
           <a:prstGeom prst="ellipse">
@@ -7020,7 +6986,7 @@
         </p:nvSpPr>
         <p:spPr>
           <a:xfrm>
-            <a:off x="22494240" y="19568160"/>
+            <a:off x="22632734" y="19042381"/>
             <a:ext cx="731520" cy="731520"/>
           </a:xfrm>
           <a:prstGeom prst="rect">
@@ -7056,7 +7022,7 @@
         </p:nvSpPr>
         <p:spPr>
           <a:xfrm>
-            <a:off x="23454360" y="19522439"/>
+            <a:off x="23592854" y="18996660"/>
             <a:ext cx="8732520" cy="822960"/>
           </a:xfrm>
           <a:prstGeom prst="rect">
@@ -7095,7 +7061,7 @@
         </p:nvSpPr>
         <p:spPr>
           <a:xfrm>
-            <a:off x="22494240" y="20482560"/>
+            <a:off x="22632734" y="19956781"/>
             <a:ext cx="9692640" cy="868680"/>
           </a:xfrm>
           <a:prstGeom prst="rect">

--- a/poster/recourse_audit_poster.pptx
+++ b/poster/recourse_audit_poster.pptx
@@ -2632,7 +2632,7 @@
             </a:r>
             <a:r>
               <a:rPr lang="en-US" sz="2600" dirty="0" err="1"/>
-              <a:t>do.</a:t>
+              <a:t>do. </a:t>
             </a:r>
             <a:r>
               <a:rPr lang="en-US" sz="2600" dirty="0" err="1">
@@ -5551,7 +5551,7 @@
                   <a:schemeClr val="tx1"/>
                 </a:solidFill>
               </a:rPr>
-              <a:t>“be older” (median: be 4</a:t>
+              <a:t>“be older” (median: be 48)</a:t>
             </a:r>
             <a:endParaRPr lang="en-US" sz="2600" dirty="0"/>
           </a:p>
